--- a/docs/test/stress/e2e-outputs/income_basic_pr01.pptx
+++ b/docs/test/stress/e2e-outputs/income_basic_pr01.pptx
@@ -1658,7 +1658,7 @@
     <p:bg>
       <p:bgPr>
         <a:solidFill>
-          <a:srgbClr val="0F172A"/>
+          <a:srgbClr val="10161F"/>
         </a:solidFill>
       </p:bgPr>
     </p:bg>
@@ -1753,7 +1753,7 @@
           <a:noFill/>
           <a:ln w="10160">
             <a:solidFill>
-              <a:srgbClr val="6B8E00"/>
+              <a:srgbClr val="B98A2E"/>
             </a:solidFill>
             <a:prstDash val="solid"/>
           </a:ln>
@@ -1767,14 +1767,14 @@
         </p:nvSpPr>
         <p:spPr>
           <a:xfrm>
-            <a:off x="7772400" y="0"/>
-            <a:ext cx="4419295" cy="6858000"/>
+            <a:off x="8275320" y="0"/>
+            <a:ext cx="1417320" cy="4041648"/>
           </a:xfrm>
           <a:prstGeom prst="rect">
             <a:avLst/>
           </a:prstGeom>
           <a:solidFill>
-            <a:srgbClr val="6B8E00"/>
+            <a:srgbClr val="1A2030"/>
           </a:solidFill>
           <a:ln/>
         </p:spPr>
@@ -1786,24 +1786,42 @@
           <p:nvPr/>
         </p:nvSpPr>
         <p:spPr>
-          <a:xfrm rot="120000">
-            <a:off x="8412480" y="548640"/>
-            <a:ext cx="3291840" cy="5760720"/>
+          <a:xfrm>
+            <a:off x="9784080" y="868680"/>
+            <a:ext cx="1143000" cy="3172968"/>
           </a:xfrm>
           <a:prstGeom prst="rect">
             <a:avLst/>
           </a:prstGeom>
           <a:solidFill>
-            <a:srgbClr val="0F172A">
-              <a:alpha val="12000"/>
-            </a:srgbClr>
+            <a:srgbClr val="161D2B"/>
           </a:solidFill>
           <a:ln/>
         </p:spPr>
       </p:sp>
       <p:sp>
         <p:nvSpPr>
-          <p:cNvPr id="8" name="Text 6"/>
+          <p:cNvPr id="8" name="Shape 6"/>
+          <p:cNvSpPr/>
+          <p:nvPr/>
+        </p:nvSpPr>
+        <p:spPr>
+          <a:xfrm>
+            <a:off x="11018520" y="1691640"/>
+            <a:ext cx="1170432" cy="2350008"/>
+          </a:xfrm>
+          <a:prstGeom prst="rect">
+            <a:avLst/>
+          </a:prstGeom>
+          <a:solidFill>
+            <a:srgbClr val="2E2718"/>
+          </a:solidFill>
+          <a:ln/>
+        </p:spPr>
+      </p:sp>
+      <p:sp>
+        <p:nvSpPr>
+          <p:cNvPr id="9" name="Text 7"/>
           <p:cNvSpPr/>
           <p:nvPr/>
         </p:nvSpPr>
@@ -1842,7 +1860,7 @@
             <a:r>
               <a:rPr lang="en-US" sz="1500" b="1" dirty="0">
                 <a:solidFill>
-                  <a:srgbClr val="6B8E00"/>
+                  <a:srgbClr val="B98A2E"/>
                 </a:solidFill>
                 <a:latin typeface="Arial" pitchFamily="34" charset="0"/>
                 <a:ea typeface="Arial" pitchFamily="34" charset="-122"/>
@@ -1856,115 +1874,76 @@
       </p:sp>
       <p:sp>
         <p:nvSpPr>
-          <p:cNvPr id="9" name="Text 7"/>
-          <p:cNvSpPr/>
-          <p:nvPr/>
-        </p:nvSpPr>
-        <p:spPr>
-          <a:xfrm>
-            <a:off x="8229600" y="5303520"/>
-            <a:ext cx="3474720" cy="365760"/>
-          </a:xfrm>
-          <a:prstGeom prst="rect">
-            <a:avLst/>
-          </a:prstGeom>
-          <a:noFill/>
-          <a:ln/>
-        </p:spPr>
-        <p:txBody>
-          <a:bodyPr wrap="square" lIns="0" tIns="0" rIns="0" bIns="0" rtlCol="0" anchor="ctr"/>
-          <a:lstStyle/>
-          <a:p>
-            <a:pPr algn="ctr" indent="0" marL="0">
-              <a:buNone/>
-            </a:pPr>
-            <a:r>
-              <a:rPr lang="en-US" sz="1000" dirty="0">
-                <a:solidFill>
-                  <a:srgbClr val="0F172A"/>
+          <p:cNvPr id="10" name="Text 8"/>
+          <p:cNvSpPr/>
+          <p:nvPr/>
+        </p:nvSpPr>
+        <p:spPr>
+          <a:xfrm>
+            <a:off x="566928" y="2029968"/>
+            <a:ext cx="7315200" cy="274320"/>
+          </a:xfrm>
+          <a:prstGeom prst="rect">
+            <a:avLst/>
+          </a:prstGeom>
+          <a:noFill/>
+          <a:ln/>
+        </p:spPr>
+        <p:txBody>
+          <a:bodyPr wrap="square" lIns="0" tIns="0" rIns="0" bIns="0" rtlCol="0" anchor="ctr"/>
+          <a:lstStyle/>
+          <a:p>
+            <a:pPr algn="l" indent="0" marL="0">
+              <a:buNone/>
+            </a:pPr>
+            <a:r>
+              <a:rPr lang="en-US" sz="1000" b="1" spc="250" kern="0" dirty="0">
+                <a:solidFill>
+                  <a:srgbClr val="B98A2E"/>
+                </a:solidFill>
+                <a:latin typeface="Arial" pitchFamily="34" charset="0"/>
+                <a:ea typeface="Arial" pitchFamily="34" charset="-122"/>
+                <a:cs typeface="Arial" pitchFamily="34" charset="-120"/>
+              </a:rPr>
+              <a:t>BASIC IM</a:t>
+            </a:r>
+            <a:endParaRPr lang="en-US" sz="1000" dirty="0"/>
+          </a:p>
+        </p:txBody>
+      </p:sp>
+      <p:sp>
+        <p:nvSpPr>
+          <p:cNvPr id="11" name="Text 9"/>
+          <p:cNvSpPr/>
+          <p:nvPr/>
+        </p:nvSpPr>
+        <p:spPr>
+          <a:xfrm>
+            <a:off x="566928" y="2304288"/>
+            <a:ext cx="7315200" cy="731520"/>
+          </a:xfrm>
+          <a:prstGeom prst="rect">
+            <a:avLst/>
+          </a:prstGeom>
+          <a:noFill/>
+          <a:ln/>
+        </p:spPr>
+        <p:txBody>
+          <a:bodyPr wrap="square" lIns="0" tIns="0" rIns="0" bIns="0" rtlCol="0" anchor="ctr"/>
+          <a:lstStyle/>
+          <a:p>
+            <a:pPr algn="l" indent="0" marL="0">
+              <a:buNone/>
+            </a:pPr>
+            <a:r>
+              <a:rPr lang="en-US" sz="4000" b="1" dirty="0">
+                <a:solidFill>
+                  <a:srgbClr val="FFFFFF"/>
                 </a:solidFill>
                 <a:latin typeface="Pretendard" pitchFamily="34" charset="0"/>
                 <a:ea typeface="Pretendard" pitchFamily="34" charset="-122"/>
                 <a:cs typeface="Pretendard" pitchFamily="34" charset="-120"/>
               </a:rPr>
-              <a:t>상업용 부동산 투자 플랫폼</a:t>
-            </a:r>
-            <a:endParaRPr lang="en-US" sz="1000" dirty="0"/>
-          </a:p>
-        </p:txBody>
-      </p:sp>
-      <p:sp>
-        <p:nvSpPr>
-          <p:cNvPr id="10" name="Text 8"/>
-          <p:cNvSpPr/>
-          <p:nvPr/>
-        </p:nvSpPr>
-        <p:spPr>
-          <a:xfrm>
-            <a:off x="566928" y="2029968"/>
-            <a:ext cx="7315200" cy="274320"/>
-          </a:xfrm>
-          <a:prstGeom prst="rect">
-            <a:avLst/>
-          </a:prstGeom>
-          <a:noFill/>
-          <a:ln/>
-        </p:spPr>
-        <p:txBody>
-          <a:bodyPr wrap="square" lIns="0" tIns="0" rIns="0" bIns="0" rtlCol="0" anchor="ctr"/>
-          <a:lstStyle/>
-          <a:p>
-            <a:pPr algn="l" indent="0" marL="0">
-              <a:buNone/>
-            </a:pPr>
-            <a:r>
-              <a:rPr lang="en-US" sz="1000" b="1" spc="250" kern="0" dirty="0">
-                <a:solidFill>
-                  <a:srgbClr val="6B8E00"/>
-                </a:solidFill>
-                <a:latin typeface="Arial" pitchFamily="34" charset="0"/>
-                <a:ea typeface="Arial" pitchFamily="34" charset="-122"/>
-                <a:cs typeface="Arial" pitchFamily="34" charset="-120"/>
-              </a:rPr>
-              <a:t>BASIC IM</a:t>
-            </a:r>
-            <a:endParaRPr lang="en-US" sz="1000" dirty="0"/>
-          </a:p>
-        </p:txBody>
-      </p:sp>
-      <p:sp>
-        <p:nvSpPr>
-          <p:cNvPr id="11" name="Text 9"/>
-          <p:cNvSpPr/>
-          <p:nvPr/>
-        </p:nvSpPr>
-        <p:spPr>
-          <a:xfrm>
-            <a:off x="566928" y="2304288"/>
-            <a:ext cx="7315200" cy="731520"/>
-          </a:xfrm>
-          <a:prstGeom prst="rect">
-            <a:avLst/>
-          </a:prstGeom>
-          <a:noFill/>
-          <a:ln/>
-        </p:spPr>
-        <p:txBody>
-          <a:bodyPr wrap="square" lIns="0" tIns="0" rIns="0" bIns="0" rtlCol="0" anchor="ctr"/>
-          <a:lstStyle/>
-          <a:p>
-            <a:pPr algn="l" indent="0" marL="0">
-              <a:buNone/>
-            </a:pPr>
-            <a:r>
-              <a:rPr lang="en-US" sz="4000" b="1" dirty="0">
-                <a:solidFill>
-                  <a:srgbClr val="FFFFFF"/>
-                </a:solidFill>
-                <a:latin typeface="Pretendard" pitchFamily="34" charset="0"/>
-                <a:ea typeface="Pretendard" pitchFamily="34" charset="-122"/>
-                <a:cs typeface="Pretendard" pitchFamily="34" charset="-120"/>
-              </a:rPr>
               <a:t>income 포스처 테스트 문서</a:t>
             </a:r>
             <a:endParaRPr lang="en-US" sz="4000" dirty="0"/>
@@ -1998,7 +1977,7 @@
             <a:r>
               <a:rPr lang="en-US" sz="1400" dirty="0">
                 <a:solidFill>
-                  <a:srgbClr val="F1F5F9"/>
+                  <a:srgbClr val="E2E8F0"/>
                 </a:solidFill>
                 <a:latin typeface="Pretendard" pitchFamily="34" charset="0"/>
                 <a:ea typeface="Pretendard" pitchFamily="34" charset="-122"/>
@@ -2027,7 +2006,7 @@
             </a:avLst>
           </a:prstGeom>
           <a:solidFill>
-            <a:srgbClr val="334155"/>
+            <a:srgbClr val="2D3748"/>
           </a:solidFill>
           <a:ln/>
         </p:spPr>
@@ -2088,7 +2067,7 @@
             </a:avLst>
           </a:prstGeom>
           <a:solidFill>
-            <a:srgbClr val="334155"/>
+            <a:srgbClr val="2D3748"/>
           </a:solidFill>
           <a:ln/>
         </p:spPr>
@@ -2149,11 +2128,11 @@
             </a:avLst>
           </a:prstGeom>
           <a:solidFill>
-            <a:srgbClr val="4F6A00"/>
+            <a:srgbClr val="977024"/>
           </a:solidFill>
           <a:ln w="12700">
             <a:solidFill>
-              <a:srgbClr val="6B8E00"/>
+              <a:srgbClr val="B98A2E"/>
             </a:solidFill>
             <a:prstDash val="solid"/>
           </a:ln>
@@ -2186,7 +2165,7 @@
             <a:r>
               <a:rPr lang="en-US" sz="2200" b="1" dirty="0">
                 <a:solidFill>
-                  <a:srgbClr val="E8F5CC"/>
+                  <a:srgbClr val="F3EBDA"/>
                 </a:solidFill>
                 <a:latin typeface="Pretendard" pitchFamily="34" charset="0"/>
                 <a:ea typeface="Pretendard" pitchFamily="34" charset="-122"/>
@@ -2225,7 +2204,7 @@
             <a:r>
               <a:rPr lang="en-US" sz="950" dirty="0">
                 <a:solidFill>
-                  <a:srgbClr val="64748B"/>
+                  <a:srgbClr val="718096"/>
                 </a:solidFill>
                 <a:latin typeface="Pretendard" pitchFamily="34" charset="0"/>
                 <a:ea typeface="Pretendard" pitchFamily="34" charset="-122"/>
@@ -2264,7 +2243,7 @@
             <a:r>
               <a:rPr lang="en-US" sz="850" dirty="0">
                 <a:solidFill>
-                  <a:srgbClr val="64748B"/>
+                  <a:srgbClr val="718096"/>
                 </a:solidFill>
                 <a:latin typeface="Pretendard" pitchFamily="34" charset="0"/>
                 <a:ea typeface="Pretendard" pitchFamily="34" charset="-122"/>
@@ -2284,59 +2263,75 @@
         </p:nvSpPr>
         <p:spPr>
           <a:xfrm>
-            <a:off x="566928" y="6419088"/>
-            <a:ext cx="11057839" cy="201168"/>
-          </a:xfrm>
-          <a:prstGeom prst="rect">
-            <a:avLst/>
-          </a:prstGeom>
-          <a:noFill/>
-          <a:ln/>
-        </p:spPr>
-        <p:txBody>
-          <a:bodyPr wrap="square" lIns="0" tIns="0" rIns="0" bIns="0" rtlCol="0" anchor="ctr"/>
-          <a:lstStyle/>
-          <a:p>
-            <a:pPr algn="ctr" indent="0" marL="0">
-              <a:buNone/>
-            </a:pPr>
-            <a:r>
-              <a:rPr lang="en-US" sz="750" dirty="0">
-                <a:solidFill>
-                  <a:srgbClr val="64748B"/>
+            <a:off x="566928" y="6382512"/>
+            <a:ext cx="7315200" cy="219456"/>
+          </a:xfrm>
+          <a:prstGeom prst="rect">
+            <a:avLst/>
+          </a:prstGeom>
+          <a:noFill/>
+          <a:ln/>
+        </p:spPr>
+        <p:txBody>
+          <a:bodyPr wrap="square" lIns="0" tIns="0" rIns="0" bIns="0" rtlCol="0" anchor="ctr"/>
+          <a:lstStyle/>
+          <a:p>
+            <a:pPr indent="0" marL="0">
+              <a:buNone/>
+            </a:pPr>
+            <a:r>
+              <a:rPr lang="en-US" sz="800" dirty="0">
+                <a:solidFill>
+                  <a:srgbClr val="718096"/>
                 </a:solidFill>
                 <a:latin typeface="Pretendard" pitchFamily="34" charset="0"/>
                 <a:ea typeface="Pretendard" pitchFamily="34" charset="-122"/>
                 <a:cs typeface="Pretendard" pitchFamily="34" charset="-120"/>
               </a:rPr>
-              <a:t>크리딜  ·    ·  1</a:t>
-            </a:r>
-            <a:endParaRPr lang="en-US" sz="750" dirty="0"/>
-          </a:p>
-        </p:txBody>
-      </p:sp>
-      <p:sp>
-        <p:nvSpPr>
-          <p:cNvPr id="22" name="Shape 20"/>
-          <p:cNvSpPr/>
-          <p:nvPr/>
-        </p:nvSpPr>
-        <p:spPr>
-          <a:xfrm>
-            <a:off x="4437172" y="6382512"/>
-            <a:ext cx="3317352" cy="0"/>
-          </a:xfrm>
-          <a:prstGeom prst="line">
-            <a:avLst/>
-          </a:prstGeom>
-          <a:noFill/>
-          <a:ln w="6350">
-            <a:solidFill>
-              <a:srgbClr val="6B8E00"/>
-            </a:solidFill>
-            <a:prstDash val="solid"/>
-          </a:ln>
-        </p:spPr>
+              <a:t>크리딜   |   </a:t>
+            </a:r>
+            <a:endParaRPr lang="en-US" sz="800" dirty="0"/>
+          </a:p>
+        </p:txBody>
+      </p:sp>
+      <p:sp>
+        <p:nvSpPr>
+          <p:cNvPr id="22" name="Text 20"/>
+          <p:cNvSpPr/>
+          <p:nvPr/>
+        </p:nvSpPr>
+        <p:spPr>
+          <a:xfrm>
+            <a:off x="10710367" y="6382512"/>
+            <a:ext cx="914400" cy="219456"/>
+          </a:xfrm>
+          <a:prstGeom prst="rect">
+            <a:avLst/>
+          </a:prstGeom>
+          <a:noFill/>
+          <a:ln/>
+        </p:spPr>
+        <p:txBody>
+          <a:bodyPr wrap="square" lIns="0" tIns="0" rIns="0" bIns="0" rtlCol="0" anchor="ctr"/>
+          <a:lstStyle/>
+          <a:p>
+            <a:pPr algn="r" indent="0" marL="0">
+              <a:buNone/>
+            </a:pPr>
+            <a:r>
+              <a:rPr lang="en-US" sz="900" b="1" dirty="0">
+                <a:solidFill>
+                  <a:srgbClr val="B98A2E"/>
+                </a:solidFill>
+                <a:latin typeface="Arial" pitchFamily="34" charset="0"/>
+                <a:ea typeface="Arial" pitchFamily="34" charset="-122"/>
+                <a:cs typeface="Arial" pitchFamily="34" charset="-120"/>
+              </a:rPr>
+              <a:t>1</a:t>
+            </a:r>
+            <a:endParaRPr lang="en-US" sz="900" dirty="0"/>
+          </a:p>
+        </p:txBody>
       </p:sp>
     </p:spTree>
   </p:cSld>
@@ -2352,7 +2347,7 @@
     <p:bg>
       <p:bgPr>
         <a:solidFill>
-          <a:srgbClr val="0F172A"/>
+          <a:srgbClr val="10161F"/>
         </a:solidFill>
       </p:bgPr>
     </p:bg>
@@ -2378,14 +2373,14 @@
         </p:nvSpPr>
         <p:spPr>
           <a:xfrm>
-            <a:off x="566928" y="384048"/>
-            <a:ext cx="45720" cy="566928"/>
-          </a:xfrm>
-          <a:prstGeom prst="rect">
+            <a:off x="566928" y="457200"/>
+            <a:ext cx="384048" cy="384048"/>
+          </a:xfrm>
+          <a:prstGeom prst="ellipse">
             <a:avLst/>
           </a:prstGeom>
           <a:solidFill>
-            <a:srgbClr val="6B8E00"/>
+            <a:srgbClr val="B98A2E"/>
           </a:solidFill>
           <a:ln/>
         </p:spPr>
@@ -2398,32 +2393,71 @@
         </p:nvSpPr>
         <p:spPr>
           <a:xfrm>
-            <a:off x="749808" y="384048"/>
-            <a:ext cx="10874959" cy="182880"/>
-          </a:xfrm>
-          <a:prstGeom prst="rect">
-            <a:avLst/>
-          </a:prstGeom>
-          <a:noFill/>
-          <a:ln/>
-        </p:spPr>
-        <p:txBody>
-          <a:bodyPr wrap="square" lIns="0" tIns="0" rIns="0" bIns="0" rtlCol="0" anchor="ctr"/>
-          <a:lstStyle/>
-          <a:p>
-            <a:pPr indent="0" marL="0">
-              <a:buNone/>
-            </a:pPr>
-            <a:r>
-              <a:rPr lang="en-US" sz="950" b="1" spc="200" kern="0" dirty="0">
-                <a:solidFill>
-                  <a:srgbClr val="6B8E00"/>
+            <a:off x="566928" y="457200"/>
+            <a:ext cx="384048" cy="384048"/>
+          </a:xfrm>
+          <a:prstGeom prst="rect">
+            <a:avLst/>
+          </a:prstGeom>
+          <a:noFill/>
+          <a:ln/>
+        </p:spPr>
+        <p:txBody>
+          <a:bodyPr wrap="square" lIns="0" tIns="0" rIns="0" bIns="0" rtlCol="0" anchor="ctr"/>
+          <a:lstStyle/>
+          <a:p>
+            <a:pPr algn="ctr" indent="0" marL="0">
+              <a:buNone/>
+            </a:pPr>
+            <a:r>
+              <a:rPr lang="en-US" sz="1300" b="1" dirty="0">
+                <a:solidFill>
+                  <a:srgbClr val="FFFFFF"/>
                 </a:solidFill>
                 <a:latin typeface="Arial" pitchFamily="34" charset="0"/>
                 <a:ea typeface="Arial" pitchFamily="34" charset="-122"/>
                 <a:cs typeface="Arial" pitchFamily="34" charset="-120"/>
               </a:rPr>
-              <a:t>10  Disclaimer</a:t>
+              <a:t>10</a:t>
+            </a:r>
+            <a:endParaRPr lang="en-US" sz="1300" dirty="0"/>
+          </a:p>
+        </p:txBody>
+      </p:sp>
+      <p:sp>
+        <p:nvSpPr>
+          <p:cNvPr id="4" name="Text 2"/>
+          <p:cNvSpPr/>
+          <p:nvPr/>
+        </p:nvSpPr>
+        <p:spPr>
+          <a:xfrm>
+            <a:off x="1133856" y="457200"/>
+            <a:ext cx="10490911" cy="182880"/>
+          </a:xfrm>
+          <a:prstGeom prst="rect">
+            <a:avLst/>
+          </a:prstGeom>
+          <a:noFill/>
+          <a:ln/>
+        </p:spPr>
+        <p:txBody>
+          <a:bodyPr wrap="square" lIns="0" tIns="0" rIns="0" bIns="0" rtlCol="0" anchor="ctr"/>
+          <a:lstStyle/>
+          <a:p>
+            <a:pPr indent="0" marL="0">
+              <a:buNone/>
+            </a:pPr>
+            <a:r>
+              <a:rPr lang="en-US" sz="950" b="1" spc="200" kern="0" dirty="0">
+                <a:solidFill>
+                  <a:srgbClr val="B98A2E"/>
+                </a:solidFill>
+                <a:latin typeface="Arial" pitchFamily="34" charset="0"/>
+                <a:ea typeface="Arial" pitchFamily="34" charset="-122"/>
+                <a:cs typeface="Arial" pitchFamily="34" charset="-120"/>
+              </a:rPr>
+              <a:t>Disclaimer</a:t>
             </a:r>
             <a:endParaRPr lang="en-US" sz="950" dirty="0"/>
           </a:p>
@@ -2431,14 +2465,14 @@
       </p:sp>
       <p:sp>
         <p:nvSpPr>
-          <p:cNvPr id="4" name="Text 2"/>
-          <p:cNvSpPr/>
-          <p:nvPr/>
-        </p:nvSpPr>
-        <p:spPr>
-          <a:xfrm>
-            <a:off x="749808" y="566928"/>
-            <a:ext cx="10874959" cy="384048"/>
+          <p:cNvPr id="5" name="Text 3"/>
+          <p:cNvSpPr/>
+          <p:nvPr/>
+        </p:nvSpPr>
+        <p:spPr>
+          <a:xfrm>
+            <a:off x="1133856" y="658368"/>
+            <a:ext cx="10490911" cy="420624"/>
           </a:xfrm>
           <a:prstGeom prst="rect">
             <a:avLst/>
@@ -2454,7 +2488,7 @@
               <a:buNone/>
             </a:pPr>
             <a:r>
-              <a:rPr lang="en-US" sz="2200" b="1" dirty="0">
+              <a:rPr lang="en-US" sz="2400" b="1" dirty="0">
                 <a:solidFill>
                   <a:srgbClr val="FFFFFF"/>
                 </a:solidFill>
@@ -2464,20 +2498,101 @@
               </a:rPr>
               <a:t>표기 기준 및 면책</a:t>
             </a:r>
-            <a:endParaRPr lang="en-US" sz="2200" dirty="0"/>
-          </a:p>
-        </p:txBody>
-      </p:sp>
-      <p:sp>
-        <p:nvSpPr>
-          <p:cNvPr id="5" name="Text 3"/>
-          <p:cNvSpPr/>
-          <p:nvPr/>
-        </p:nvSpPr>
-        <p:spPr>
-          <a:xfrm>
-            <a:off x="566928" y="1517904"/>
-            <a:ext cx="5486400" cy="237744"/>
+            <a:endParaRPr lang="en-US" sz="2400" dirty="0"/>
+          </a:p>
+        </p:txBody>
+      </p:sp>
+      <p:sp>
+        <p:nvSpPr>
+          <p:cNvPr id="6" name="Shape 4"/>
+          <p:cNvSpPr/>
+          <p:nvPr/>
+        </p:nvSpPr>
+        <p:spPr>
+          <a:xfrm>
+            <a:off x="566928" y="1463040"/>
+            <a:ext cx="3588410" cy="658368"/>
+          </a:xfrm>
+          <a:prstGeom prst="roundRect">
+            <a:avLst>
+              <a:gd name="adj" fmla="val 5556"/>
+            </a:avLst>
+          </a:prstGeom>
+          <a:solidFill>
+            <a:srgbClr val="2D3748"/>
+          </a:solidFill>
+          <a:ln/>
+        </p:spPr>
+      </p:sp>
+      <p:sp>
+        <p:nvSpPr>
+          <p:cNvPr id="7" name="Shape 5"/>
+          <p:cNvSpPr/>
+          <p:nvPr/>
+        </p:nvSpPr>
+        <p:spPr>
+          <a:xfrm>
+            <a:off x="676656" y="1572768"/>
+            <a:ext cx="438912" cy="438912"/>
+          </a:xfrm>
+          <a:prstGeom prst="ellipse">
+            <a:avLst/>
+          </a:prstGeom>
+          <a:solidFill>
+            <a:srgbClr val="B98A2E"/>
+          </a:solidFill>
+          <a:ln/>
+        </p:spPr>
+      </p:sp>
+      <p:sp>
+        <p:nvSpPr>
+          <p:cNvPr id="8" name="Text 6"/>
+          <p:cNvSpPr/>
+          <p:nvPr/>
+        </p:nvSpPr>
+        <p:spPr>
+          <a:xfrm>
+            <a:off x="676656" y="1572768"/>
+            <a:ext cx="438912" cy="438912"/>
+          </a:xfrm>
+          <a:prstGeom prst="rect">
+            <a:avLst/>
+          </a:prstGeom>
+          <a:noFill/>
+          <a:ln/>
+        </p:spPr>
+        <p:txBody>
+          <a:bodyPr wrap="square" lIns="0" tIns="0" rIns="0" bIns="0" rtlCol="0" anchor="ctr"/>
+          <a:lstStyle/>
+          <a:p>
+            <a:pPr algn="ctr" indent="0" marL="0">
+              <a:buNone/>
+            </a:pPr>
+            <a:r>
+              <a:rPr lang="en-US" sz="1400" b="1" dirty="0">
+                <a:solidFill>
+                  <a:srgbClr val="FFFFFF"/>
+                </a:solidFill>
+                <a:latin typeface="Arial" pitchFamily="34" charset="0"/>
+                <a:ea typeface="Arial" pitchFamily="34" charset="-122"/>
+                <a:cs typeface="Arial" pitchFamily="34" charset="-120"/>
+              </a:rPr>
+              <a:t>01</a:t>
+            </a:r>
+            <a:endParaRPr lang="en-US" sz="1400" dirty="0"/>
+          </a:p>
+        </p:txBody>
+      </p:sp>
+      <p:sp>
+        <p:nvSpPr>
+          <p:cNvPr id="9" name="Text 7"/>
+          <p:cNvSpPr/>
+          <p:nvPr/>
+        </p:nvSpPr>
+        <p:spPr>
+          <a:xfrm>
+            <a:off x="1225296" y="1554480"/>
+            <a:ext cx="2820314" cy="237744"/>
           </a:xfrm>
           <a:prstGeom prst="rect">
             <a:avLst/>
@@ -2501,7 +2616,7 @@
                 <a:ea typeface="Pretendard" pitchFamily="34" charset="-122"/>
                 <a:cs typeface="Pretendard" pitchFamily="34" charset="-120"/>
               </a:rPr>
-              <a:t>데이터 출처 표기</a:t>
+              <a:t>관심 표명</a:t>
             </a:r>
             <a:endParaRPr lang="en-US" sz="1100" dirty="0"/>
           </a:p>
@@ -2509,130 +2624,150 @@
       </p:sp>
       <p:sp>
         <p:nvSpPr>
-          <p:cNvPr id="6" name="Shape 4"/>
-          <p:cNvSpPr/>
-          <p:nvPr/>
-        </p:nvSpPr>
-        <p:spPr>
-          <a:xfrm>
-            <a:off x="566928" y="1847088"/>
-            <a:ext cx="1417320" cy="347472"/>
-          </a:xfrm>
-          <a:prstGeom prst="roundRect">
-            <a:avLst>
-              <a:gd name="adj" fmla="val 10526"/>
-            </a:avLst>
-          </a:prstGeom>
-          <a:solidFill>
-            <a:srgbClr val="334155"/>
-          </a:solidFill>
-          <a:ln/>
-        </p:spPr>
-      </p:sp>
-      <p:sp>
-        <p:nvSpPr>
-          <p:cNvPr id="7" name="Text 5"/>
-          <p:cNvSpPr/>
-          <p:nvPr/>
-        </p:nvSpPr>
-        <p:spPr>
-          <a:xfrm>
-            <a:off x="566928" y="1847088"/>
-            <a:ext cx="1417320" cy="347472"/>
-          </a:xfrm>
-          <a:prstGeom prst="rect">
-            <a:avLst/>
-          </a:prstGeom>
-          <a:noFill/>
-          <a:ln/>
-        </p:spPr>
-        <p:txBody>
-          <a:bodyPr wrap="square" lIns="0" tIns="0" rIns="0" bIns="0" rtlCol="0" anchor="ctr"/>
-          <a:lstStyle/>
-          <a:p>
-            <a:pPr algn="ctr" indent="0" marL="0">
-              <a:buNone/>
-            </a:pPr>
-            <a:r>
-              <a:rPr lang="en-US" sz="950" b="1" dirty="0">
-                <a:solidFill>
-                  <a:srgbClr val="FFFFFF"/>
+          <p:cNvPr id="10" name="Text 8"/>
+          <p:cNvSpPr/>
+          <p:nvPr/>
+        </p:nvSpPr>
+        <p:spPr>
+          <a:xfrm>
+            <a:off x="1225296" y="1792224"/>
+            <a:ext cx="2820314" cy="256032"/>
+          </a:xfrm>
+          <a:prstGeom prst="rect">
+            <a:avLst/>
+          </a:prstGeom>
+          <a:noFill/>
+          <a:ln/>
+        </p:spPr>
+        <p:txBody>
+          <a:bodyPr wrap="square" lIns="0" tIns="0" rIns="0" bIns="0" rtlCol="0" anchor="t"/>
+          <a:lstStyle/>
+          <a:p>
+            <a:pPr indent="0" marL="0">
+              <a:buNone/>
+            </a:pPr>
+            <a:r>
+              <a:rPr lang="en-US" sz="850" dirty="0">
+                <a:solidFill>
+                  <a:srgbClr val="A0AEC0"/>
                 </a:solidFill>
                 <a:latin typeface="Pretendard" pitchFamily="34" charset="0"/>
                 <a:ea typeface="Pretendard" pitchFamily="34" charset="-122"/>
                 <a:cs typeface="Pretendard" pitchFamily="34" charset="-120"/>
               </a:rPr>
-              <a:t>✓ 공부확인</a:t>
-            </a:r>
-            <a:endParaRPr lang="en-US" sz="950" dirty="0"/>
-          </a:p>
-        </p:txBody>
-      </p:sp>
-      <p:sp>
-        <p:nvSpPr>
-          <p:cNvPr id="8" name="Text 6"/>
-          <p:cNvSpPr/>
-          <p:nvPr/>
-        </p:nvSpPr>
-        <p:spPr>
-          <a:xfrm>
-            <a:off x="2139696" y="1828800"/>
-            <a:ext cx="3566160" cy="420624"/>
-          </a:xfrm>
-          <a:prstGeom prst="rect">
-            <a:avLst/>
-          </a:prstGeom>
-          <a:noFill/>
-          <a:ln/>
-        </p:spPr>
-        <p:txBody>
-          <a:bodyPr wrap="square" lIns="0" tIns="0" rIns="0" bIns="0" rtlCol="0" anchor="ctr"/>
-          <a:lstStyle/>
-          <a:p>
-            <a:pPr indent="0" marL="0">
-              <a:buNone/>
-            </a:pPr>
-            <a:r>
-              <a:rPr lang="en-US" sz="1000" dirty="0">
-                <a:solidFill>
-                  <a:srgbClr val="F1F5F9"/>
+              <a:t>담당 중개사에게 초기 관심 표명 및 상담 요청</a:t>
+            </a:r>
+            <a:endParaRPr lang="en-US" sz="850" dirty="0"/>
+          </a:p>
+        </p:txBody>
+      </p:sp>
+      <p:sp>
+        <p:nvSpPr>
+          <p:cNvPr id="11" name="Text 9"/>
+          <p:cNvSpPr/>
+          <p:nvPr/>
+        </p:nvSpPr>
+        <p:spPr>
+          <a:xfrm>
+            <a:off x="4155338" y="1600200"/>
+            <a:ext cx="146304" cy="384048"/>
+          </a:xfrm>
+          <a:prstGeom prst="rect">
+            <a:avLst/>
+          </a:prstGeom>
+          <a:noFill/>
+          <a:ln/>
+        </p:spPr>
+        <p:txBody>
+          <a:bodyPr wrap="square" lIns="0" tIns="0" rIns="0" bIns="0" rtlCol="0" anchor="ctr"/>
+          <a:lstStyle/>
+          <a:p>
+            <a:pPr algn="ctr" indent="0" marL="0">
+              <a:buNone/>
+            </a:pPr>
+            <a:r>
+              <a:rPr lang="en-US" sz="1600" dirty="0">
+                <a:solidFill>
+                  <a:srgbClr val="B98A2E"/>
                 </a:solidFill>
                 <a:latin typeface="Pretendard" pitchFamily="34" charset="0"/>
                 <a:ea typeface="Pretendard" pitchFamily="34" charset="-122"/>
                 <a:cs typeface="Pretendard" pitchFamily="34" charset="-120"/>
               </a:rPr>
-              <a:t>등기부·대장 등 공적 장부 직접 확인</a:t>
-            </a:r>
-            <a:endParaRPr lang="en-US" sz="1000" dirty="0"/>
-          </a:p>
-        </p:txBody>
-      </p:sp>
-      <p:sp>
-        <p:nvSpPr>
-          <p:cNvPr id="9" name="Text 7"/>
-          <p:cNvSpPr/>
-          <p:nvPr/>
-        </p:nvSpPr>
-        <p:spPr>
-          <a:xfrm>
-            <a:off x="5504688" y="1847088"/>
-            <a:ext cx="731520" cy="292608"/>
-          </a:xfrm>
-          <a:prstGeom prst="rect">
-            <a:avLst/>
-          </a:prstGeom>
-          <a:noFill/>
-          <a:ln/>
-        </p:spPr>
-        <p:txBody>
-          <a:bodyPr wrap="square" lIns="0" tIns="0" rIns="0" bIns="0" rtlCol="0" anchor="ctr"/>
-          <a:lstStyle/>
-          <a:p>
-            <a:pPr algn="r" indent="0" marL="0">
-              <a:buNone/>
-            </a:pPr>
-            <a:r>
-              <a:rPr lang="en-US" sz="1200" b="1" dirty="0">
+              <a:t>→</a:t>
+            </a:r>
+            <a:endParaRPr lang="en-US" sz="1600" dirty="0"/>
+          </a:p>
+        </p:txBody>
+      </p:sp>
+      <p:sp>
+        <p:nvSpPr>
+          <p:cNvPr id="12" name="Shape 10"/>
+          <p:cNvSpPr/>
+          <p:nvPr/>
+        </p:nvSpPr>
+        <p:spPr>
+          <a:xfrm>
+            <a:off x="4301642" y="1463040"/>
+            <a:ext cx="3588410" cy="658368"/>
+          </a:xfrm>
+          <a:prstGeom prst="roundRect">
+            <a:avLst>
+              <a:gd name="adj" fmla="val 5556"/>
+            </a:avLst>
+          </a:prstGeom>
+          <a:solidFill>
+            <a:srgbClr val="2D3748"/>
+          </a:solidFill>
+          <a:ln/>
+        </p:spPr>
+      </p:sp>
+      <p:sp>
+        <p:nvSpPr>
+          <p:cNvPr id="13" name="Shape 11"/>
+          <p:cNvSpPr/>
+          <p:nvPr/>
+        </p:nvSpPr>
+        <p:spPr>
+          <a:xfrm>
+            <a:off x="4411370" y="1572768"/>
+            <a:ext cx="438912" cy="438912"/>
+          </a:xfrm>
+          <a:prstGeom prst="ellipse">
+            <a:avLst/>
+          </a:prstGeom>
+          <a:solidFill>
+            <a:srgbClr val="B98A2E"/>
+          </a:solidFill>
+          <a:ln/>
+        </p:spPr>
+      </p:sp>
+      <p:sp>
+        <p:nvSpPr>
+          <p:cNvPr id="14" name="Text 12"/>
+          <p:cNvSpPr/>
+          <p:nvPr/>
+        </p:nvSpPr>
+        <p:spPr>
+          <a:xfrm>
+            <a:off x="4411370" y="1572768"/>
+            <a:ext cx="438912" cy="438912"/>
+          </a:xfrm>
+          <a:prstGeom prst="rect">
+            <a:avLst/>
+          </a:prstGeom>
+          <a:noFill/>
+          <a:ln/>
+        </p:spPr>
+        <p:txBody>
+          <a:bodyPr wrap="square" lIns="0" tIns="0" rIns="0" bIns="0" rtlCol="0" anchor="ctr"/>
+          <a:lstStyle/>
+          <a:p>
+            <a:pPr algn="ctr" indent="0" marL="0">
+              <a:buNone/>
+            </a:pPr>
+            <a:r>
+              <a:rPr lang="en-US" sz="1400" b="1" dirty="0">
                 <a:solidFill>
                   <a:srgbClr val="FFFFFF"/>
                 </a:solidFill>
@@ -2640,60 +2775,38 @@
                 <a:ea typeface="Arial" pitchFamily="34" charset="-122"/>
                 <a:cs typeface="Arial" pitchFamily="34" charset="-120"/>
               </a:rPr>
-              <a:t>1.00</a:t>
-            </a:r>
-            <a:endParaRPr lang="en-US" sz="1200" dirty="0"/>
-          </a:p>
-        </p:txBody>
-      </p:sp>
-      <p:sp>
-        <p:nvSpPr>
-          <p:cNvPr id="10" name="Shape 8"/>
-          <p:cNvSpPr/>
-          <p:nvPr/>
-        </p:nvSpPr>
-        <p:spPr>
-          <a:xfrm>
-            <a:off x="566928" y="2505456"/>
-            <a:ext cx="1417320" cy="347472"/>
-          </a:xfrm>
-          <a:prstGeom prst="roundRect">
-            <a:avLst>
-              <a:gd name="adj" fmla="val 10526"/>
-            </a:avLst>
-          </a:prstGeom>
-          <a:solidFill>
-            <a:srgbClr val="334155"/>
-          </a:solidFill>
-          <a:ln/>
-        </p:spPr>
-      </p:sp>
-      <p:sp>
-        <p:nvSpPr>
-          <p:cNvPr id="11" name="Text 9"/>
-          <p:cNvSpPr/>
-          <p:nvPr/>
-        </p:nvSpPr>
-        <p:spPr>
-          <a:xfrm>
-            <a:off x="566928" y="2505456"/>
-            <a:ext cx="1417320" cy="347472"/>
-          </a:xfrm>
-          <a:prstGeom prst="rect">
-            <a:avLst/>
-          </a:prstGeom>
-          <a:noFill/>
-          <a:ln/>
-        </p:spPr>
-        <p:txBody>
-          <a:bodyPr wrap="square" lIns="0" tIns="0" rIns="0" bIns="0" rtlCol="0" anchor="ctr"/>
-          <a:lstStyle/>
-          <a:p>
-            <a:pPr algn="ctr" indent="0" marL="0">
-              <a:buNone/>
-            </a:pPr>
-            <a:r>
-              <a:rPr lang="en-US" sz="950" b="1" dirty="0">
+              <a:t>02</a:t>
+            </a:r>
+            <a:endParaRPr lang="en-US" sz="1400" dirty="0"/>
+          </a:p>
+        </p:txBody>
+      </p:sp>
+      <p:sp>
+        <p:nvSpPr>
+          <p:cNvPr id="15" name="Text 13"/>
+          <p:cNvSpPr/>
+          <p:nvPr/>
+        </p:nvSpPr>
+        <p:spPr>
+          <a:xfrm>
+            <a:off x="4960010" y="1554480"/>
+            <a:ext cx="2820314" cy="237744"/>
+          </a:xfrm>
+          <a:prstGeom prst="rect">
+            <a:avLst/>
+          </a:prstGeom>
+          <a:noFill/>
+          <a:ln/>
+        </p:spPr>
+        <p:txBody>
+          <a:bodyPr wrap="square" lIns="0" tIns="0" rIns="0" bIns="0" rtlCol="0" anchor="ctr"/>
+          <a:lstStyle/>
+          <a:p>
+            <a:pPr indent="0" marL="0">
+              <a:buNone/>
+            </a:pPr>
+            <a:r>
+              <a:rPr lang="en-US" sz="1100" b="1" dirty="0">
                 <a:solidFill>
                   <a:srgbClr val="FFFFFF"/>
                 </a:solidFill>
@@ -2701,77 +2814,158 @@
                 <a:ea typeface="Pretendard" pitchFamily="34" charset="-122"/>
                 <a:cs typeface="Pretendard" pitchFamily="34" charset="-120"/>
               </a:rPr>
-              <a:t>★ 전문가검증</a:t>
-            </a:r>
-            <a:endParaRPr lang="en-US" sz="950" dirty="0"/>
-          </a:p>
-        </p:txBody>
-      </p:sp>
-      <p:sp>
-        <p:nvSpPr>
-          <p:cNvPr id="12" name="Text 10"/>
-          <p:cNvSpPr/>
-          <p:nvPr/>
-        </p:nvSpPr>
-        <p:spPr>
-          <a:xfrm>
-            <a:off x="2139696" y="2487168"/>
-            <a:ext cx="3566160" cy="420624"/>
-          </a:xfrm>
-          <a:prstGeom prst="rect">
-            <a:avLst/>
-          </a:prstGeom>
-          <a:noFill/>
-          <a:ln/>
-        </p:spPr>
-        <p:txBody>
-          <a:bodyPr wrap="square" lIns="0" tIns="0" rIns="0" bIns="0" rtlCol="0" anchor="ctr"/>
+              <a:t>NDA 체결</a:t>
+            </a:r>
+            <a:endParaRPr lang="en-US" sz="1100" dirty="0"/>
+          </a:p>
+        </p:txBody>
+      </p:sp>
+      <p:sp>
+        <p:nvSpPr>
+          <p:cNvPr id="16" name="Text 14"/>
+          <p:cNvSpPr/>
+          <p:nvPr/>
+        </p:nvSpPr>
+        <p:spPr>
+          <a:xfrm>
+            <a:off x="4960010" y="1792224"/>
+            <a:ext cx="2820314" cy="256032"/>
+          </a:xfrm>
+          <a:prstGeom prst="rect">
+            <a:avLst/>
+          </a:prstGeom>
+          <a:noFill/>
+          <a:ln/>
+        </p:spPr>
+        <p:txBody>
+          <a:bodyPr wrap="square" lIns="0" tIns="0" rIns="0" bIns="0" rtlCol="0" anchor="t"/>
           <a:lstStyle/>
           <a:p>
             <a:pPr indent="0" marL="0">
               <a:buNone/>
             </a:pPr>
             <a:r>
-              <a:rPr lang="en-US" sz="1000" dirty="0">
-                <a:solidFill>
-                  <a:srgbClr val="F1F5F9"/>
+              <a:rPr lang="en-US" sz="850" dirty="0">
+                <a:solidFill>
+                  <a:srgbClr val="A0AEC0"/>
                 </a:solidFill>
                 <a:latin typeface="Pretendard" pitchFamily="34" charset="0"/>
                 <a:ea typeface="Pretendard" pitchFamily="34" charset="-122"/>
                 <a:cs typeface="Pretendard" pitchFamily="34" charset="-120"/>
               </a:rPr>
-              <a:t>세무사·감정평가사 등 전문가 확인</a:t>
-            </a:r>
-            <a:endParaRPr lang="en-US" sz="1000" dirty="0"/>
-          </a:p>
-        </p:txBody>
-      </p:sp>
-      <p:sp>
-        <p:nvSpPr>
-          <p:cNvPr id="13" name="Text 11"/>
-          <p:cNvSpPr/>
-          <p:nvPr/>
-        </p:nvSpPr>
-        <p:spPr>
-          <a:xfrm>
-            <a:off x="5504688" y="2505456"/>
-            <a:ext cx="731520" cy="292608"/>
-          </a:xfrm>
-          <a:prstGeom prst="rect">
-            <a:avLst/>
-          </a:prstGeom>
-          <a:noFill/>
-          <a:ln/>
-        </p:spPr>
-        <p:txBody>
-          <a:bodyPr wrap="square" lIns="0" tIns="0" rIns="0" bIns="0" rtlCol="0" anchor="ctr"/>
-          <a:lstStyle/>
-          <a:p>
-            <a:pPr algn="r" indent="0" marL="0">
-              <a:buNone/>
-            </a:pPr>
-            <a:r>
-              <a:rPr lang="en-US" sz="1200" b="1" dirty="0">
+              <a:t>비밀유지계약 후 상세 임대차·재무 자료 제공</a:t>
+            </a:r>
+            <a:endParaRPr lang="en-US" sz="850" dirty="0"/>
+          </a:p>
+        </p:txBody>
+      </p:sp>
+      <p:sp>
+        <p:nvSpPr>
+          <p:cNvPr id="17" name="Text 15"/>
+          <p:cNvSpPr/>
+          <p:nvPr/>
+        </p:nvSpPr>
+        <p:spPr>
+          <a:xfrm>
+            <a:off x="7890053" y="1600200"/>
+            <a:ext cx="146304" cy="384048"/>
+          </a:xfrm>
+          <a:prstGeom prst="rect">
+            <a:avLst/>
+          </a:prstGeom>
+          <a:noFill/>
+          <a:ln/>
+        </p:spPr>
+        <p:txBody>
+          <a:bodyPr wrap="square" lIns="0" tIns="0" rIns="0" bIns="0" rtlCol="0" anchor="ctr"/>
+          <a:lstStyle/>
+          <a:p>
+            <a:pPr algn="ctr" indent="0" marL="0">
+              <a:buNone/>
+            </a:pPr>
+            <a:r>
+              <a:rPr lang="en-US" sz="1600" dirty="0">
+                <a:solidFill>
+                  <a:srgbClr val="B98A2E"/>
+                </a:solidFill>
+                <a:latin typeface="Pretendard" pitchFamily="34" charset="0"/>
+                <a:ea typeface="Pretendard" pitchFamily="34" charset="-122"/>
+                <a:cs typeface="Pretendard" pitchFamily="34" charset="-120"/>
+              </a:rPr>
+              <a:t>→</a:t>
+            </a:r>
+            <a:endParaRPr lang="en-US" sz="1600" dirty="0"/>
+          </a:p>
+        </p:txBody>
+      </p:sp>
+      <p:sp>
+        <p:nvSpPr>
+          <p:cNvPr id="18" name="Shape 16"/>
+          <p:cNvSpPr/>
+          <p:nvPr/>
+        </p:nvSpPr>
+        <p:spPr>
+          <a:xfrm>
+            <a:off x="8036357" y="1463040"/>
+            <a:ext cx="3588410" cy="658368"/>
+          </a:xfrm>
+          <a:prstGeom prst="roundRect">
+            <a:avLst>
+              <a:gd name="adj" fmla="val 5556"/>
+            </a:avLst>
+          </a:prstGeom>
+          <a:solidFill>
+            <a:srgbClr val="2D3748"/>
+          </a:solidFill>
+          <a:ln/>
+        </p:spPr>
+      </p:sp>
+      <p:sp>
+        <p:nvSpPr>
+          <p:cNvPr id="19" name="Shape 17"/>
+          <p:cNvSpPr/>
+          <p:nvPr/>
+        </p:nvSpPr>
+        <p:spPr>
+          <a:xfrm>
+            <a:off x="8146085" y="1572768"/>
+            <a:ext cx="438912" cy="438912"/>
+          </a:xfrm>
+          <a:prstGeom prst="ellipse">
+            <a:avLst/>
+          </a:prstGeom>
+          <a:solidFill>
+            <a:srgbClr val="B98A2E"/>
+          </a:solidFill>
+          <a:ln/>
+        </p:spPr>
+      </p:sp>
+      <p:sp>
+        <p:nvSpPr>
+          <p:cNvPr id="20" name="Text 18"/>
+          <p:cNvSpPr/>
+          <p:nvPr/>
+        </p:nvSpPr>
+        <p:spPr>
+          <a:xfrm>
+            <a:off x="8146085" y="1572768"/>
+            <a:ext cx="438912" cy="438912"/>
+          </a:xfrm>
+          <a:prstGeom prst="rect">
+            <a:avLst/>
+          </a:prstGeom>
+          <a:noFill/>
+          <a:ln/>
+        </p:spPr>
+        <p:txBody>
+          <a:bodyPr wrap="square" lIns="0" tIns="0" rIns="0" bIns="0" rtlCol="0" anchor="ctr"/>
+          <a:lstStyle/>
+          <a:p>
+            <a:pPr algn="ctr" indent="0" marL="0">
+              <a:buNone/>
+            </a:pPr>
+            <a:r>
+              <a:rPr lang="en-US" sz="1400" b="1" dirty="0">
                 <a:solidFill>
                   <a:srgbClr val="FFFFFF"/>
                 </a:solidFill>
@@ -2779,60 +2973,38 @@
                 <a:ea typeface="Arial" pitchFamily="34" charset="-122"/>
                 <a:cs typeface="Arial" pitchFamily="34" charset="-120"/>
               </a:rPr>
-              <a:t>0.95</a:t>
-            </a:r>
-            <a:endParaRPr lang="en-US" sz="1200" dirty="0"/>
-          </a:p>
-        </p:txBody>
-      </p:sp>
-      <p:sp>
-        <p:nvSpPr>
-          <p:cNvPr id="14" name="Shape 12"/>
-          <p:cNvSpPr/>
-          <p:nvPr/>
-        </p:nvSpPr>
-        <p:spPr>
-          <a:xfrm>
-            <a:off x="566928" y="3163824"/>
-            <a:ext cx="1417320" cy="347472"/>
-          </a:xfrm>
-          <a:prstGeom prst="roundRect">
-            <a:avLst>
-              <a:gd name="adj" fmla="val 10526"/>
-            </a:avLst>
-          </a:prstGeom>
-          <a:solidFill>
-            <a:srgbClr val="334155"/>
-          </a:solidFill>
-          <a:ln/>
-        </p:spPr>
-      </p:sp>
-      <p:sp>
-        <p:nvSpPr>
-          <p:cNvPr id="15" name="Text 13"/>
-          <p:cNvSpPr/>
-          <p:nvPr/>
-        </p:nvSpPr>
-        <p:spPr>
-          <a:xfrm>
-            <a:off x="566928" y="3163824"/>
-            <a:ext cx="1417320" cy="347472"/>
-          </a:xfrm>
-          <a:prstGeom prst="rect">
-            <a:avLst/>
-          </a:prstGeom>
-          <a:noFill/>
-          <a:ln/>
-        </p:spPr>
-        <p:txBody>
-          <a:bodyPr wrap="square" lIns="0" tIns="0" rIns="0" bIns="0" rtlCol="0" anchor="ctr"/>
-          <a:lstStyle/>
-          <a:p>
-            <a:pPr algn="ctr" indent="0" marL="0">
-              <a:buNone/>
-            </a:pPr>
-            <a:r>
-              <a:rPr lang="en-US" sz="950" b="1" dirty="0">
+              <a:t>03</a:t>
+            </a:r>
+            <a:endParaRPr lang="en-US" sz="1400" dirty="0"/>
+          </a:p>
+        </p:txBody>
+      </p:sp>
+      <p:sp>
+        <p:nvSpPr>
+          <p:cNvPr id="21" name="Text 19"/>
+          <p:cNvSpPr/>
+          <p:nvPr/>
+        </p:nvSpPr>
+        <p:spPr>
+          <a:xfrm>
+            <a:off x="8694725" y="1554480"/>
+            <a:ext cx="2820314" cy="237744"/>
+          </a:xfrm>
+          <a:prstGeom prst="rect">
+            <a:avLst/>
+          </a:prstGeom>
+          <a:noFill/>
+          <a:ln/>
+        </p:spPr>
+        <p:txBody>
+          <a:bodyPr wrap="square" lIns="0" tIns="0" rIns="0" bIns="0" rtlCol="0" anchor="ctr"/>
+          <a:lstStyle/>
+          <a:p>
+            <a:pPr indent="0" marL="0">
+              <a:buNone/>
+            </a:pPr>
+            <a:r>
+              <a:rPr lang="en-US" sz="1100" b="1" dirty="0">
                 <a:solidFill>
                   <a:srgbClr val="FFFFFF"/>
                 </a:solidFill>
@@ -2840,138 +3012,77 @@
                 <a:ea typeface="Pretendard" pitchFamily="34" charset="-122"/>
                 <a:cs typeface="Pretendard" pitchFamily="34" charset="-120"/>
               </a:rPr>
-              <a:t>▲ 매도인고지</a:t>
-            </a:r>
-            <a:endParaRPr lang="en-US" sz="950" dirty="0"/>
-          </a:p>
-        </p:txBody>
-      </p:sp>
-      <p:sp>
-        <p:nvSpPr>
-          <p:cNvPr id="16" name="Text 14"/>
-          <p:cNvSpPr/>
-          <p:nvPr/>
-        </p:nvSpPr>
-        <p:spPr>
-          <a:xfrm>
-            <a:off x="2139696" y="3145536"/>
-            <a:ext cx="3566160" cy="420624"/>
-          </a:xfrm>
-          <a:prstGeom prst="rect">
-            <a:avLst/>
-          </a:prstGeom>
-          <a:noFill/>
-          <a:ln/>
-        </p:spPr>
-        <p:txBody>
-          <a:bodyPr wrap="square" lIns="0" tIns="0" rIns="0" bIns="0" rtlCol="0" anchor="ctr"/>
+              <a:t>현장 실사</a:t>
+            </a:r>
+            <a:endParaRPr lang="en-US" sz="1100" dirty="0"/>
+          </a:p>
+        </p:txBody>
+      </p:sp>
+      <p:sp>
+        <p:nvSpPr>
+          <p:cNvPr id="22" name="Text 20"/>
+          <p:cNvSpPr/>
+          <p:nvPr/>
+        </p:nvSpPr>
+        <p:spPr>
+          <a:xfrm>
+            <a:off x="8694725" y="1792224"/>
+            <a:ext cx="2820314" cy="256032"/>
+          </a:xfrm>
+          <a:prstGeom prst="rect">
+            <a:avLst/>
+          </a:prstGeom>
+          <a:noFill/>
+          <a:ln/>
+        </p:spPr>
+        <p:txBody>
+          <a:bodyPr wrap="square" lIns="0" tIns="0" rIns="0" bIns="0" rtlCol="0" anchor="t"/>
           <a:lstStyle/>
           <a:p>
             <a:pPr indent="0" marL="0">
               <a:buNone/>
             </a:pPr>
             <a:r>
-              <a:rPr lang="en-US" sz="1000" dirty="0">
-                <a:solidFill>
-                  <a:srgbClr val="F1F5F9"/>
+              <a:rPr lang="en-US" sz="850" dirty="0">
+                <a:solidFill>
+                  <a:srgbClr val="A0AEC0"/>
                 </a:solidFill>
                 <a:latin typeface="Pretendard" pitchFamily="34" charset="0"/>
                 <a:ea typeface="Pretendard" pitchFamily="34" charset="-122"/>
                 <a:cs typeface="Pretendard" pitchFamily="34" charset="-120"/>
               </a:rPr>
-              <a:t>매도인이 구두 또는 서면으로 고지</a:t>
-            </a:r>
-            <a:endParaRPr lang="en-US" sz="1000" dirty="0"/>
-          </a:p>
-        </p:txBody>
-      </p:sp>
-      <p:sp>
-        <p:nvSpPr>
-          <p:cNvPr id="17" name="Text 15"/>
-          <p:cNvSpPr/>
-          <p:nvPr/>
-        </p:nvSpPr>
-        <p:spPr>
-          <a:xfrm>
-            <a:off x="5504688" y="3163824"/>
-            <a:ext cx="731520" cy="292608"/>
-          </a:xfrm>
-          <a:prstGeom prst="rect">
-            <a:avLst/>
-          </a:prstGeom>
-          <a:noFill/>
-          <a:ln/>
-        </p:spPr>
-        <p:txBody>
-          <a:bodyPr wrap="square" lIns="0" tIns="0" rIns="0" bIns="0" rtlCol="0" anchor="ctr"/>
-          <a:lstStyle/>
-          <a:p>
-            <a:pPr algn="r" indent="0" marL="0">
-              <a:buNone/>
-            </a:pPr>
-            <a:r>
-              <a:rPr lang="en-US" sz="1200" b="1" dirty="0">
-                <a:solidFill>
-                  <a:srgbClr val="FFFFFF"/>
-                </a:solidFill>
-                <a:latin typeface="Arial" pitchFamily="34" charset="0"/>
-                <a:ea typeface="Arial" pitchFamily="34" charset="-122"/>
-                <a:cs typeface="Arial" pitchFamily="34" charset="-120"/>
-              </a:rPr>
-              <a:t>0.65</a:t>
-            </a:r>
-            <a:endParaRPr lang="en-US" sz="1200" dirty="0"/>
-          </a:p>
-        </p:txBody>
-      </p:sp>
-      <p:sp>
-        <p:nvSpPr>
-          <p:cNvPr id="18" name="Shape 16"/>
-          <p:cNvSpPr/>
-          <p:nvPr/>
-        </p:nvSpPr>
-        <p:spPr>
-          <a:xfrm>
-            <a:off x="566928" y="3822192"/>
-            <a:ext cx="1417320" cy="347472"/>
-          </a:xfrm>
-          <a:prstGeom prst="roundRect">
-            <a:avLst>
-              <a:gd name="adj" fmla="val 10526"/>
-            </a:avLst>
-          </a:prstGeom>
-          <a:solidFill>
-            <a:srgbClr val="334155"/>
-          </a:solidFill>
-          <a:ln/>
-        </p:spPr>
-      </p:sp>
-      <p:sp>
-        <p:nvSpPr>
-          <p:cNvPr id="19" name="Text 17"/>
-          <p:cNvSpPr/>
-          <p:nvPr/>
-        </p:nvSpPr>
-        <p:spPr>
-          <a:xfrm>
-            <a:off x="566928" y="3822192"/>
-            <a:ext cx="1417320" cy="347472"/>
-          </a:xfrm>
-          <a:prstGeom prst="rect">
-            <a:avLst/>
-          </a:prstGeom>
-          <a:noFill/>
-          <a:ln/>
-        </p:spPr>
-        <p:txBody>
-          <a:bodyPr wrap="square" lIns="0" tIns="0" rIns="0" bIns="0" rtlCol="0" anchor="ctr"/>
-          <a:lstStyle/>
-          <a:p>
-            <a:pPr algn="ctr" indent="0" marL="0">
-              <a:buNone/>
-            </a:pPr>
-            <a:r>
-              <a:rPr lang="en-US" sz="950" b="1" dirty="0">
+              <a:t>건물 컨디션 및 설비 직접 확인 후 의향서(LOI) 제출</a:t>
+            </a:r>
+            <a:endParaRPr lang="en-US" sz="850" dirty="0"/>
+          </a:p>
+        </p:txBody>
+      </p:sp>
+      <p:sp>
+        <p:nvSpPr>
+          <p:cNvPr id="23" name="Text 21"/>
+          <p:cNvSpPr/>
+          <p:nvPr/>
+        </p:nvSpPr>
+        <p:spPr>
+          <a:xfrm>
+            <a:off x="566928" y="2395728"/>
+            <a:ext cx="5486400" cy="237744"/>
+          </a:xfrm>
+          <a:prstGeom prst="rect">
+            <a:avLst/>
+          </a:prstGeom>
+          <a:noFill/>
+          <a:ln/>
+        </p:spPr>
+        <p:txBody>
+          <a:bodyPr wrap="square" lIns="0" tIns="0" rIns="0" bIns="0" rtlCol="0" anchor="ctr"/>
+          <a:lstStyle/>
+          <a:p>
+            <a:pPr indent="0" marL="0">
+              <a:buNone/>
+            </a:pPr>
+            <a:r>
+              <a:rPr lang="en-US" sz="1100" b="1" dirty="0">
                 <a:solidFill>
                   <a:srgbClr val="FFFFFF"/>
                 </a:solidFill>
@@ -2979,239 +3090,183 @@
                 <a:ea typeface="Pretendard" pitchFamily="34" charset="-122"/>
                 <a:cs typeface="Pretendard" pitchFamily="34" charset="-120"/>
               </a:rPr>
-              <a:t>● 중개인입력</a:t>
-            </a:r>
-            <a:endParaRPr lang="en-US" sz="950" dirty="0"/>
-          </a:p>
-        </p:txBody>
-      </p:sp>
-      <p:sp>
-        <p:nvSpPr>
-          <p:cNvPr id="20" name="Text 18"/>
-          <p:cNvSpPr/>
-          <p:nvPr/>
-        </p:nvSpPr>
-        <p:spPr>
-          <a:xfrm>
-            <a:off x="2139696" y="3803904"/>
-            <a:ext cx="3566160" cy="420624"/>
-          </a:xfrm>
-          <a:prstGeom prst="rect">
-            <a:avLst/>
-          </a:prstGeom>
-          <a:noFill/>
-          <a:ln/>
-        </p:spPr>
-        <p:txBody>
-          <a:bodyPr wrap="square" lIns="0" tIns="0" rIns="0" bIns="0" rtlCol="0" anchor="ctr"/>
-          <a:lstStyle/>
-          <a:p>
-            <a:pPr indent="0" marL="0">
-              <a:buNone/>
-            </a:pPr>
-            <a:r>
-              <a:rPr lang="en-US" sz="1000" dirty="0">
-                <a:solidFill>
-                  <a:srgbClr val="F1F5F9"/>
+              <a:t>데이터 출처 표기</a:t>
+            </a:r>
+            <a:endParaRPr lang="en-US" sz="1100" dirty="0"/>
+          </a:p>
+        </p:txBody>
+      </p:sp>
+      <p:sp>
+        <p:nvSpPr>
+          <p:cNvPr id="24" name="Shape 22"/>
+          <p:cNvSpPr/>
+          <p:nvPr/>
+        </p:nvSpPr>
+        <p:spPr>
+          <a:xfrm>
+            <a:off x="566928" y="2724912"/>
+            <a:ext cx="1280160" cy="292608"/>
+          </a:xfrm>
+          <a:prstGeom prst="roundRect">
+            <a:avLst>
+              <a:gd name="adj" fmla="val 12500"/>
+            </a:avLst>
+          </a:prstGeom>
+          <a:solidFill>
+            <a:srgbClr val="2D3748"/>
+          </a:solidFill>
+          <a:ln/>
+        </p:spPr>
+      </p:sp>
+      <p:sp>
+        <p:nvSpPr>
+          <p:cNvPr id="25" name="Text 23"/>
+          <p:cNvSpPr/>
+          <p:nvPr/>
+        </p:nvSpPr>
+        <p:spPr>
+          <a:xfrm>
+            <a:off x="566928" y="2724912"/>
+            <a:ext cx="1280160" cy="292608"/>
+          </a:xfrm>
+          <a:prstGeom prst="rect">
+            <a:avLst/>
+          </a:prstGeom>
+          <a:noFill/>
+          <a:ln/>
+        </p:spPr>
+        <p:txBody>
+          <a:bodyPr wrap="square" lIns="0" tIns="0" rIns="0" bIns="0" rtlCol="0" anchor="ctr"/>
+          <a:lstStyle/>
+          <a:p>
+            <a:pPr algn="ctr" indent="0" marL="0">
+              <a:buNone/>
+            </a:pPr>
+            <a:r>
+              <a:rPr lang="en-US" sz="850" b="1" dirty="0">
+                <a:solidFill>
+                  <a:srgbClr val="FFFFFF"/>
                 </a:solidFill>
                 <a:latin typeface="Pretendard" pitchFamily="34" charset="0"/>
                 <a:ea typeface="Pretendard" pitchFamily="34" charset="-122"/>
                 <a:cs typeface="Pretendard" pitchFamily="34" charset="-120"/>
               </a:rPr>
-              <a:t>중개인 현장 조사 및 경험 기반 입력</a:t>
-            </a:r>
-            <a:endParaRPr lang="en-US" sz="1000" dirty="0"/>
-          </a:p>
-        </p:txBody>
-      </p:sp>
-      <p:sp>
-        <p:nvSpPr>
-          <p:cNvPr id="21" name="Text 19"/>
-          <p:cNvSpPr/>
-          <p:nvPr/>
-        </p:nvSpPr>
-        <p:spPr>
-          <a:xfrm>
-            <a:off x="5504688" y="3822192"/>
-            <a:ext cx="731520" cy="292608"/>
-          </a:xfrm>
-          <a:prstGeom prst="rect">
-            <a:avLst/>
-          </a:prstGeom>
-          <a:noFill/>
-          <a:ln/>
-        </p:spPr>
-        <p:txBody>
-          <a:bodyPr wrap="square" lIns="0" tIns="0" rIns="0" bIns="0" rtlCol="0" anchor="ctr"/>
-          <a:lstStyle/>
-          <a:p>
-            <a:pPr algn="r" indent="0" marL="0">
-              <a:buNone/>
-            </a:pPr>
-            <a:r>
-              <a:rPr lang="en-US" sz="1200" b="1" dirty="0">
-                <a:solidFill>
-                  <a:srgbClr val="FFFFFF"/>
-                </a:solidFill>
-                <a:latin typeface="Arial" pitchFamily="34" charset="0"/>
-                <a:ea typeface="Arial" pitchFamily="34" charset="-122"/>
-                <a:cs typeface="Arial" pitchFamily="34" charset="-120"/>
-              </a:rPr>
-              <a:t>0.60</a:t>
-            </a:r>
-            <a:endParaRPr lang="en-US" sz="1200" dirty="0"/>
-          </a:p>
-        </p:txBody>
-      </p:sp>
-      <p:sp>
-        <p:nvSpPr>
-          <p:cNvPr id="22" name="Shape 20"/>
-          <p:cNvSpPr/>
-          <p:nvPr/>
-        </p:nvSpPr>
-        <p:spPr>
-          <a:xfrm>
-            <a:off x="566928" y="4480560"/>
-            <a:ext cx="1417320" cy="347472"/>
-          </a:xfrm>
-          <a:prstGeom prst="roundRect">
-            <a:avLst>
-              <a:gd name="adj" fmla="val 10526"/>
-            </a:avLst>
-          </a:prstGeom>
-          <a:solidFill>
-            <a:srgbClr val="334155"/>
-          </a:solidFill>
-          <a:ln/>
-        </p:spPr>
-      </p:sp>
-      <p:sp>
-        <p:nvSpPr>
-          <p:cNvPr id="23" name="Text 21"/>
-          <p:cNvSpPr/>
-          <p:nvPr/>
-        </p:nvSpPr>
-        <p:spPr>
-          <a:xfrm>
-            <a:off x="566928" y="4480560"/>
-            <a:ext cx="1417320" cy="347472"/>
-          </a:xfrm>
-          <a:prstGeom prst="rect">
-            <a:avLst/>
-          </a:prstGeom>
-          <a:noFill/>
-          <a:ln/>
-        </p:spPr>
-        <p:txBody>
-          <a:bodyPr wrap="square" lIns="0" tIns="0" rIns="0" bIns="0" rtlCol="0" anchor="ctr"/>
-          <a:lstStyle/>
-          <a:p>
-            <a:pPr algn="ctr" indent="0" marL="0">
-              <a:buNone/>
-            </a:pPr>
-            <a:r>
-              <a:rPr lang="en-US" sz="950" b="1" dirty="0">
-                <a:solidFill>
-                  <a:srgbClr val="FFFFFF"/>
+              <a:t>✓ 공부확인</a:t>
+            </a:r>
+            <a:endParaRPr lang="en-US" sz="850" dirty="0"/>
+          </a:p>
+        </p:txBody>
+      </p:sp>
+      <p:sp>
+        <p:nvSpPr>
+          <p:cNvPr id="26" name="Text 24"/>
+          <p:cNvSpPr/>
+          <p:nvPr/>
+        </p:nvSpPr>
+        <p:spPr>
+          <a:xfrm>
+            <a:off x="1993392" y="2706624"/>
+            <a:ext cx="3840480" cy="329184"/>
+          </a:xfrm>
+          <a:prstGeom prst="rect">
+            <a:avLst/>
+          </a:prstGeom>
+          <a:noFill/>
+          <a:ln/>
+        </p:spPr>
+        <p:txBody>
+          <a:bodyPr wrap="square" lIns="0" tIns="0" rIns="0" bIns="0" rtlCol="0" anchor="ctr"/>
+          <a:lstStyle/>
+          <a:p>
+            <a:pPr indent="0" marL="0">
+              <a:buNone/>
+            </a:pPr>
+            <a:r>
+              <a:rPr lang="en-US" sz="900" dirty="0">
+                <a:solidFill>
+                  <a:srgbClr val="E2E8F0"/>
                 </a:solidFill>
                 <a:latin typeface="Pretendard" pitchFamily="34" charset="0"/>
                 <a:ea typeface="Pretendard" pitchFamily="34" charset="-122"/>
                 <a:cs typeface="Pretendard" pitchFamily="34" charset="-120"/>
               </a:rPr>
-              <a:t>◇ AI추정·가정</a:t>
-            </a:r>
-            <a:endParaRPr lang="en-US" sz="950" dirty="0"/>
-          </a:p>
-        </p:txBody>
-      </p:sp>
-      <p:sp>
-        <p:nvSpPr>
-          <p:cNvPr id="24" name="Text 22"/>
-          <p:cNvSpPr/>
-          <p:nvPr/>
-        </p:nvSpPr>
-        <p:spPr>
-          <a:xfrm>
-            <a:off x="2139696" y="4462272"/>
-            <a:ext cx="3566160" cy="420624"/>
-          </a:xfrm>
-          <a:prstGeom prst="rect">
-            <a:avLst/>
-          </a:prstGeom>
-          <a:noFill/>
-          <a:ln/>
-        </p:spPr>
-        <p:txBody>
-          <a:bodyPr wrap="square" lIns="0" tIns="0" rIns="0" bIns="0" rtlCol="0" anchor="ctr"/>
-          <a:lstStyle/>
-          <a:p>
-            <a:pPr indent="0" marL="0">
-              <a:buNone/>
-            </a:pPr>
-            <a:r>
-              <a:rPr lang="en-US" sz="1000" dirty="0">
-                <a:solidFill>
-                  <a:srgbClr val="F1F5F9"/>
+              <a:t>등기부·대장 등 공적 장부 직접 확인</a:t>
+            </a:r>
+            <a:endParaRPr lang="en-US" sz="900" dirty="0"/>
+          </a:p>
+        </p:txBody>
+      </p:sp>
+      <p:sp>
+        <p:nvSpPr>
+          <p:cNvPr id="27" name="Shape 25"/>
+          <p:cNvSpPr/>
+          <p:nvPr/>
+        </p:nvSpPr>
+        <p:spPr>
+          <a:xfrm>
+            <a:off x="566928" y="3200400"/>
+            <a:ext cx="1280160" cy="292608"/>
+          </a:xfrm>
+          <a:prstGeom prst="roundRect">
+            <a:avLst>
+              <a:gd name="adj" fmla="val 12500"/>
+            </a:avLst>
+          </a:prstGeom>
+          <a:solidFill>
+            <a:srgbClr val="2D3748"/>
+          </a:solidFill>
+          <a:ln/>
+        </p:spPr>
+      </p:sp>
+      <p:sp>
+        <p:nvSpPr>
+          <p:cNvPr id="28" name="Text 26"/>
+          <p:cNvSpPr/>
+          <p:nvPr/>
+        </p:nvSpPr>
+        <p:spPr>
+          <a:xfrm>
+            <a:off x="566928" y="3200400"/>
+            <a:ext cx="1280160" cy="292608"/>
+          </a:xfrm>
+          <a:prstGeom prst="rect">
+            <a:avLst/>
+          </a:prstGeom>
+          <a:noFill/>
+          <a:ln/>
+        </p:spPr>
+        <p:txBody>
+          <a:bodyPr wrap="square" lIns="0" tIns="0" rIns="0" bIns="0" rtlCol="0" anchor="ctr"/>
+          <a:lstStyle/>
+          <a:p>
+            <a:pPr algn="ctr" indent="0" marL="0">
+              <a:buNone/>
+            </a:pPr>
+            <a:r>
+              <a:rPr lang="en-US" sz="850" b="1" dirty="0">
+                <a:solidFill>
+                  <a:srgbClr val="FFFFFF"/>
                 </a:solidFill>
                 <a:latin typeface="Pretendard" pitchFamily="34" charset="0"/>
                 <a:ea typeface="Pretendard" pitchFamily="34" charset="-122"/>
                 <a:cs typeface="Pretendard" pitchFamily="34" charset="-120"/>
               </a:rPr>
-              <a:t>시나리오 분석 및 AI 모델 추정</a:t>
-            </a:r>
-            <a:endParaRPr lang="en-US" sz="1000" dirty="0"/>
-          </a:p>
-        </p:txBody>
-      </p:sp>
-      <p:sp>
-        <p:nvSpPr>
-          <p:cNvPr id="25" name="Text 23"/>
-          <p:cNvSpPr/>
-          <p:nvPr/>
-        </p:nvSpPr>
-        <p:spPr>
-          <a:xfrm>
-            <a:off x="5504688" y="4480560"/>
-            <a:ext cx="731520" cy="292608"/>
-          </a:xfrm>
-          <a:prstGeom prst="rect">
-            <a:avLst/>
-          </a:prstGeom>
-          <a:noFill/>
-          <a:ln/>
-        </p:spPr>
-        <p:txBody>
-          <a:bodyPr wrap="square" lIns="0" tIns="0" rIns="0" bIns="0" rtlCol="0" anchor="ctr"/>
-          <a:lstStyle/>
-          <a:p>
-            <a:pPr algn="r" indent="0" marL="0">
-              <a:buNone/>
-            </a:pPr>
-            <a:r>
-              <a:rPr lang="en-US" sz="1200" b="1" dirty="0">
-                <a:solidFill>
-                  <a:srgbClr val="FFFFFF"/>
-                </a:solidFill>
-                <a:latin typeface="Arial" pitchFamily="34" charset="0"/>
-                <a:ea typeface="Arial" pitchFamily="34" charset="-122"/>
-                <a:cs typeface="Arial" pitchFamily="34" charset="-120"/>
-              </a:rPr>
-              <a:t>0.30</a:t>
-            </a:r>
-            <a:endParaRPr lang="en-US" sz="1200" dirty="0"/>
-          </a:p>
-        </p:txBody>
-      </p:sp>
-      <p:sp>
-        <p:nvSpPr>
-          <p:cNvPr id="26" name="Text 24"/>
-          <p:cNvSpPr/>
-          <p:nvPr/>
-        </p:nvSpPr>
-        <p:spPr>
-          <a:xfrm>
-            <a:off x="6492240" y="1517904"/>
-            <a:ext cx="5129784" cy="237744"/>
+              <a:t>★ 전문가검증</a:t>
+            </a:r>
+            <a:endParaRPr lang="en-US" sz="850" dirty="0"/>
+          </a:p>
+        </p:txBody>
+      </p:sp>
+      <p:sp>
+        <p:nvSpPr>
+          <p:cNvPr id="29" name="Text 27"/>
+          <p:cNvSpPr/>
+          <p:nvPr/>
+        </p:nvSpPr>
+        <p:spPr>
+          <a:xfrm>
+            <a:off x="1993392" y="3182112"/>
+            <a:ext cx="3840480" cy="329184"/>
           </a:xfrm>
           <a:prstGeom prst="rect">
             <a:avLst/>
@@ -3227,52 +3282,391 @@
               <a:buNone/>
             </a:pPr>
             <a:r>
-              <a:rPr lang="en-US" sz="1100" b="1" dirty="0">
-                <a:solidFill>
-                  <a:srgbClr val="FFFFFF"/>
+              <a:rPr lang="en-US" sz="900" dirty="0">
+                <a:solidFill>
+                  <a:srgbClr val="E2E8F0"/>
                 </a:solidFill>
                 <a:latin typeface="Pretendard" pitchFamily="34" charset="0"/>
                 <a:ea typeface="Pretendard" pitchFamily="34" charset="-122"/>
                 <a:cs typeface="Pretendard" pitchFamily="34" charset="-120"/>
               </a:rPr>
-              <a:t>면책 조항</a:t>
-            </a:r>
-            <a:endParaRPr lang="en-US" sz="1100" dirty="0"/>
-          </a:p>
-        </p:txBody>
-      </p:sp>
-      <p:sp>
-        <p:nvSpPr>
-          <p:cNvPr id="27" name="Shape 25"/>
-          <p:cNvSpPr/>
-          <p:nvPr/>
-        </p:nvSpPr>
-        <p:spPr>
-          <a:xfrm>
-            <a:off x="6492240" y="1847088"/>
-            <a:ext cx="5129784" cy="2615184"/>
+              <a:t>세무사·감정평가사 등 전문가 확인</a:t>
+            </a:r>
+            <a:endParaRPr lang="en-US" sz="900" dirty="0"/>
+          </a:p>
+        </p:txBody>
+      </p:sp>
+      <p:sp>
+        <p:nvSpPr>
+          <p:cNvPr id="30" name="Shape 28"/>
+          <p:cNvSpPr/>
+          <p:nvPr/>
+        </p:nvSpPr>
+        <p:spPr>
+          <a:xfrm>
+            <a:off x="566928" y="3675888"/>
+            <a:ext cx="1280160" cy="292608"/>
           </a:xfrm>
           <a:prstGeom prst="roundRect">
             <a:avLst>
-              <a:gd name="adj" fmla="val 1399"/>
+              <a:gd name="adj" fmla="val 12500"/>
             </a:avLst>
           </a:prstGeom>
           <a:solidFill>
-            <a:srgbClr val="1E293B"/>
+            <a:srgbClr val="2D3748"/>
           </a:solidFill>
           <a:ln/>
         </p:spPr>
       </p:sp>
       <p:sp>
         <p:nvSpPr>
-          <p:cNvPr id="28" name="Text 26"/>
-          <p:cNvSpPr/>
-          <p:nvPr/>
-        </p:nvSpPr>
-        <p:spPr>
-          <a:xfrm>
-            <a:off x="6711696" y="2011680"/>
-            <a:ext cx="4690872" cy="2286000"/>
+          <p:cNvPr id="31" name="Text 29"/>
+          <p:cNvSpPr/>
+          <p:nvPr/>
+        </p:nvSpPr>
+        <p:spPr>
+          <a:xfrm>
+            <a:off x="566928" y="3675888"/>
+            <a:ext cx="1280160" cy="292608"/>
+          </a:xfrm>
+          <a:prstGeom prst="rect">
+            <a:avLst/>
+          </a:prstGeom>
+          <a:noFill/>
+          <a:ln/>
+        </p:spPr>
+        <p:txBody>
+          <a:bodyPr wrap="square" lIns="0" tIns="0" rIns="0" bIns="0" rtlCol="0" anchor="ctr"/>
+          <a:lstStyle/>
+          <a:p>
+            <a:pPr algn="ctr" indent="0" marL="0">
+              <a:buNone/>
+            </a:pPr>
+            <a:r>
+              <a:rPr lang="en-US" sz="850" b="1" dirty="0">
+                <a:solidFill>
+                  <a:srgbClr val="FFFFFF"/>
+                </a:solidFill>
+                <a:latin typeface="Pretendard" pitchFamily="34" charset="0"/>
+                <a:ea typeface="Pretendard" pitchFamily="34" charset="-122"/>
+                <a:cs typeface="Pretendard" pitchFamily="34" charset="-120"/>
+              </a:rPr>
+              <a:t>▲ 매도인고지</a:t>
+            </a:r>
+            <a:endParaRPr lang="en-US" sz="850" dirty="0"/>
+          </a:p>
+        </p:txBody>
+      </p:sp>
+      <p:sp>
+        <p:nvSpPr>
+          <p:cNvPr id="32" name="Text 30"/>
+          <p:cNvSpPr/>
+          <p:nvPr/>
+        </p:nvSpPr>
+        <p:spPr>
+          <a:xfrm>
+            <a:off x="1993392" y="3657600"/>
+            <a:ext cx="3840480" cy="329184"/>
+          </a:xfrm>
+          <a:prstGeom prst="rect">
+            <a:avLst/>
+          </a:prstGeom>
+          <a:noFill/>
+          <a:ln/>
+        </p:spPr>
+        <p:txBody>
+          <a:bodyPr wrap="square" lIns="0" tIns="0" rIns="0" bIns="0" rtlCol="0" anchor="ctr"/>
+          <a:lstStyle/>
+          <a:p>
+            <a:pPr indent="0" marL="0">
+              <a:buNone/>
+            </a:pPr>
+            <a:r>
+              <a:rPr lang="en-US" sz="900" dirty="0">
+                <a:solidFill>
+                  <a:srgbClr val="E2E8F0"/>
+                </a:solidFill>
+                <a:latin typeface="Pretendard" pitchFamily="34" charset="0"/>
+                <a:ea typeface="Pretendard" pitchFamily="34" charset="-122"/>
+                <a:cs typeface="Pretendard" pitchFamily="34" charset="-120"/>
+              </a:rPr>
+              <a:t>매도인이 구두 또는 서면으로 고지</a:t>
+            </a:r>
+            <a:endParaRPr lang="en-US" sz="900" dirty="0"/>
+          </a:p>
+        </p:txBody>
+      </p:sp>
+      <p:sp>
+        <p:nvSpPr>
+          <p:cNvPr id="33" name="Shape 31"/>
+          <p:cNvSpPr/>
+          <p:nvPr/>
+        </p:nvSpPr>
+        <p:spPr>
+          <a:xfrm>
+            <a:off x="566928" y="4151376"/>
+            <a:ext cx="1280160" cy="292608"/>
+          </a:xfrm>
+          <a:prstGeom prst="roundRect">
+            <a:avLst>
+              <a:gd name="adj" fmla="val 12500"/>
+            </a:avLst>
+          </a:prstGeom>
+          <a:solidFill>
+            <a:srgbClr val="2D3748"/>
+          </a:solidFill>
+          <a:ln/>
+        </p:spPr>
+      </p:sp>
+      <p:sp>
+        <p:nvSpPr>
+          <p:cNvPr id="34" name="Text 32"/>
+          <p:cNvSpPr/>
+          <p:nvPr/>
+        </p:nvSpPr>
+        <p:spPr>
+          <a:xfrm>
+            <a:off x="566928" y="4151376"/>
+            <a:ext cx="1280160" cy="292608"/>
+          </a:xfrm>
+          <a:prstGeom prst="rect">
+            <a:avLst/>
+          </a:prstGeom>
+          <a:noFill/>
+          <a:ln/>
+        </p:spPr>
+        <p:txBody>
+          <a:bodyPr wrap="square" lIns="0" tIns="0" rIns="0" bIns="0" rtlCol="0" anchor="ctr"/>
+          <a:lstStyle/>
+          <a:p>
+            <a:pPr algn="ctr" indent="0" marL="0">
+              <a:buNone/>
+            </a:pPr>
+            <a:r>
+              <a:rPr lang="en-US" sz="850" b="1" dirty="0">
+                <a:solidFill>
+                  <a:srgbClr val="FFFFFF"/>
+                </a:solidFill>
+                <a:latin typeface="Pretendard" pitchFamily="34" charset="0"/>
+                <a:ea typeface="Pretendard" pitchFamily="34" charset="-122"/>
+                <a:cs typeface="Pretendard" pitchFamily="34" charset="-120"/>
+              </a:rPr>
+              <a:t>● 중개인입력</a:t>
+            </a:r>
+            <a:endParaRPr lang="en-US" sz="850" dirty="0"/>
+          </a:p>
+        </p:txBody>
+      </p:sp>
+      <p:sp>
+        <p:nvSpPr>
+          <p:cNvPr id="35" name="Text 33"/>
+          <p:cNvSpPr/>
+          <p:nvPr/>
+        </p:nvSpPr>
+        <p:spPr>
+          <a:xfrm>
+            <a:off x="1993392" y="4133088"/>
+            <a:ext cx="3840480" cy="329184"/>
+          </a:xfrm>
+          <a:prstGeom prst="rect">
+            <a:avLst/>
+          </a:prstGeom>
+          <a:noFill/>
+          <a:ln/>
+        </p:spPr>
+        <p:txBody>
+          <a:bodyPr wrap="square" lIns="0" tIns="0" rIns="0" bIns="0" rtlCol="0" anchor="ctr"/>
+          <a:lstStyle/>
+          <a:p>
+            <a:pPr indent="0" marL="0">
+              <a:buNone/>
+            </a:pPr>
+            <a:r>
+              <a:rPr lang="en-US" sz="900" dirty="0">
+                <a:solidFill>
+                  <a:srgbClr val="E2E8F0"/>
+                </a:solidFill>
+                <a:latin typeface="Pretendard" pitchFamily="34" charset="0"/>
+                <a:ea typeface="Pretendard" pitchFamily="34" charset="-122"/>
+                <a:cs typeface="Pretendard" pitchFamily="34" charset="-120"/>
+              </a:rPr>
+              <a:t>중개인 현장 조사 및 경험 기반 입력</a:t>
+            </a:r>
+            <a:endParaRPr lang="en-US" sz="900" dirty="0"/>
+          </a:p>
+        </p:txBody>
+      </p:sp>
+      <p:sp>
+        <p:nvSpPr>
+          <p:cNvPr id="36" name="Shape 34"/>
+          <p:cNvSpPr/>
+          <p:nvPr/>
+        </p:nvSpPr>
+        <p:spPr>
+          <a:xfrm>
+            <a:off x="566928" y="4626864"/>
+            <a:ext cx="1280160" cy="292608"/>
+          </a:xfrm>
+          <a:prstGeom prst="roundRect">
+            <a:avLst>
+              <a:gd name="adj" fmla="val 12500"/>
+            </a:avLst>
+          </a:prstGeom>
+          <a:solidFill>
+            <a:srgbClr val="2D3748"/>
+          </a:solidFill>
+          <a:ln/>
+        </p:spPr>
+      </p:sp>
+      <p:sp>
+        <p:nvSpPr>
+          <p:cNvPr id="37" name="Text 35"/>
+          <p:cNvSpPr/>
+          <p:nvPr/>
+        </p:nvSpPr>
+        <p:spPr>
+          <a:xfrm>
+            <a:off x="566928" y="4626864"/>
+            <a:ext cx="1280160" cy="292608"/>
+          </a:xfrm>
+          <a:prstGeom prst="rect">
+            <a:avLst/>
+          </a:prstGeom>
+          <a:noFill/>
+          <a:ln/>
+        </p:spPr>
+        <p:txBody>
+          <a:bodyPr wrap="square" lIns="0" tIns="0" rIns="0" bIns="0" rtlCol="0" anchor="ctr"/>
+          <a:lstStyle/>
+          <a:p>
+            <a:pPr algn="ctr" indent="0" marL="0">
+              <a:buNone/>
+            </a:pPr>
+            <a:r>
+              <a:rPr lang="en-US" sz="850" b="1" dirty="0">
+                <a:solidFill>
+                  <a:srgbClr val="FFFFFF"/>
+                </a:solidFill>
+                <a:latin typeface="Pretendard" pitchFamily="34" charset="0"/>
+                <a:ea typeface="Pretendard" pitchFamily="34" charset="-122"/>
+                <a:cs typeface="Pretendard" pitchFamily="34" charset="-120"/>
+              </a:rPr>
+              <a:t>◇ AI추정·가정</a:t>
+            </a:r>
+            <a:endParaRPr lang="en-US" sz="850" dirty="0"/>
+          </a:p>
+        </p:txBody>
+      </p:sp>
+      <p:sp>
+        <p:nvSpPr>
+          <p:cNvPr id="38" name="Text 36"/>
+          <p:cNvSpPr/>
+          <p:nvPr/>
+        </p:nvSpPr>
+        <p:spPr>
+          <a:xfrm>
+            <a:off x="1993392" y="4608576"/>
+            <a:ext cx="3840480" cy="329184"/>
+          </a:xfrm>
+          <a:prstGeom prst="rect">
+            <a:avLst/>
+          </a:prstGeom>
+          <a:noFill/>
+          <a:ln/>
+        </p:spPr>
+        <p:txBody>
+          <a:bodyPr wrap="square" lIns="0" tIns="0" rIns="0" bIns="0" rtlCol="0" anchor="ctr"/>
+          <a:lstStyle/>
+          <a:p>
+            <a:pPr indent="0" marL="0">
+              <a:buNone/>
+            </a:pPr>
+            <a:r>
+              <a:rPr lang="en-US" sz="900" dirty="0">
+                <a:solidFill>
+                  <a:srgbClr val="E2E8F0"/>
+                </a:solidFill>
+                <a:latin typeface="Pretendard" pitchFamily="34" charset="0"/>
+                <a:ea typeface="Pretendard" pitchFamily="34" charset="-122"/>
+                <a:cs typeface="Pretendard" pitchFamily="34" charset="-120"/>
+              </a:rPr>
+              <a:t>시나리오 분석 및 AI 모델 추정</a:t>
+            </a:r>
+            <a:endParaRPr lang="en-US" sz="900" dirty="0"/>
+          </a:p>
+        </p:txBody>
+      </p:sp>
+      <p:sp>
+        <p:nvSpPr>
+          <p:cNvPr id="39" name="Text 37"/>
+          <p:cNvSpPr/>
+          <p:nvPr/>
+        </p:nvSpPr>
+        <p:spPr>
+          <a:xfrm>
+            <a:off x="6492240" y="2395728"/>
+            <a:ext cx="5129784" cy="237744"/>
+          </a:xfrm>
+          <a:prstGeom prst="rect">
+            <a:avLst/>
+          </a:prstGeom>
+          <a:noFill/>
+          <a:ln/>
+        </p:spPr>
+        <p:txBody>
+          <a:bodyPr wrap="square" lIns="0" tIns="0" rIns="0" bIns="0" rtlCol="0" anchor="ctr"/>
+          <a:lstStyle/>
+          <a:p>
+            <a:pPr indent="0" marL="0">
+              <a:buNone/>
+            </a:pPr>
+            <a:r>
+              <a:rPr lang="en-US" sz="1100" b="1" dirty="0">
+                <a:solidFill>
+                  <a:srgbClr val="FFFFFF"/>
+                </a:solidFill>
+                <a:latin typeface="Pretendard" pitchFamily="34" charset="0"/>
+                <a:ea typeface="Pretendard" pitchFamily="34" charset="-122"/>
+                <a:cs typeface="Pretendard" pitchFamily="34" charset="-120"/>
+              </a:rPr>
+              <a:t>면책 조항</a:t>
+            </a:r>
+            <a:endParaRPr lang="en-US" sz="1100" dirty="0"/>
+          </a:p>
+        </p:txBody>
+      </p:sp>
+      <p:sp>
+        <p:nvSpPr>
+          <p:cNvPr id="40" name="Shape 38"/>
+          <p:cNvSpPr/>
+          <p:nvPr/>
+        </p:nvSpPr>
+        <p:spPr>
+          <a:xfrm>
+            <a:off x="6492240" y="2724912"/>
+            <a:ext cx="5129784" cy="1645920"/>
+          </a:xfrm>
+          <a:prstGeom prst="roundRect">
+            <a:avLst>
+              <a:gd name="adj" fmla="val 2222"/>
+            </a:avLst>
+          </a:prstGeom>
+          <a:solidFill>
+            <a:srgbClr val="1C2433"/>
+          </a:solidFill>
+          <a:ln/>
+        </p:spPr>
+      </p:sp>
+      <p:sp>
+        <p:nvSpPr>
+          <p:cNvPr id="41" name="Text 39"/>
+          <p:cNvSpPr/>
+          <p:nvPr/>
+        </p:nvSpPr>
+        <p:spPr>
+          <a:xfrm>
+            <a:off x="6675120" y="2834640"/>
+            <a:ext cx="4764024" cy="1426464"/>
           </a:xfrm>
           <a:prstGeom prst="rect">
             <a:avLst/>
@@ -3291,9 +3685,9 @@
               <a:buNone/>
             </a:pPr>
             <a:r>
-              <a:rPr lang="en-US" sz="930" dirty="0">
-                <a:solidFill>
-                  <a:srgbClr val="94A3B8"/>
+              <a:rPr lang="en-US" sz="850" dirty="0">
+                <a:solidFill>
+                  <a:srgbClr val="A0AEC0"/>
                 </a:solidFill>
                 <a:latin typeface="Pretendard" pitchFamily="34" charset="0"/>
                 <a:ea typeface="Pretendard" pitchFamily="34" charset="-122"/>
@@ -3301,40 +3695,40 @@
               </a:rPr>
               <a:t>본 자료는 투자 권유가 아니며, 기재된 정보의 정확성을 보증하지 않습니다.</a:t>
             </a:r>
-            <a:endParaRPr lang="en-US" sz="930" dirty="0"/>
-          </a:p>
-        </p:txBody>
-      </p:sp>
-      <p:sp>
-        <p:nvSpPr>
-          <p:cNvPr id="29" name="Shape 27"/>
-          <p:cNvSpPr/>
-          <p:nvPr/>
-        </p:nvSpPr>
-        <p:spPr>
-          <a:xfrm>
-            <a:off x="566928" y="5230368"/>
-            <a:ext cx="11057839" cy="640080"/>
+            <a:endParaRPr lang="en-US" sz="850" dirty="0"/>
+          </a:p>
+        </p:txBody>
+      </p:sp>
+      <p:sp>
+        <p:nvSpPr>
+          <p:cNvPr id="42" name="Shape 40"/>
+          <p:cNvSpPr/>
+          <p:nvPr/>
+        </p:nvSpPr>
+        <p:spPr>
+          <a:xfrm>
+            <a:off x="566928" y="5760720"/>
+            <a:ext cx="11057839" cy="457200"/>
           </a:xfrm>
           <a:prstGeom prst="rect">
             <a:avLst/>
           </a:prstGeom>
           <a:solidFill>
-            <a:srgbClr val="4F6A00"/>
+            <a:srgbClr val="977024"/>
           </a:solidFill>
           <a:ln/>
         </p:spPr>
       </p:sp>
       <p:sp>
         <p:nvSpPr>
-          <p:cNvPr id="30" name="Text 28"/>
-          <p:cNvSpPr/>
-          <p:nvPr/>
-        </p:nvSpPr>
-        <p:spPr>
-          <a:xfrm>
-            <a:off x="786384" y="5321808"/>
-            <a:ext cx="10618927" cy="457200"/>
+          <p:cNvPr id="43" name="Text 41"/>
+          <p:cNvSpPr/>
+          <p:nvPr/>
+        </p:nvSpPr>
+        <p:spPr>
+          <a:xfrm>
+            <a:off x="749808" y="5806440"/>
+            <a:ext cx="10692079" cy="365760"/>
           </a:xfrm>
           <a:prstGeom prst="rect">
             <a:avLst/>
@@ -3350,9 +3744,9 @@
               <a:buNone/>
             </a:pPr>
             <a:r>
-              <a:rPr lang="en-US" sz="1000" dirty="0">
-                <a:solidFill>
-                  <a:srgbClr val="E8F5CC"/>
+              <a:rPr lang="en-US" sz="900" dirty="0">
+                <a:solidFill>
+                  <a:srgbClr val="F3EBDA"/>
                 </a:solidFill>
                 <a:latin typeface="Pretendard" pitchFamily="34" charset="0"/>
                 <a:ea typeface="Pretendard" pitchFamily="34" charset="-122"/>
@@ -3360,71 +3754,87 @@
               </a:rPr>
               <a:t>리얼티코리아 · </a:t>
             </a:r>
-            <a:endParaRPr lang="en-US" sz="1000" dirty="0"/>
-          </a:p>
-        </p:txBody>
-      </p:sp>
-      <p:sp>
-        <p:nvSpPr>
-          <p:cNvPr id="31" name="Text 29"/>
-          <p:cNvSpPr/>
-          <p:nvPr/>
-        </p:nvSpPr>
-        <p:spPr>
-          <a:xfrm>
-            <a:off x="566928" y="6419088"/>
-            <a:ext cx="11057839" cy="201168"/>
-          </a:xfrm>
-          <a:prstGeom prst="rect">
-            <a:avLst/>
-          </a:prstGeom>
-          <a:noFill/>
-          <a:ln/>
-        </p:spPr>
-        <p:txBody>
-          <a:bodyPr wrap="square" lIns="0" tIns="0" rIns="0" bIns="0" rtlCol="0" anchor="ctr"/>
-          <a:lstStyle/>
-          <a:p>
-            <a:pPr algn="ctr" indent="0" marL="0">
-              <a:buNone/>
-            </a:pPr>
-            <a:r>
-              <a:rPr lang="en-US" sz="750" dirty="0">
-                <a:solidFill>
-                  <a:srgbClr val="64748B"/>
+            <a:endParaRPr lang="en-US" sz="900" dirty="0"/>
+          </a:p>
+        </p:txBody>
+      </p:sp>
+      <p:sp>
+        <p:nvSpPr>
+          <p:cNvPr id="44" name="Text 42"/>
+          <p:cNvSpPr/>
+          <p:nvPr/>
+        </p:nvSpPr>
+        <p:spPr>
+          <a:xfrm>
+            <a:off x="566928" y="6382512"/>
+            <a:ext cx="7315200" cy="219456"/>
+          </a:xfrm>
+          <a:prstGeom prst="rect">
+            <a:avLst/>
+          </a:prstGeom>
+          <a:noFill/>
+          <a:ln/>
+        </p:spPr>
+        <p:txBody>
+          <a:bodyPr wrap="square" lIns="0" tIns="0" rIns="0" bIns="0" rtlCol="0" anchor="ctr"/>
+          <a:lstStyle/>
+          <a:p>
+            <a:pPr indent="0" marL="0">
+              <a:buNone/>
+            </a:pPr>
+            <a:r>
+              <a:rPr lang="en-US" sz="800" dirty="0">
+                <a:solidFill>
+                  <a:srgbClr val="718096"/>
                 </a:solidFill>
                 <a:latin typeface="Pretendard" pitchFamily="34" charset="0"/>
                 <a:ea typeface="Pretendard" pitchFamily="34" charset="-122"/>
                 <a:cs typeface="Pretendard" pitchFamily="34" charset="-120"/>
               </a:rPr>
-              <a:t>크리딜  ·    ·  10</a:t>
-            </a:r>
-            <a:endParaRPr lang="en-US" sz="750" dirty="0"/>
-          </a:p>
-        </p:txBody>
-      </p:sp>
-      <p:sp>
-        <p:nvSpPr>
-          <p:cNvPr id="32" name="Shape 30"/>
-          <p:cNvSpPr/>
-          <p:nvPr/>
-        </p:nvSpPr>
-        <p:spPr>
-          <a:xfrm>
-            <a:off x="4437172" y="6382512"/>
-            <a:ext cx="3317352" cy="0"/>
-          </a:xfrm>
-          <a:prstGeom prst="line">
-            <a:avLst/>
-          </a:prstGeom>
-          <a:noFill/>
-          <a:ln w="6350">
-            <a:solidFill>
-              <a:srgbClr val="6B8E00"/>
-            </a:solidFill>
-            <a:prstDash val="solid"/>
-          </a:ln>
-        </p:spPr>
+              <a:t>크리딜   |   </a:t>
+            </a:r>
+            <a:endParaRPr lang="en-US" sz="800" dirty="0"/>
+          </a:p>
+        </p:txBody>
+      </p:sp>
+      <p:sp>
+        <p:nvSpPr>
+          <p:cNvPr id="45" name="Text 43"/>
+          <p:cNvSpPr/>
+          <p:nvPr/>
+        </p:nvSpPr>
+        <p:spPr>
+          <a:xfrm>
+            <a:off x="10710367" y="6382512"/>
+            <a:ext cx="914400" cy="219456"/>
+          </a:xfrm>
+          <a:prstGeom prst="rect">
+            <a:avLst/>
+          </a:prstGeom>
+          <a:noFill/>
+          <a:ln/>
+        </p:spPr>
+        <p:txBody>
+          <a:bodyPr wrap="square" lIns="0" tIns="0" rIns="0" bIns="0" rtlCol="0" anchor="ctr"/>
+          <a:lstStyle/>
+          <a:p>
+            <a:pPr algn="r" indent="0" marL="0">
+              <a:buNone/>
+            </a:pPr>
+            <a:r>
+              <a:rPr lang="en-US" sz="900" b="1" dirty="0">
+                <a:solidFill>
+                  <a:srgbClr val="B98A2E"/>
+                </a:solidFill>
+                <a:latin typeface="Arial" pitchFamily="34" charset="0"/>
+                <a:ea typeface="Arial" pitchFamily="34" charset="-122"/>
+                <a:cs typeface="Arial" pitchFamily="34" charset="-120"/>
+              </a:rPr>
+              <a:t>10</a:t>
+            </a:r>
+            <a:endParaRPr lang="en-US" sz="900" dirty="0"/>
+          </a:p>
+        </p:txBody>
       </p:sp>
     </p:spTree>
   </p:cSld>
@@ -3466,14 +3876,14 @@
         </p:nvSpPr>
         <p:spPr>
           <a:xfrm>
-            <a:off x="566928" y="384048"/>
-            <a:ext cx="45720" cy="566928"/>
-          </a:xfrm>
-          <a:prstGeom prst="rect">
+            <a:off x="566928" y="457200"/>
+            <a:ext cx="384048" cy="384048"/>
+          </a:xfrm>
+          <a:prstGeom prst="ellipse">
             <a:avLst/>
           </a:prstGeom>
           <a:solidFill>
-            <a:srgbClr val="6B8E00"/>
+            <a:srgbClr val="B98A2E"/>
           </a:solidFill>
           <a:ln/>
         </p:spPr>
@@ -3486,32 +3896,71 @@
         </p:nvSpPr>
         <p:spPr>
           <a:xfrm>
-            <a:off x="749808" y="384048"/>
-            <a:ext cx="10874959" cy="182880"/>
-          </a:xfrm>
-          <a:prstGeom prst="rect">
-            <a:avLst/>
-          </a:prstGeom>
-          <a:noFill/>
-          <a:ln/>
-        </p:spPr>
-        <p:txBody>
-          <a:bodyPr wrap="square" lIns="0" tIns="0" rIns="0" bIns="0" rtlCol="0" anchor="ctr"/>
-          <a:lstStyle/>
-          <a:p>
-            <a:pPr indent="0" marL="0">
-              <a:buNone/>
-            </a:pPr>
-            <a:r>
-              <a:rPr lang="en-US" sz="950" b="1" spc="200" kern="0" dirty="0">
-                <a:solidFill>
-                  <a:srgbClr val="6B8E00"/>
+            <a:off x="566928" y="457200"/>
+            <a:ext cx="384048" cy="384048"/>
+          </a:xfrm>
+          <a:prstGeom prst="rect">
+            <a:avLst/>
+          </a:prstGeom>
+          <a:noFill/>
+          <a:ln/>
+        </p:spPr>
+        <p:txBody>
+          <a:bodyPr wrap="square" lIns="0" tIns="0" rIns="0" bIns="0" rtlCol="0" anchor="ctr"/>
+          <a:lstStyle/>
+          <a:p>
+            <a:pPr algn="ctr" indent="0" marL="0">
+              <a:buNone/>
+            </a:pPr>
+            <a:r>
+              <a:rPr lang="en-US" sz="1300" b="1" dirty="0">
+                <a:solidFill>
+                  <a:srgbClr val="FFFFFF"/>
                 </a:solidFill>
                 <a:latin typeface="Arial" pitchFamily="34" charset="0"/>
                 <a:ea typeface="Arial" pitchFamily="34" charset="-122"/>
                 <a:cs typeface="Arial" pitchFamily="34" charset="-120"/>
               </a:rPr>
-              <a:t>02  Summary</a:t>
+              <a:t>02</a:t>
+            </a:r>
+            <a:endParaRPr lang="en-US" sz="1300" dirty="0"/>
+          </a:p>
+        </p:txBody>
+      </p:sp>
+      <p:sp>
+        <p:nvSpPr>
+          <p:cNvPr id="4" name="Text 2"/>
+          <p:cNvSpPr/>
+          <p:nvPr/>
+        </p:nvSpPr>
+        <p:spPr>
+          <a:xfrm>
+            <a:off x="1133856" y="457200"/>
+            <a:ext cx="10490911" cy="182880"/>
+          </a:xfrm>
+          <a:prstGeom prst="rect">
+            <a:avLst/>
+          </a:prstGeom>
+          <a:noFill/>
+          <a:ln/>
+        </p:spPr>
+        <p:txBody>
+          <a:bodyPr wrap="square" lIns="0" tIns="0" rIns="0" bIns="0" rtlCol="0" anchor="ctr"/>
+          <a:lstStyle/>
+          <a:p>
+            <a:pPr indent="0" marL="0">
+              <a:buNone/>
+            </a:pPr>
+            <a:r>
+              <a:rPr lang="en-US" sz="950" b="1" spc="200" kern="0" dirty="0">
+                <a:solidFill>
+                  <a:srgbClr val="B98A2E"/>
+                </a:solidFill>
+                <a:latin typeface="Arial" pitchFamily="34" charset="0"/>
+                <a:ea typeface="Arial" pitchFamily="34" charset="-122"/>
+                <a:cs typeface="Arial" pitchFamily="34" charset="-120"/>
+              </a:rPr>
+              <a:t>Summary</a:t>
             </a:r>
             <a:endParaRPr lang="en-US" sz="950" dirty="0"/>
           </a:p>
@@ -3519,14 +3968,14 @@
       </p:sp>
       <p:sp>
         <p:nvSpPr>
-          <p:cNvPr id="4" name="Text 2"/>
-          <p:cNvSpPr/>
-          <p:nvPr/>
-        </p:nvSpPr>
-        <p:spPr>
-          <a:xfrm>
-            <a:off x="749808" y="566928"/>
-            <a:ext cx="10874959" cy="384048"/>
+          <p:cNvPr id="5" name="Text 3"/>
+          <p:cNvSpPr/>
+          <p:nvPr/>
+        </p:nvSpPr>
+        <p:spPr>
+          <a:xfrm>
+            <a:off x="1133856" y="640080"/>
+            <a:ext cx="10490911" cy="365760"/>
           </a:xfrm>
           <a:prstGeom prst="rect">
             <a:avLst/>
@@ -3542,9 +3991,9 @@
               <a:buNone/>
             </a:pPr>
             <a:r>
-              <a:rPr lang="en-US" sz="2200" b="1" dirty="0">
-                <a:solidFill>
-                  <a:srgbClr val="0F172A"/>
+              <a:rPr lang="en-US" sz="2300" b="1" dirty="0">
+                <a:solidFill>
+                  <a:srgbClr val="10161F"/>
                 </a:solidFill>
                 <a:latin typeface="Pretendard" pitchFamily="34" charset="0"/>
                 <a:ea typeface="Pretendard" pitchFamily="34" charset="-122"/>
@@ -3552,13 +4001,13 @@
               </a:rPr>
               <a:t>핵심요약</a:t>
             </a:r>
-            <a:endParaRPr lang="en-US" sz="2200" dirty="0"/>
-          </a:p>
-        </p:txBody>
-      </p:sp>
-      <p:sp>
-        <p:nvSpPr>
-          <p:cNvPr id="5" name="Text 3"/>
+            <a:endParaRPr lang="en-US" sz="2300" dirty="0"/>
+          </a:p>
+        </p:txBody>
+      </p:sp>
+      <p:sp>
+        <p:nvSpPr>
+          <p:cNvPr id="6" name="Text 4"/>
           <p:cNvSpPr/>
           <p:nvPr/>
         </p:nvSpPr>
@@ -3583,7 +4032,7 @@
             <a:r>
               <a:rPr lang="en-US" sz="1500" b="1" dirty="0">
                 <a:solidFill>
-                  <a:srgbClr val="0F172A"/>
+                  <a:srgbClr val="10161F"/>
                 </a:solidFill>
                 <a:latin typeface="Pretendard" pitchFamily="34" charset="0"/>
                 <a:ea typeface="Pretendard" pitchFamily="34" charset="-122"/>
@@ -3597,7 +4046,7 @@
       </p:sp>
       <p:sp>
         <p:nvSpPr>
-          <p:cNvPr id="6" name="Shape 4"/>
+          <p:cNvPr id="7" name="Shape 5"/>
           <p:cNvSpPr/>
           <p:nvPr/>
         </p:nvSpPr>
@@ -3612,7 +4061,7 @@
           <a:noFill/>
           <a:ln w="19050">
             <a:solidFill>
-              <a:srgbClr val="6B8E00"/>
+              <a:srgbClr val="B98A2E"/>
             </a:solidFill>
             <a:prstDash val="solid"/>
           </a:ln>
@@ -3620,7 +4069,7 @@
       </p:sp>
       <p:sp>
         <p:nvSpPr>
-          <p:cNvPr id="7" name="Shape 5"/>
+          <p:cNvPr id="8" name="Shape 6"/>
           <p:cNvSpPr/>
           <p:nvPr/>
         </p:nvSpPr>
@@ -3635,11 +4084,11 @@
             </a:avLst>
           </a:prstGeom>
           <a:solidFill>
-            <a:srgbClr val="F8FAFC"/>
+            <a:srgbClr val="F7FAFC"/>
           </a:solidFill>
           <a:ln w="6350">
             <a:solidFill>
-              <a:srgbClr val="CBD5E1"/>
+              <a:srgbClr val="CBD5E0"/>
             </a:solidFill>
             <a:prstDash val="solid"/>
           </a:ln>
@@ -3647,7 +4096,7 @@
       </p:sp>
       <p:sp>
         <p:nvSpPr>
-          <p:cNvPr id="8" name="Text 6"/>
+          <p:cNvPr id="9" name="Text 7"/>
           <p:cNvSpPr/>
           <p:nvPr/>
         </p:nvSpPr>
@@ -3672,7 +4121,7 @@
             <a:r>
               <a:rPr lang="en-US" sz="950" dirty="0">
                 <a:solidFill>
-                  <a:srgbClr val="64748B"/>
+                  <a:srgbClr val="718096"/>
                 </a:solidFill>
                 <a:latin typeface="Pretendard" pitchFamily="34" charset="0"/>
                 <a:ea typeface="Pretendard" pitchFamily="34" charset="-122"/>
@@ -3686,7 +4135,7 @@
       </p:sp>
       <p:sp>
         <p:nvSpPr>
-          <p:cNvPr id="9" name="Text 7"/>
+          <p:cNvPr id="10" name="Text 8"/>
           <p:cNvSpPr/>
           <p:nvPr/>
         </p:nvSpPr>
@@ -3713,7 +4162,7 @@
             <a:r>
               <a:rPr lang="en-US" sz="2000" b="1" dirty="0">
                 <a:solidFill>
-                  <a:srgbClr val="0F172A"/>
+                  <a:srgbClr val="10161F"/>
                 </a:solidFill>
                 <a:latin typeface="Pretendard" pitchFamily="34" charset="0"/>
                 <a:ea typeface="Pretendard" pitchFamily="34" charset="-122"/>
@@ -3727,7 +4176,7 @@
       </p:sp>
       <p:sp>
         <p:nvSpPr>
-          <p:cNvPr id="10" name="Shape 8"/>
+          <p:cNvPr id="11" name="Shape 9"/>
           <p:cNvSpPr/>
           <p:nvPr/>
         </p:nvSpPr>
@@ -3742,11 +4191,11 @@
             </a:avLst>
           </a:prstGeom>
           <a:solidFill>
-            <a:srgbClr val="F8FAFC"/>
+            <a:srgbClr val="F7FAFC"/>
           </a:solidFill>
           <a:ln w="6350">
             <a:solidFill>
-              <a:srgbClr val="CBD5E1"/>
+              <a:srgbClr val="CBD5E0"/>
             </a:solidFill>
             <a:prstDash val="solid"/>
           </a:ln>
@@ -3754,7 +4203,7 @@
       </p:sp>
       <p:sp>
         <p:nvSpPr>
-          <p:cNvPr id="11" name="Text 9"/>
+          <p:cNvPr id="12" name="Text 10"/>
           <p:cNvSpPr/>
           <p:nvPr/>
         </p:nvSpPr>
@@ -3779,7 +4228,7 @@
             <a:r>
               <a:rPr lang="en-US" sz="950" dirty="0">
                 <a:solidFill>
-                  <a:srgbClr val="64748B"/>
+                  <a:srgbClr val="718096"/>
                 </a:solidFill>
                 <a:latin typeface="Pretendard" pitchFamily="34" charset="0"/>
                 <a:ea typeface="Pretendard" pitchFamily="34" charset="-122"/>
@@ -3793,7 +4242,7 @@
       </p:sp>
       <p:sp>
         <p:nvSpPr>
-          <p:cNvPr id="12" name="Text 10"/>
+          <p:cNvPr id="13" name="Text 11"/>
           <p:cNvSpPr/>
           <p:nvPr/>
         </p:nvSpPr>
@@ -3820,7 +4269,7 @@
             <a:r>
               <a:rPr lang="en-US" sz="2000" b="1" dirty="0">
                 <a:solidFill>
-                  <a:srgbClr val="0F172A"/>
+                  <a:srgbClr val="10161F"/>
                 </a:solidFill>
                 <a:latin typeface="Pretendard" pitchFamily="34" charset="0"/>
                 <a:ea typeface="Pretendard" pitchFamily="34" charset="-122"/>
@@ -3834,7 +4283,7 @@
       </p:sp>
       <p:sp>
         <p:nvSpPr>
-          <p:cNvPr id="13" name="Shape 11"/>
+          <p:cNvPr id="14" name="Shape 12"/>
           <p:cNvSpPr/>
           <p:nvPr/>
         </p:nvSpPr>
@@ -3849,11 +4298,11 @@
             </a:avLst>
           </a:prstGeom>
           <a:solidFill>
-            <a:srgbClr val="F8FAFC"/>
+            <a:srgbClr val="F7FAFC"/>
           </a:solidFill>
           <a:ln w="6350">
             <a:solidFill>
-              <a:srgbClr val="CBD5E1"/>
+              <a:srgbClr val="CBD5E0"/>
             </a:solidFill>
             <a:prstDash val="solid"/>
           </a:ln>
@@ -3861,7 +4310,7 @@
       </p:sp>
       <p:sp>
         <p:nvSpPr>
-          <p:cNvPr id="14" name="Text 12"/>
+          <p:cNvPr id="15" name="Text 13"/>
           <p:cNvSpPr/>
           <p:nvPr/>
         </p:nvSpPr>
@@ -3886,7 +4335,7 @@
             <a:r>
               <a:rPr lang="en-US" sz="950" dirty="0">
                 <a:solidFill>
-                  <a:srgbClr val="64748B"/>
+                  <a:srgbClr val="718096"/>
                 </a:solidFill>
                 <a:latin typeface="Pretendard" pitchFamily="34" charset="0"/>
                 <a:ea typeface="Pretendard" pitchFamily="34" charset="-122"/>
@@ -3900,7 +4349,7 @@
       </p:sp>
       <p:sp>
         <p:nvSpPr>
-          <p:cNvPr id="15" name="Text 13"/>
+          <p:cNvPr id="16" name="Text 14"/>
           <p:cNvSpPr/>
           <p:nvPr/>
         </p:nvSpPr>
@@ -3927,7 +4376,7 @@
             <a:r>
               <a:rPr lang="en-US" sz="2000" b="1" dirty="0">
                 <a:solidFill>
-                  <a:srgbClr val="0F172A"/>
+                  <a:srgbClr val="10161F"/>
                 </a:solidFill>
                 <a:latin typeface="Pretendard" pitchFamily="34" charset="0"/>
                 <a:ea typeface="Pretendard" pitchFamily="34" charset="-122"/>
@@ -3941,7 +4390,7 @@
       </p:sp>
       <p:sp>
         <p:nvSpPr>
-          <p:cNvPr id="16" name="Shape 14"/>
+          <p:cNvPr id="17" name="Shape 15"/>
           <p:cNvSpPr/>
           <p:nvPr/>
         </p:nvSpPr>
@@ -3956,11 +4405,11 @@
             </a:avLst>
           </a:prstGeom>
           <a:solidFill>
-            <a:srgbClr val="F8FAFC"/>
+            <a:srgbClr val="F7FAFC"/>
           </a:solidFill>
           <a:ln w="6350">
             <a:solidFill>
-              <a:srgbClr val="CBD5E1"/>
+              <a:srgbClr val="CBD5E0"/>
             </a:solidFill>
             <a:prstDash val="solid"/>
           </a:ln>
@@ -3968,7 +4417,7 @@
       </p:sp>
       <p:sp>
         <p:nvSpPr>
-          <p:cNvPr id="17" name="Text 15"/>
+          <p:cNvPr id="18" name="Text 16"/>
           <p:cNvSpPr/>
           <p:nvPr/>
         </p:nvSpPr>
@@ -3993,7 +4442,7 @@
             <a:r>
               <a:rPr lang="en-US" sz="950" dirty="0">
                 <a:solidFill>
-                  <a:srgbClr val="64748B"/>
+                  <a:srgbClr val="718096"/>
                 </a:solidFill>
                 <a:latin typeface="Pretendard" pitchFamily="34" charset="0"/>
                 <a:ea typeface="Pretendard" pitchFamily="34" charset="-122"/>
@@ -4007,7 +4456,7 @@
       </p:sp>
       <p:sp>
         <p:nvSpPr>
-          <p:cNvPr id="18" name="Text 16"/>
+          <p:cNvPr id="19" name="Text 17"/>
           <p:cNvSpPr/>
           <p:nvPr/>
         </p:nvSpPr>
@@ -4034,7 +4483,7 @@
             <a:r>
               <a:rPr lang="en-US" sz="2000" b="1" dirty="0">
                 <a:solidFill>
-                  <a:srgbClr val="0F172A"/>
+                  <a:srgbClr val="10161F"/>
                 </a:solidFill>
                 <a:latin typeface="Pretendard" pitchFamily="34" charset="0"/>
                 <a:ea typeface="Pretendard" pitchFamily="34" charset="-122"/>
@@ -4048,65 +4497,516 @@
       </p:sp>
       <p:sp>
         <p:nvSpPr>
-          <p:cNvPr id="19" name="Text 17"/>
-          <p:cNvSpPr/>
-          <p:nvPr/>
-        </p:nvSpPr>
-        <p:spPr>
-          <a:xfrm>
-            <a:off x="566928" y="6419088"/>
-            <a:ext cx="11057839" cy="201168"/>
-          </a:xfrm>
-          <a:prstGeom prst="rect">
-            <a:avLst/>
-          </a:prstGeom>
-          <a:noFill/>
-          <a:ln/>
-        </p:spPr>
-        <p:txBody>
-          <a:bodyPr wrap="square" lIns="0" tIns="0" rIns="0" bIns="0" rtlCol="0" anchor="ctr"/>
-          <a:lstStyle/>
-          <a:p>
-            <a:pPr algn="ctr" indent="0" marL="0">
-              <a:buNone/>
-            </a:pPr>
-            <a:r>
-              <a:rPr lang="en-US" sz="750" dirty="0">
-                <a:solidFill>
-                  <a:srgbClr val="64748B"/>
+          <p:cNvPr id="20" name="Text 18"/>
+          <p:cNvSpPr/>
+          <p:nvPr/>
+        </p:nvSpPr>
+        <p:spPr>
+          <a:xfrm>
+            <a:off x="566928" y="3502152"/>
+            <a:ext cx="11057839" cy="274320"/>
+          </a:xfrm>
+          <a:prstGeom prst="rect">
+            <a:avLst/>
+          </a:prstGeom>
+          <a:noFill/>
+          <a:ln/>
+        </p:spPr>
+        <p:txBody>
+          <a:bodyPr wrap="square" lIns="0" tIns="0" rIns="0" bIns="0" rtlCol="0" anchor="ctr"/>
+          <a:lstStyle/>
+          <a:p>
+            <a:pPr indent="0" marL="0">
+              <a:buNone/>
+            </a:pPr>
+            <a:r>
+              <a:rPr lang="en-US" sz="1250" b="1" dirty="0">
+                <a:solidFill>
+                  <a:srgbClr val="977024"/>
                 </a:solidFill>
                 <a:latin typeface="Pretendard" pitchFamily="34" charset="0"/>
                 <a:ea typeface="Pretendard" pitchFamily="34" charset="-122"/>
                 <a:cs typeface="Pretendard" pitchFamily="34" charset="-120"/>
               </a:rPr>
-              <a:t>크리딜  ·    ·  2</a:t>
-            </a:r>
-            <a:endParaRPr lang="en-US" sz="750" dirty="0"/>
-          </a:p>
-        </p:txBody>
-      </p:sp>
-      <p:sp>
-        <p:nvSpPr>
-          <p:cNvPr id="20" name="Shape 18"/>
-          <p:cNvSpPr/>
-          <p:nvPr/>
-        </p:nvSpPr>
-        <p:spPr>
-          <a:xfrm>
-            <a:off x="4437172" y="6382512"/>
-            <a:ext cx="3317352" cy="0"/>
-          </a:xfrm>
-          <a:prstGeom prst="line">
-            <a:avLst/>
-          </a:prstGeom>
-          <a:noFill/>
-          <a:ln w="6350">
+              <a:t>3대 핵심 투자 포인트 (Investment Highlights)</a:t>
+            </a:r>
+            <a:endParaRPr lang="en-US" sz="1250" dirty="0"/>
+          </a:p>
+        </p:txBody>
+      </p:sp>
+      <p:sp>
+        <p:nvSpPr>
+          <p:cNvPr id="21" name="Shape 19"/>
+          <p:cNvSpPr/>
+          <p:nvPr/>
+        </p:nvSpPr>
+        <p:spPr>
+          <a:xfrm>
+            <a:off x="566928" y="3831336"/>
+            <a:ext cx="11057839" cy="585216"/>
+          </a:xfrm>
+          <a:prstGeom prst="roundRect">
+            <a:avLst>
+              <a:gd name="adj" fmla="val 7813"/>
+            </a:avLst>
+          </a:prstGeom>
+          <a:solidFill>
+            <a:srgbClr val="F8F9FA"/>
+          </a:solidFill>
+          <a:ln w="7620">
             <a:solidFill>
-              <a:srgbClr val="6B8E00"/>
+              <a:srgbClr val="E2E8F0"/>
             </a:solidFill>
             <a:prstDash val="solid"/>
           </a:ln>
         </p:spPr>
+      </p:sp>
+      <p:sp>
+        <p:nvSpPr>
+          <p:cNvPr id="22" name="Shape 20"/>
+          <p:cNvSpPr/>
+          <p:nvPr/>
+        </p:nvSpPr>
+        <p:spPr>
+          <a:xfrm>
+            <a:off x="676656" y="3941064"/>
+            <a:ext cx="411480" cy="365760"/>
+          </a:xfrm>
+          <a:prstGeom prst="roundRect">
+            <a:avLst>
+              <a:gd name="adj" fmla="val 10000"/>
+            </a:avLst>
+          </a:prstGeom>
+          <a:solidFill>
+            <a:srgbClr val="F3EBDA"/>
+          </a:solidFill>
+          <a:ln w="6350">
+            <a:solidFill>
+              <a:srgbClr val="D9B668"/>
+            </a:solidFill>
+            <a:prstDash val="solid"/>
+          </a:ln>
+        </p:spPr>
+      </p:sp>
+      <p:sp>
+        <p:nvSpPr>
+          <p:cNvPr id="23" name="Text 21"/>
+          <p:cNvSpPr/>
+          <p:nvPr/>
+        </p:nvSpPr>
+        <p:spPr>
+          <a:xfrm>
+            <a:off x="676656" y="3941064"/>
+            <a:ext cx="411480" cy="365760"/>
+          </a:xfrm>
+          <a:prstGeom prst="rect">
+            <a:avLst/>
+          </a:prstGeom>
+          <a:noFill/>
+          <a:ln/>
+        </p:spPr>
+        <p:txBody>
+          <a:bodyPr wrap="square" lIns="0" tIns="0" rIns="0" bIns="0" rtlCol="0" anchor="ctr"/>
+          <a:lstStyle/>
+          <a:p>
+            <a:pPr algn="ctr" indent="0" marL="0">
+              <a:buNone/>
+            </a:pPr>
+            <a:r>
+              <a:rPr lang="en-US" sz="1000" b="1" dirty="0">
+                <a:solidFill>
+                  <a:srgbClr val="977024"/>
+                </a:solidFill>
+                <a:latin typeface="Arial" pitchFamily="34" charset="0"/>
+                <a:ea typeface="Arial" pitchFamily="34" charset="-122"/>
+                <a:cs typeface="Arial" pitchFamily="34" charset="-120"/>
+              </a:rPr>
+              <a:t>01</a:t>
+            </a:r>
+            <a:endParaRPr lang="en-US" sz="1000" dirty="0"/>
+          </a:p>
+        </p:txBody>
+      </p:sp>
+      <p:sp>
+        <p:nvSpPr>
+          <p:cNvPr id="24" name="Text 22"/>
+          <p:cNvSpPr/>
+          <p:nvPr/>
+        </p:nvSpPr>
+        <p:spPr>
+          <a:xfrm>
+            <a:off x="1207008" y="3904488"/>
+            <a:ext cx="10280599" cy="438912"/>
+          </a:xfrm>
+          <a:prstGeom prst="rect">
+            <a:avLst/>
+          </a:prstGeom>
+          <a:noFill/>
+          <a:ln/>
+        </p:spPr>
+        <p:txBody>
+          <a:bodyPr wrap="square" lIns="0" tIns="0" rIns="0" bIns="0" rtlCol="0" anchor="ctr"/>
+          <a:lstStyle/>
+          <a:p>
+            <a:pPr indent="0" marL="0">
+              <a:buNone/>
+            </a:pPr>
+            <a:r>
+              <a:rPr lang="en-US" sz="1150" dirty="0">
+                <a:solidFill>
+                  <a:srgbClr val="10161F"/>
+                </a:solidFill>
+                <a:latin typeface="Pretendard" pitchFamily="34" charset="0"/>
+                <a:ea typeface="Pretendard" pitchFamily="34" charset="-122"/>
+                <a:cs typeface="Pretendard" pitchFamily="34" charset="-120"/>
+              </a:rPr>
+              <a:t>원금 안전판: 핵심권역 핵심 입지 및 우량 대지 지분 가치로 하방 경직성 확보</a:t>
+            </a:r>
+            <a:endParaRPr lang="en-US" sz="1150" dirty="0"/>
+          </a:p>
+        </p:txBody>
+      </p:sp>
+      <p:sp>
+        <p:nvSpPr>
+          <p:cNvPr id="25" name="Shape 23"/>
+          <p:cNvSpPr/>
+          <p:nvPr/>
+        </p:nvSpPr>
+        <p:spPr>
+          <a:xfrm>
+            <a:off x="566928" y="4526280"/>
+            <a:ext cx="11057839" cy="585216"/>
+          </a:xfrm>
+          <a:prstGeom prst="roundRect">
+            <a:avLst>
+              <a:gd name="adj" fmla="val 7813"/>
+            </a:avLst>
+          </a:prstGeom>
+          <a:solidFill>
+            <a:srgbClr val="F8F9FA"/>
+          </a:solidFill>
+          <a:ln w="7620">
+            <a:solidFill>
+              <a:srgbClr val="E2E8F0"/>
+            </a:solidFill>
+            <a:prstDash val="solid"/>
+          </a:ln>
+        </p:spPr>
+      </p:sp>
+      <p:sp>
+        <p:nvSpPr>
+          <p:cNvPr id="26" name="Shape 24"/>
+          <p:cNvSpPr/>
+          <p:nvPr/>
+        </p:nvSpPr>
+        <p:spPr>
+          <a:xfrm>
+            <a:off x="676656" y="4636008"/>
+            <a:ext cx="411480" cy="365760"/>
+          </a:xfrm>
+          <a:prstGeom prst="roundRect">
+            <a:avLst>
+              <a:gd name="adj" fmla="val 10000"/>
+            </a:avLst>
+          </a:prstGeom>
+          <a:solidFill>
+            <a:srgbClr val="F3EBDA"/>
+          </a:solidFill>
+          <a:ln w="6350">
+            <a:solidFill>
+              <a:srgbClr val="D9B668"/>
+            </a:solidFill>
+            <a:prstDash val="solid"/>
+          </a:ln>
+        </p:spPr>
+      </p:sp>
+      <p:sp>
+        <p:nvSpPr>
+          <p:cNvPr id="27" name="Text 25"/>
+          <p:cNvSpPr/>
+          <p:nvPr/>
+        </p:nvSpPr>
+        <p:spPr>
+          <a:xfrm>
+            <a:off x="676656" y="4636008"/>
+            <a:ext cx="411480" cy="365760"/>
+          </a:xfrm>
+          <a:prstGeom prst="rect">
+            <a:avLst/>
+          </a:prstGeom>
+          <a:noFill/>
+          <a:ln/>
+        </p:spPr>
+        <p:txBody>
+          <a:bodyPr wrap="square" lIns="0" tIns="0" rIns="0" bIns="0" rtlCol="0" anchor="ctr"/>
+          <a:lstStyle/>
+          <a:p>
+            <a:pPr algn="ctr" indent="0" marL="0">
+              <a:buNone/>
+            </a:pPr>
+            <a:r>
+              <a:rPr lang="en-US" sz="1000" b="1" dirty="0">
+                <a:solidFill>
+                  <a:srgbClr val="977024"/>
+                </a:solidFill>
+                <a:latin typeface="Arial" pitchFamily="34" charset="0"/>
+                <a:ea typeface="Arial" pitchFamily="34" charset="-122"/>
+                <a:cs typeface="Arial" pitchFamily="34" charset="-120"/>
+              </a:rPr>
+              <a:t>02</a:t>
+            </a:r>
+            <a:endParaRPr lang="en-US" sz="1000" dirty="0"/>
+          </a:p>
+        </p:txBody>
+      </p:sp>
+      <p:sp>
+        <p:nvSpPr>
+          <p:cNvPr id="28" name="Text 26"/>
+          <p:cNvSpPr/>
+          <p:nvPr/>
+        </p:nvSpPr>
+        <p:spPr>
+          <a:xfrm>
+            <a:off x="1207008" y="4599432"/>
+            <a:ext cx="10280599" cy="438912"/>
+          </a:xfrm>
+          <a:prstGeom prst="rect">
+            <a:avLst/>
+          </a:prstGeom>
+          <a:noFill/>
+          <a:ln/>
+        </p:spPr>
+        <p:txBody>
+          <a:bodyPr wrap="square" lIns="0" tIns="0" rIns="0" bIns="0" rtlCol="0" anchor="ctr"/>
+          <a:lstStyle/>
+          <a:p>
+            <a:pPr indent="0" marL="0">
+              <a:buNone/>
+            </a:pPr>
+            <a:r>
+              <a:rPr lang="en-US" sz="1150" dirty="0">
+                <a:solidFill>
+                  <a:srgbClr val="10161F"/>
+                </a:solidFill>
+                <a:latin typeface="Pretendard" pitchFamily="34" charset="0"/>
+                <a:ea typeface="Pretendard" pitchFamily="34" charset="-122"/>
+                <a:cs typeface="Pretendard" pitchFamily="34" charset="-120"/>
+              </a:rPr>
+              <a:t>수익 안정성: 매매 시장 적정가 수준 대비 안정적 월 임대수익 창출 기반</a:t>
+            </a:r>
+            <a:endParaRPr lang="en-US" sz="1150" dirty="0"/>
+          </a:p>
+        </p:txBody>
+      </p:sp>
+      <p:sp>
+        <p:nvSpPr>
+          <p:cNvPr id="29" name="Shape 27"/>
+          <p:cNvSpPr/>
+          <p:nvPr/>
+        </p:nvSpPr>
+        <p:spPr>
+          <a:xfrm>
+            <a:off x="566928" y="5221224"/>
+            <a:ext cx="11057839" cy="585216"/>
+          </a:xfrm>
+          <a:prstGeom prst="roundRect">
+            <a:avLst>
+              <a:gd name="adj" fmla="val 7813"/>
+            </a:avLst>
+          </a:prstGeom>
+          <a:solidFill>
+            <a:srgbClr val="F8F9FA"/>
+          </a:solidFill>
+          <a:ln w="7620">
+            <a:solidFill>
+              <a:srgbClr val="E2E8F0"/>
+            </a:solidFill>
+            <a:prstDash val="solid"/>
+          </a:ln>
+        </p:spPr>
+      </p:sp>
+      <p:sp>
+        <p:nvSpPr>
+          <p:cNvPr id="30" name="Shape 28"/>
+          <p:cNvSpPr/>
+          <p:nvPr/>
+        </p:nvSpPr>
+        <p:spPr>
+          <a:xfrm>
+            <a:off x="676656" y="5330952"/>
+            <a:ext cx="411480" cy="365760"/>
+          </a:xfrm>
+          <a:prstGeom prst="roundRect">
+            <a:avLst>
+              <a:gd name="adj" fmla="val 10000"/>
+            </a:avLst>
+          </a:prstGeom>
+          <a:solidFill>
+            <a:srgbClr val="F3EBDA"/>
+          </a:solidFill>
+          <a:ln w="6350">
+            <a:solidFill>
+              <a:srgbClr val="D9B668"/>
+            </a:solidFill>
+            <a:prstDash val="solid"/>
+          </a:ln>
+        </p:spPr>
+      </p:sp>
+      <p:sp>
+        <p:nvSpPr>
+          <p:cNvPr id="31" name="Text 29"/>
+          <p:cNvSpPr/>
+          <p:nvPr/>
+        </p:nvSpPr>
+        <p:spPr>
+          <a:xfrm>
+            <a:off x="676656" y="5330952"/>
+            <a:ext cx="411480" cy="365760"/>
+          </a:xfrm>
+          <a:prstGeom prst="rect">
+            <a:avLst/>
+          </a:prstGeom>
+          <a:noFill/>
+          <a:ln/>
+        </p:spPr>
+        <p:txBody>
+          <a:bodyPr wrap="square" lIns="0" tIns="0" rIns="0" bIns="0" rtlCol="0" anchor="ctr"/>
+          <a:lstStyle/>
+          <a:p>
+            <a:pPr algn="ctr" indent="0" marL="0">
+              <a:buNone/>
+            </a:pPr>
+            <a:r>
+              <a:rPr lang="en-US" sz="1000" b="1" dirty="0">
+                <a:solidFill>
+                  <a:srgbClr val="977024"/>
+                </a:solidFill>
+                <a:latin typeface="Arial" pitchFamily="34" charset="0"/>
+                <a:ea typeface="Arial" pitchFamily="34" charset="-122"/>
+                <a:cs typeface="Arial" pitchFamily="34" charset="-120"/>
+              </a:rPr>
+              <a:t>03</a:t>
+            </a:r>
+            <a:endParaRPr lang="en-US" sz="1000" dirty="0"/>
+          </a:p>
+        </p:txBody>
+      </p:sp>
+      <p:sp>
+        <p:nvSpPr>
+          <p:cNvPr id="32" name="Text 30"/>
+          <p:cNvSpPr/>
+          <p:nvPr/>
+        </p:nvSpPr>
+        <p:spPr>
+          <a:xfrm>
+            <a:off x="1207008" y="5294376"/>
+            <a:ext cx="10280599" cy="438912"/>
+          </a:xfrm>
+          <a:prstGeom prst="rect">
+            <a:avLst/>
+          </a:prstGeom>
+          <a:noFill/>
+          <a:ln/>
+        </p:spPr>
+        <p:txBody>
+          <a:bodyPr wrap="square" lIns="0" tIns="0" rIns="0" bIns="0" rtlCol="0" anchor="ctr"/>
+          <a:lstStyle/>
+          <a:p>
+            <a:pPr indent="0" marL="0">
+              <a:buNone/>
+            </a:pPr>
+            <a:r>
+              <a:rPr lang="en-US" sz="1150" dirty="0">
+                <a:solidFill>
+                  <a:srgbClr val="10161F"/>
+                </a:solidFill>
+                <a:latin typeface="Pretendard" pitchFamily="34" charset="0"/>
+                <a:ea typeface="Pretendard" pitchFamily="34" charset="-122"/>
+                <a:cs typeface="Pretendard" pitchFamily="34" charset="-120"/>
+              </a:rPr>
+              <a:t>미래 가치: 향후 권역 지가 상승 및 공법상 밸류업을 통한 자본이득 실현 가능</a:t>
+            </a:r>
+            <a:endParaRPr lang="en-US" sz="1150" dirty="0"/>
+          </a:p>
+        </p:txBody>
+      </p:sp>
+      <p:sp>
+        <p:nvSpPr>
+          <p:cNvPr id="33" name="Text 31"/>
+          <p:cNvSpPr/>
+          <p:nvPr/>
+        </p:nvSpPr>
+        <p:spPr>
+          <a:xfrm>
+            <a:off x="566928" y="6382512"/>
+            <a:ext cx="7315200" cy="219456"/>
+          </a:xfrm>
+          <a:prstGeom prst="rect">
+            <a:avLst/>
+          </a:prstGeom>
+          <a:noFill/>
+          <a:ln/>
+        </p:spPr>
+        <p:txBody>
+          <a:bodyPr wrap="square" lIns="0" tIns="0" rIns="0" bIns="0" rtlCol="0" anchor="ctr"/>
+          <a:lstStyle/>
+          <a:p>
+            <a:pPr indent="0" marL="0">
+              <a:buNone/>
+            </a:pPr>
+            <a:r>
+              <a:rPr lang="en-US" sz="800" dirty="0">
+                <a:solidFill>
+                  <a:srgbClr val="718096"/>
+                </a:solidFill>
+                <a:latin typeface="Pretendard" pitchFamily="34" charset="0"/>
+                <a:ea typeface="Pretendard" pitchFamily="34" charset="-122"/>
+                <a:cs typeface="Pretendard" pitchFamily="34" charset="-120"/>
+              </a:rPr>
+              <a:t>크리딜   |   </a:t>
+            </a:r>
+            <a:endParaRPr lang="en-US" sz="800" dirty="0"/>
+          </a:p>
+        </p:txBody>
+      </p:sp>
+      <p:sp>
+        <p:nvSpPr>
+          <p:cNvPr id="34" name="Text 32"/>
+          <p:cNvSpPr/>
+          <p:nvPr/>
+        </p:nvSpPr>
+        <p:spPr>
+          <a:xfrm>
+            <a:off x="10710367" y="6382512"/>
+            <a:ext cx="914400" cy="219456"/>
+          </a:xfrm>
+          <a:prstGeom prst="rect">
+            <a:avLst/>
+          </a:prstGeom>
+          <a:noFill/>
+          <a:ln/>
+        </p:spPr>
+        <p:txBody>
+          <a:bodyPr wrap="square" lIns="0" tIns="0" rIns="0" bIns="0" rtlCol="0" anchor="ctr"/>
+          <a:lstStyle/>
+          <a:p>
+            <a:pPr algn="r" indent="0" marL="0">
+              <a:buNone/>
+            </a:pPr>
+            <a:r>
+              <a:rPr lang="en-US" sz="900" b="1" dirty="0">
+                <a:solidFill>
+                  <a:srgbClr val="B98A2E"/>
+                </a:solidFill>
+                <a:latin typeface="Arial" pitchFamily="34" charset="0"/>
+                <a:ea typeface="Arial" pitchFamily="34" charset="-122"/>
+                <a:cs typeface="Arial" pitchFamily="34" charset="-120"/>
+              </a:rPr>
+              <a:t>2</a:t>
+            </a:r>
+            <a:endParaRPr lang="en-US" sz="900" dirty="0"/>
+          </a:p>
+        </p:txBody>
       </p:sp>
     </p:spTree>
   </p:cSld>
@@ -4148,14 +5048,14 @@
         </p:nvSpPr>
         <p:spPr>
           <a:xfrm>
-            <a:off x="566928" y="384048"/>
-            <a:ext cx="45720" cy="566928"/>
-          </a:xfrm>
-          <a:prstGeom prst="rect">
+            <a:off x="566928" y="457200"/>
+            <a:ext cx="384048" cy="384048"/>
+          </a:xfrm>
+          <a:prstGeom prst="ellipse">
             <a:avLst/>
           </a:prstGeom>
           <a:solidFill>
-            <a:srgbClr val="6B8E00"/>
+            <a:srgbClr val="B98A2E"/>
           </a:solidFill>
           <a:ln/>
         </p:spPr>
@@ -4168,32 +5068,71 @@
         </p:nvSpPr>
         <p:spPr>
           <a:xfrm>
-            <a:off x="749808" y="384048"/>
-            <a:ext cx="10874959" cy="182880"/>
-          </a:xfrm>
-          <a:prstGeom prst="rect">
-            <a:avLst/>
-          </a:prstGeom>
-          <a:noFill/>
-          <a:ln/>
-        </p:spPr>
-        <p:txBody>
-          <a:bodyPr wrap="square" lIns="0" tIns="0" rIns="0" bIns="0" rtlCol="0" anchor="ctr"/>
-          <a:lstStyle/>
-          <a:p>
-            <a:pPr indent="0" marL="0">
-              <a:buNone/>
-            </a:pPr>
-            <a:r>
-              <a:rPr lang="en-US" sz="950" b="1" spc="200" kern="0" dirty="0">
-                <a:solidFill>
-                  <a:srgbClr val="6B8E00"/>
+            <a:off x="566928" y="457200"/>
+            <a:ext cx="384048" cy="384048"/>
+          </a:xfrm>
+          <a:prstGeom prst="rect">
+            <a:avLst/>
+          </a:prstGeom>
+          <a:noFill/>
+          <a:ln/>
+        </p:spPr>
+        <p:txBody>
+          <a:bodyPr wrap="square" lIns="0" tIns="0" rIns="0" bIns="0" rtlCol="0" anchor="ctr"/>
+          <a:lstStyle/>
+          <a:p>
+            <a:pPr algn="ctr" indent="0" marL="0">
+              <a:buNone/>
+            </a:pPr>
+            <a:r>
+              <a:rPr lang="en-US" sz="1300" b="1" dirty="0">
+                <a:solidFill>
+                  <a:srgbClr val="FFFFFF"/>
                 </a:solidFill>
                 <a:latin typeface="Arial" pitchFamily="34" charset="0"/>
                 <a:ea typeface="Arial" pitchFamily="34" charset="-122"/>
                 <a:cs typeface="Arial" pitchFamily="34" charset="-120"/>
               </a:rPr>
-              <a:t>03  Location</a:t>
+              <a:t>03</a:t>
+            </a:r>
+            <a:endParaRPr lang="en-US" sz="1300" dirty="0"/>
+          </a:p>
+        </p:txBody>
+      </p:sp>
+      <p:sp>
+        <p:nvSpPr>
+          <p:cNvPr id="4" name="Text 2"/>
+          <p:cNvSpPr/>
+          <p:nvPr/>
+        </p:nvSpPr>
+        <p:spPr>
+          <a:xfrm>
+            <a:off x="1133856" y="457200"/>
+            <a:ext cx="10490911" cy="182880"/>
+          </a:xfrm>
+          <a:prstGeom prst="rect">
+            <a:avLst/>
+          </a:prstGeom>
+          <a:noFill/>
+          <a:ln/>
+        </p:spPr>
+        <p:txBody>
+          <a:bodyPr wrap="square" lIns="0" tIns="0" rIns="0" bIns="0" rtlCol="0" anchor="ctr"/>
+          <a:lstStyle/>
+          <a:p>
+            <a:pPr indent="0" marL="0">
+              <a:buNone/>
+            </a:pPr>
+            <a:r>
+              <a:rPr lang="en-US" sz="950" b="1" spc="200" kern="0" dirty="0">
+                <a:solidFill>
+                  <a:srgbClr val="B98A2E"/>
+                </a:solidFill>
+                <a:latin typeface="Arial" pitchFamily="34" charset="0"/>
+                <a:ea typeface="Arial" pitchFamily="34" charset="-122"/>
+                <a:cs typeface="Arial" pitchFamily="34" charset="-120"/>
+              </a:rPr>
+              <a:t>Location</a:t>
             </a:r>
             <a:endParaRPr lang="en-US" sz="950" dirty="0"/>
           </a:p>
@@ -4201,14 +5140,14 @@
       </p:sp>
       <p:sp>
         <p:nvSpPr>
-          <p:cNvPr id="4" name="Text 2"/>
-          <p:cNvSpPr/>
-          <p:nvPr/>
-        </p:nvSpPr>
-        <p:spPr>
-          <a:xfrm>
-            <a:off x="749808" y="566928"/>
-            <a:ext cx="10874959" cy="384048"/>
+          <p:cNvPr id="5" name="Text 3"/>
+          <p:cNvSpPr/>
+          <p:nvPr/>
+        </p:nvSpPr>
+        <p:spPr>
+          <a:xfrm>
+            <a:off x="1133856" y="640080"/>
+            <a:ext cx="10490911" cy="365760"/>
           </a:xfrm>
           <a:prstGeom prst="rect">
             <a:avLst/>
@@ -4224,9 +5163,9 @@
               <a:buNone/>
             </a:pPr>
             <a:r>
-              <a:rPr lang="en-US" sz="2200" b="1" dirty="0">
-                <a:solidFill>
-                  <a:srgbClr val="0F172A"/>
+              <a:rPr lang="en-US" sz="2300" b="1" dirty="0">
+                <a:solidFill>
+                  <a:srgbClr val="10161F"/>
                 </a:solidFill>
                 <a:latin typeface="Pretendard" pitchFamily="34" charset="0"/>
                 <a:ea typeface="Pretendard" pitchFamily="34" charset="-122"/>
@@ -4234,13 +5173,13 @@
               </a:rPr>
               <a:t>입지 및 교통</a:t>
             </a:r>
-            <a:endParaRPr lang="en-US" sz="2200" dirty="0"/>
+            <a:endParaRPr lang="en-US" sz="2300" dirty="0"/>
           </a:p>
         </p:txBody>
       </p:sp>
       <p:pic>
         <p:nvPicPr>
-          <p:cNvPr id="5" name="Image 0" descr="preencoded.png">    </p:cNvPr>
+          <p:cNvPr id="6" name="Image 0" descr="preencoded.png">    </p:cNvPr>
           <p:cNvPicPr>
             <a:picLocks noChangeAspect="1"/>
           </p:cNvPicPr>
@@ -4264,14 +5203,14 @@
       </p:pic>
       <p:sp>
         <p:nvSpPr>
-          <p:cNvPr id="6" name="Text 3"/>
+          <p:cNvPr id="7" name="Text 4"/>
           <p:cNvSpPr/>
           <p:nvPr/>
         </p:nvSpPr>
         <p:spPr>
           <a:xfrm>
             <a:off x="6053328" y="1481328"/>
-            <a:ext cx="2117147" cy="438912"/>
+            <a:ext cx="2117147" cy="493776"/>
           </a:xfrm>
           <a:prstGeom prst="rect">
             <a:avLst/>
@@ -4290,9 +5229,9 @@
               <a:buNone/>
             </a:pPr>
             <a:r>
-              <a:rPr lang="en-US" sz="1400" dirty="0">
-                <a:solidFill>
-                  <a:srgbClr val="64748B"/>
+              <a:rPr lang="en-US" sz="1300" dirty="0">
+                <a:solidFill>
+                  <a:srgbClr val="718096"/>
                 </a:solidFill>
                 <a:latin typeface="Pretendard" pitchFamily="34" charset="0"/>
                 <a:ea typeface="Pretendard" pitchFamily="34" charset="-122"/>
@@ -4300,20 +5239,20 @@
               </a:rPr>
               <a:t>교통 접근성</a:t>
             </a:r>
-            <a:endParaRPr lang="en-US" sz="1400" dirty="0"/>
-          </a:p>
-        </p:txBody>
-      </p:sp>
-      <p:sp>
-        <p:nvSpPr>
-          <p:cNvPr id="7" name="Text 4"/>
+            <a:endParaRPr lang="en-US" sz="1300" dirty="0"/>
+          </a:p>
+        </p:txBody>
+      </p:sp>
+      <p:sp>
+        <p:nvSpPr>
+          <p:cNvPr id="8" name="Text 5"/>
           <p:cNvSpPr/>
           <p:nvPr/>
         </p:nvSpPr>
         <p:spPr>
           <a:xfrm>
             <a:off x="8170475" y="1481328"/>
-            <a:ext cx="3454292" cy="438912"/>
+            <a:ext cx="3454292" cy="493776"/>
           </a:xfrm>
           <a:prstGeom prst="rect">
             <a:avLst/>
@@ -4332,9 +5271,9 @@
               <a:buNone/>
             </a:pPr>
             <a:r>
-              <a:rPr lang="en-US" sz="1400" b="1" dirty="0">
-                <a:solidFill>
-                  <a:srgbClr val="0F172A"/>
+              <a:rPr lang="en-US" sz="1300" b="1" dirty="0">
+                <a:solidFill>
+                  <a:srgbClr val="10161F"/>
                 </a:solidFill>
                 <a:latin typeface="Pretendard" pitchFamily="34" charset="0"/>
                 <a:ea typeface="Pretendard" pitchFamily="34" charset="-122"/>
@@ -4342,75 +5281,91 @@
               </a:rPr>
               <a:t>강남역·양재역 더블역세권 도보 4분 거리에 위치합니다.</a:t>
             </a:r>
-            <a:endParaRPr lang="en-US" sz="1400" dirty="0"/>
-          </a:p>
-        </p:txBody>
-      </p:sp>
-      <p:sp>
-        <p:nvSpPr>
-          <p:cNvPr id="8" name="Text 5"/>
-          <p:cNvSpPr/>
-          <p:nvPr/>
-        </p:nvSpPr>
-        <p:spPr>
-          <a:xfrm>
-            <a:off x="566928" y="6419088"/>
-            <a:ext cx="11057839" cy="201168"/>
-          </a:xfrm>
-          <a:prstGeom prst="rect">
-            <a:avLst/>
-          </a:prstGeom>
-          <a:noFill/>
-          <a:ln/>
-        </p:spPr>
-        <p:txBody>
-          <a:bodyPr wrap="square" lIns="0" tIns="0" rIns="0" bIns="0" rtlCol="0" anchor="ctr"/>
-          <a:lstStyle/>
-          <a:p>
-            <a:pPr algn="ctr" indent="0" marL="0">
-              <a:buNone/>
-            </a:pPr>
-            <a:r>
-              <a:rPr lang="en-US" sz="750" dirty="0">
-                <a:solidFill>
-                  <a:srgbClr val="64748B"/>
+            <a:endParaRPr lang="en-US" sz="1300" dirty="0"/>
+          </a:p>
+        </p:txBody>
+      </p:sp>
+      <p:sp>
+        <p:nvSpPr>
+          <p:cNvPr id="9" name="Text 6"/>
+          <p:cNvSpPr/>
+          <p:nvPr/>
+        </p:nvSpPr>
+        <p:spPr>
+          <a:xfrm>
+            <a:off x="566928" y="6382512"/>
+            <a:ext cx="7315200" cy="219456"/>
+          </a:xfrm>
+          <a:prstGeom prst="rect">
+            <a:avLst/>
+          </a:prstGeom>
+          <a:noFill/>
+          <a:ln/>
+        </p:spPr>
+        <p:txBody>
+          <a:bodyPr wrap="square" lIns="0" tIns="0" rIns="0" bIns="0" rtlCol="0" anchor="ctr"/>
+          <a:lstStyle/>
+          <a:p>
+            <a:pPr indent="0" marL="0">
+              <a:buNone/>
+            </a:pPr>
+            <a:r>
+              <a:rPr lang="en-US" sz="800" dirty="0">
+                <a:solidFill>
+                  <a:srgbClr val="718096"/>
                 </a:solidFill>
                 <a:latin typeface="Pretendard" pitchFamily="34" charset="0"/>
                 <a:ea typeface="Pretendard" pitchFamily="34" charset="-122"/>
                 <a:cs typeface="Pretendard" pitchFamily="34" charset="-120"/>
               </a:rPr>
-              <a:t>크리딜  ·    ·  3</a:t>
-            </a:r>
-            <a:endParaRPr lang="en-US" sz="750" dirty="0"/>
-          </a:p>
-        </p:txBody>
-      </p:sp>
-      <p:sp>
-        <p:nvSpPr>
-          <p:cNvPr id="9" name="Shape 6"/>
-          <p:cNvSpPr/>
-          <p:nvPr/>
-        </p:nvSpPr>
-        <p:spPr>
-          <a:xfrm>
-            <a:off x="4437172" y="6382512"/>
-            <a:ext cx="3317352" cy="0"/>
-          </a:xfrm>
-          <a:prstGeom prst="line">
-            <a:avLst/>
-          </a:prstGeom>
-          <a:noFill/>
-          <a:ln w="6350">
-            <a:solidFill>
-              <a:srgbClr val="6B8E00"/>
-            </a:solidFill>
-            <a:prstDash val="solid"/>
-          </a:ln>
-        </p:spPr>
+              <a:t>크리딜   |   </a:t>
+            </a:r>
+            <a:endParaRPr lang="en-US" sz="800" dirty="0"/>
+          </a:p>
+        </p:txBody>
       </p:sp>
       <p:sp>
         <p:nvSpPr>
           <p:cNvPr id="10" name="Text 7"/>
+          <p:cNvSpPr/>
+          <p:nvPr/>
+        </p:nvSpPr>
+        <p:spPr>
+          <a:xfrm>
+            <a:off x="10710367" y="6382512"/>
+            <a:ext cx="914400" cy="219456"/>
+          </a:xfrm>
+          <a:prstGeom prst="rect">
+            <a:avLst/>
+          </a:prstGeom>
+          <a:noFill/>
+          <a:ln/>
+        </p:spPr>
+        <p:txBody>
+          <a:bodyPr wrap="square" lIns="0" tIns="0" rIns="0" bIns="0" rtlCol="0" anchor="ctr"/>
+          <a:lstStyle/>
+          <a:p>
+            <a:pPr algn="r" indent="0" marL="0">
+              <a:buNone/>
+            </a:pPr>
+            <a:r>
+              <a:rPr lang="en-US" sz="900" b="1" dirty="0">
+                <a:solidFill>
+                  <a:srgbClr val="B98A2E"/>
+                </a:solidFill>
+                <a:latin typeface="Arial" pitchFamily="34" charset="0"/>
+                <a:ea typeface="Arial" pitchFamily="34" charset="-122"/>
+                <a:cs typeface="Arial" pitchFamily="34" charset="-120"/>
+              </a:rPr>
+              <a:t>3</a:t>
+            </a:r>
+            <a:endParaRPr lang="en-US" sz="900" dirty="0"/>
+          </a:p>
+        </p:txBody>
+      </p:sp>
+      <p:sp>
+        <p:nvSpPr>
+          <p:cNvPr id="11" name="Text 8"/>
           <p:cNvSpPr/>
           <p:nvPr/>
         </p:nvSpPr>
@@ -4435,7 +5390,7 @@
             <a:r>
               <a:rPr lang="en-US" sz="1000" dirty="0">
                 <a:solidFill>
-                  <a:srgbClr val="0F172A"/>
+                  <a:srgbClr val="10161F"/>
                 </a:solidFill>
                 <a:latin typeface="Pretendard" pitchFamily="34" charset="0"/>
                 <a:ea typeface="Pretendard" pitchFamily="34" charset="-122"/>
@@ -4487,14 +5442,14 @@
         </p:nvSpPr>
         <p:spPr>
           <a:xfrm>
-            <a:off x="566928" y="384048"/>
-            <a:ext cx="45720" cy="566928"/>
-          </a:xfrm>
-          <a:prstGeom prst="rect">
+            <a:off x="566928" y="457200"/>
+            <a:ext cx="384048" cy="384048"/>
+          </a:xfrm>
+          <a:prstGeom prst="ellipse">
             <a:avLst/>
           </a:prstGeom>
           <a:solidFill>
-            <a:srgbClr val="6B8E00"/>
+            <a:srgbClr val="B98A2E"/>
           </a:solidFill>
           <a:ln/>
         </p:spPr>
@@ -4507,32 +5462,71 @@
         </p:nvSpPr>
         <p:spPr>
           <a:xfrm>
-            <a:off x="749808" y="384048"/>
-            <a:ext cx="10874959" cy="182880"/>
-          </a:xfrm>
-          <a:prstGeom prst="rect">
-            <a:avLst/>
-          </a:prstGeom>
-          <a:noFill/>
-          <a:ln/>
-        </p:spPr>
-        <p:txBody>
-          <a:bodyPr wrap="square" lIns="0" tIns="0" rIns="0" bIns="0" rtlCol="0" anchor="ctr"/>
-          <a:lstStyle/>
-          <a:p>
-            <a:pPr indent="0" marL="0">
-              <a:buNone/>
-            </a:pPr>
-            <a:r>
-              <a:rPr lang="en-US" sz="950" b="1" spc="200" kern="0" dirty="0">
-                <a:solidFill>
-                  <a:srgbClr val="6B8E00"/>
+            <a:off x="566928" y="457200"/>
+            <a:ext cx="384048" cy="384048"/>
+          </a:xfrm>
+          <a:prstGeom prst="rect">
+            <a:avLst/>
+          </a:prstGeom>
+          <a:noFill/>
+          <a:ln/>
+        </p:spPr>
+        <p:txBody>
+          <a:bodyPr wrap="square" lIns="0" tIns="0" rIns="0" bIns="0" rtlCol="0" anchor="ctr"/>
+          <a:lstStyle/>
+          <a:p>
+            <a:pPr algn="ctr" indent="0" marL="0">
+              <a:buNone/>
+            </a:pPr>
+            <a:r>
+              <a:rPr lang="en-US" sz="1300" b="1" dirty="0">
+                <a:solidFill>
+                  <a:srgbClr val="FFFFFF"/>
                 </a:solidFill>
                 <a:latin typeface="Arial" pitchFamily="34" charset="0"/>
                 <a:ea typeface="Arial" pitchFamily="34" charset="-122"/>
                 <a:cs typeface="Arial" pitchFamily="34" charset="-120"/>
               </a:rPr>
-              <a:t>04  Building</a:t>
+              <a:t>04</a:t>
+            </a:r>
+            <a:endParaRPr lang="en-US" sz="1300" dirty="0"/>
+          </a:p>
+        </p:txBody>
+      </p:sp>
+      <p:sp>
+        <p:nvSpPr>
+          <p:cNvPr id="4" name="Text 2"/>
+          <p:cNvSpPr/>
+          <p:nvPr/>
+        </p:nvSpPr>
+        <p:spPr>
+          <a:xfrm>
+            <a:off x="1133856" y="457200"/>
+            <a:ext cx="10490911" cy="182880"/>
+          </a:xfrm>
+          <a:prstGeom prst="rect">
+            <a:avLst/>
+          </a:prstGeom>
+          <a:noFill/>
+          <a:ln/>
+        </p:spPr>
+        <p:txBody>
+          <a:bodyPr wrap="square" lIns="0" tIns="0" rIns="0" bIns="0" rtlCol="0" anchor="ctr"/>
+          <a:lstStyle/>
+          <a:p>
+            <a:pPr indent="0" marL="0">
+              <a:buNone/>
+            </a:pPr>
+            <a:r>
+              <a:rPr lang="en-US" sz="950" b="1" spc="200" kern="0" dirty="0">
+                <a:solidFill>
+                  <a:srgbClr val="B98A2E"/>
+                </a:solidFill>
+                <a:latin typeface="Arial" pitchFamily="34" charset="0"/>
+                <a:ea typeface="Arial" pitchFamily="34" charset="-122"/>
+                <a:cs typeface="Arial" pitchFamily="34" charset="-120"/>
+              </a:rPr>
+              <a:t>Building</a:t>
             </a:r>
             <a:endParaRPr lang="en-US" sz="950" dirty="0"/>
           </a:p>
@@ -4540,14 +5534,14 @@
       </p:sp>
       <p:sp>
         <p:nvSpPr>
-          <p:cNvPr id="4" name="Text 2"/>
-          <p:cNvSpPr/>
-          <p:nvPr/>
-        </p:nvSpPr>
-        <p:spPr>
-          <a:xfrm>
-            <a:off x="749808" y="566928"/>
-            <a:ext cx="10874959" cy="384048"/>
+          <p:cNvPr id="5" name="Text 3"/>
+          <p:cNvSpPr/>
+          <p:nvPr/>
+        </p:nvSpPr>
+        <p:spPr>
+          <a:xfrm>
+            <a:off x="1133856" y="640080"/>
+            <a:ext cx="10490911" cy="365760"/>
           </a:xfrm>
           <a:prstGeom prst="rect">
             <a:avLst/>
@@ -4563,9 +5557,9 @@
               <a:buNone/>
             </a:pPr>
             <a:r>
-              <a:rPr lang="en-US" sz="2200" b="1" dirty="0">
-                <a:solidFill>
-                  <a:srgbClr val="0F172A"/>
+              <a:rPr lang="en-US" sz="2300" b="1" dirty="0">
+                <a:solidFill>
+                  <a:srgbClr val="10161F"/>
                 </a:solidFill>
                 <a:latin typeface="Pretendard" pitchFamily="34" charset="0"/>
                 <a:ea typeface="Pretendard" pitchFamily="34" charset="-122"/>
@@ -4573,13 +5567,13 @@
               </a:rPr>
               <a:t>물건 개요</a:t>
             </a:r>
-            <a:endParaRPr lang="en-US" sz="2200" dirty="0"/>
-          </a:p>
-        </p:txBody>
-      </p:sp>
-      <p:sp>
-        <p:nvSpPr>
-          <p:cNvPr id="5" name="Text 3"/>
+            <a:endParaRPr lang="en-US" sz="2300" dirty="0"/>
+          </a:p>
+        </p:txBody>
+      </p:sp>
+      <p:sp>
+        <p:nvSpPr>
+          <p:cNvPr id="6" name="Text 4"/>
           <p:cNvSpPr/>
           <p:nvPr/>
         </p:nvSpPr>
@@ -4604,7 +5598,7 @@
             <a:r>
               <a:rPr lang="en-US" sz="1100" b="1" dirty="0">
                 <a:solidFill>
-                  <a:srgbClr val="0F172A"/>
+                  <a:srgbClr val="10161F"/>
                 </a:solidFill>
                 <a:latin typeface="Pretendard" pitchFamily="34" charset="0"/>
                 <a:ea typeface="Pretendard" pitchFamily="34" charset="-122"/>
@@ -4618,7 +5612,7 @@
       </p:sp>
       <p:sp>
         <p:nvSpPr>
-          <p:cNvPr id="6" name="Text 4"/>
+          <p:cNvPr id="7" name="Text 5"/>
           <p:cNvSpPr/>
           <p:nvPr/>
         </p:nvSpPr>
@@ -4646,7 +5640,7 @@
             <a:r>
               <a:rPr lang="en-US" sz="1400" dirty="0">
                 <a:solidFill>
-                  <a:srgbClr val="64748B"/>
+                  <a:srgbClr val="718096"/>
                 </a:solidFill>
                 <a:latin typeface="Pretendard" pitchFamily="34" charset="0"/>
                 <a:ea typeface="Pretendard" pitchFamily="34" charset="-122"/>
@@ -4660,7 +5654,7 @@
       </p:sp>
       <p:sp>
         <p:nvSpPr>
-          <p:cNvPr id="7" name="Text 5"/>
+          <p:cNvPr id="8" name="Text 6"/>
           <p:cNvSpPr/>
           <p:nvPr/>
         </p:nvSpPr>
@@ -4688,7 +5682,7 @@
             <a:r>
               <a:rPr lang="en-US" sz="1400" b="1" dirty="0">
                 <a:solidFill>
-                  <a:srgbClr val="0F172A"/>
+                  <a:srgbClr val="10161F"/>
                 </a:solidFill>
                 <a:latin typeface="Pretendard" pitchFamily="34" charset="0"/>
                 <a:ea typeface="Pretendard" pitchFamily="34" charset="-122"/>
@@ -4702,7 +5696,7 @@
       </p:sp>
       <p:sp>
         <p:nvSpPr>
-          <p:cNvPr id="8" name="Shape 6"/>
+          <p:cNvPr id="9" name="Shape 7"/>
           <p:cNvSpPr/>
           <p:nvPr/>
         </p:nvSpPr>
@@ -4717,7 +5711,7 @@
           <a:noFill/>
           <a:ln w="3810">
             <a:solidFill>
-              <a:srgbClr val="CBD5E1"/>
+              <a:srgbClr val="CBD5E0"/>
             </a:solidFill>
             <a:prstDash val="solid"/>
           </a:ln>
@@ -4725,7 +5719,7 @@
       </p:sp>
       <p:sp>
         <p:nvSpPr>
-          <p:cNvPr id="9" name="Text 7"/>
+          <p:cNvPr id="10" name="Text 8"/>
           <p:cNvSpPr/>
           <p:nvPr/>
         </p:nvSpPr>
@@ -4753,7 +5747,7 @@
             <a:r>
               <a:rPr lang="en-US" sz="1400" dirty="0">
                 <a:solidFill>
-                  <a:srgbClr val="64748B"/>
+                  <a:srgbClr val="718096"/>
                 </a:solidFill>
                 <a:latin typeface="Pretendard" pitchFamily="34" charset="0"/>
                 <a:ea typeface="Pretendard" pitchFamily="34" charset="-122"/>
@@ -4767,7 +5761,7 @@
       </p:sp>
       <p:sp>
         <p:nvSpPr>
-          <p:cNvPr id="10" name="Text 8"/>
+          <p:cNvPr id="11" name="Text 9"/>
           <p:cNvSpPr/>
           <p:nvPr/>
         </p:nvSpPr>
@@ -4795,7 +5789,7 @@
             <a:r>
               <a:rPr lang="en-US" sz="1400" b="1" dirty="0">
                 <a:solidFill>
-                  <a:srgbClr val="0F172A"/>
+                  <a:srgbClr val="10161F"/>
                 </a:solidFill>
                 <a:latin typeface="Pretendard" pitchFamily="34" charset="0"/>
                 <a:ea typeface="Pretendard" pitchFamily="34" charset="-122"/>
@@ -4809,7 +5803,7 @@
       </p:sp>
       <p:sp>
         <p:nvSpPr>
-          <p:cNvPr id="11" name="Shape 9"/>
+          <p:cNvPr id="12" name="Shape 10"/>
           <p:cNvSpPr/>
           <p:nvPr/>
         </p:nvSpPr>
@@ -4824,7 +5818,7 @@
           <a:noFill/>
           <a:ln w="3810">
             <a:solidFill>
-              <a:srgbClr val="CBD5E1"/>
+              <a:srgbClr val="CBD5E0"/>
             </a:solidFill>
             <a:prstDash val="solid"/>
           </a:ln>
@@ -4832,7 +5826,7 @@
       </p:sp>
       <p:sp>
         <p:nvSpPr>
-          <p:cNvPr id="12" name="Text 10"/>
+          <p:cNvPr id="13" name="Text 11"/>
           <p:cNvSpPr/>
           <p:nvPr/>
         </p:nvSpPr>
@@ -4860,7 +5854,7 @@
             <a:r>
               <a:rPr lang="en-US" sz="1400" dirty="0">
                 <a:solidFill>
-                  <a:srgbClr val="64748B"/>
+                  <a:srgbClr val="718096"/>
                 </a:solidFill>
                 <a:latin typeface="Pretendard" pitchFamily="34" charset="0"/>
                 <a:ea typeface="Pretendard" pitchFamily="34" charset="-122"/>
@@ -4874,7 +5868,7 @@
       </p:sp>
       <p:sp>
         <p:nvSpPr>
-          <p:cNvPr id="13" name="Text 11"/>
+          <p:cNvPr id="14" name="Text 12"/>
           <p:cNvSpPr/>
           <p:nvPr/>
         </p:nvSpPr>
@@ -4902,7 +5896,7 @@
             <a:r>
               <a:rPr lang="en-US" sz="1400" b="1" dirty="0">
                 <a:solidFill>
-                  <a:srgbClr val="0F172A"/>
+                  <a:srgbClr val="10161F"/>
                 </a:solidFill>
                 <a:latin typeface="Pretendard" pitchFamily="34" charset="0"/>
                 <a:ea typeface="Pretendard" pitchFamily="34" charset="-122"/>
@@ -4916,7 +5910,7 @@
       </p:sp>
       <p:sp>
         <p:nvSpPr>
-          <p:cNvPr id="14" name="Shape 12"/>
+          <p:cNvPr id="15" name="Shape 13"/>
           <p:cNvSpPr/>
           <p:nvPr/>
         </p:nvSpPr>
@@ -4931,7 +5925,7 @@
           <a:noFill/>
           <a:ln w="8890">
             <a:solidFill>
-              <a:srgbClr val="6B8E00"/>
+              <a:srgbClr val="B98A2E"/>
             </a:solidFill>
             <a:prstDash val="solid"/>
           </a:ln>
@@ -4939,49 +5933,49 @@
       </p:sp>
       <p:sp>
         <p:nvSpPr>
-          <p:cNvPr id="15" name="Shape 13"/>
+          <p:cNvPr id="16" name="Shape 14"/>
           <p:cNvSpPr/>
           <p:nvPr/>
         </p:nvSpPr>
         <p:spPr>
           <a:xfrm>
             <a:off x="7784287" y="1645920"/>
-            <a:ext cx="3840480" cy="2103120"/>
+            <a:ext cx="3840480" cy="1645920"/>
           </a:xfrm>
           <a:prstGeom prst="roundRect">
             <a:avLst>
-              <a:gd name="adj" fmla="val 2609"/>
+              <a:gd name="adj" fmla="val 3333"/>
             </a:avLst>
           </a:prstGeom>
           <a:solidFill>
-            <a:srgbClr val="DBEAFE"/>
+            <a:srgbClr val="F3EBDA"/>
           </a:solidFill>
           <a:ln/>
         </p:spPr>
       </p:sp>
       <p:sp>
         <p:nvSpPr>
-          <p:cNvPr id="16" name="Shape 14"/>
+          <p:cNvPr id="17" name="Shape 15"/>
           <p:cNvSpPr/>
           <p:nvPr/>
         </p:nvSpPr>
         <p:spPr>
           <a:xfrm>
             <a:off x="7784287" y="1700784"/>
-            <a:ext cx="36576" cy="1993392"/>
+            <a:ext cx="36576" cy="1536192"/>
           </a:xfrm>
           <a:prstGeom prst="rect">
             <a:avLst/>
           </a:prstGeom>
           <a:solidFill>
-            <a:srgbClr val="1D4ED8"/>
+            <a:srgbClr val="977024"/>
           </a:solidFill>
           <a:ln/>
         </p:spPr>
       </p:sp>
       <p:sp>
         <p:nvSpPr>
-          <p:cNvPr id="17" name="Text 15"/>
+          <p:cNvPr id="18" name="Text 16"/>
           <p:cNvSpPr/>
           <p:nvPr/>
         </p:nvSpPr>
@@ -5003,147 +5997,90 @@
             <a:pPr indent="0" marL="0">
               <a:buNone/>
             </a:pPr>
-            <a:r>
-              <a:rPr lang="en-US" sz="1050" b="1" dirty="0">
-                <a:solidFill>
-                  <a:srgbClr val="1D4ED8"/>
+            <a:endParaRPr lang="en-US" sz="1050" dirty="0"/>
+          </a:p>
+        </p:txBody>
+      </p:sp>
+      <p:sp>
+        <p:nvSpPr>
+          <p:cNvPr id="19" name="Text 17"/>
+          <p:cNvSpPr/>
+          <p:nvPr/>
+        </p:nvSpPr>
+        <p:spPr>
+          <a:xfrm>
+            <a:off x="7967167" y="1975104"/>
+            <a:ext cx="3511296" cy="1243584"/>
+          </a:xfrm>
+          <a:prstGeom prst="rect">
+            <a:avLst/>
+          </a:prstGeom>
+          <a:noFill/>
+          <a:ln/>
+        </p:spPr>
+        <p:txBody>
+          <a:bodyPr wrap="square" lIns="0" tIns="0" rIns="0" bIns="0" rtlCol="0" anchor="t"/>
+          <a:lstStyle/>
+          <a:p>
+            <a:pPr indent="0" marL="0">
+              <a:lnSpc>
+                <a:spcPct val="120000"/>
+              </a:lnSpc>
+              <a:buNone/>
+            </a:pPr>
+            <a:r>
+              <a:rPr lang="en-US" sz="930" dirty="0">
+                <a:solidFill>
+                  <a:srgbClr val="10161F"/>
                 </a:solidFill>
                 <a:latin typeface="Pretendard" pitchFamily="34" charset="0"/>
                 <a:ea typeface="Pretendard" pitchFamily="34" charset="-122"/>
                 <a:cs typeface="Pretendard" pitchFamily="34" charset="-120"/>
               </a:rPr>
-              <a:t>토지 및 건물 분석 포인트</a:t>
-            </a:r>
-            <a:endParaRPr lang="en-US" sz="1050" dirty="0"/>
-          </a:p>
-        </p:txBody>
-      </p:sp>
-      <p:sp>
-        <p:nvSpPr>
-          <p:cNvPr id="18" name="Text 16"/>
-          <p:cNvSpPr/>
-          <p:nvPr/>
-        </p:nvSpPr>
-        <p:spPr>
-          <a:xfrm>
-            <a:off x="7967167" y="1975104"/>
-            <a:ext cx="3511296" cy="1700784"/>
-          </a:xfrm>
-          <a:prstGeom prst="rect">
-            <a:avLst/>
-          </a:prstGeom>
-          <a:noFill/>
-          <a:ln/>
-        </p:spPr>
-        <p:txBody>
-          <a:bodyPr wrap="square" lIns="0" tIns="0" rIns="0" bIns="0" rtlCol="0" anchor="t"/>
-          <a:lstStyle/>
-          <a:p>
-            <a:pPr marL="342900" indent="-342900">
-              <a:lnSpc>
-                <a:spcPct val="120000"/>
-              </a:lnSpc>
-              <a:buSzPct val="100000"/>
-              <a:buChar char="•"/>
-            </a:pPr>
-            <a:r>
-              <a:rPr lang="en-US" sz="930" dirty="0">
-                <a:solidFill>
-                  <a:srgbClr val="0F172A"/>
+              <a:t>서초 메디컬 빌딩은 지하2층~지상7층 규모의 올근생 빌딩입니다.</a:t>
+            </a:r>
+            <a:endParaRPr lang="en-US" sz="930" dirty="0"/>
+          </a:p>
+        </p:txBody>
+      </p:sp>
+      <p:sp>
+        <p:nvSpPr>
+          <p:cNvPr id="20" name="Text 18"/>
+          <p:cNvSpPr/>
+          <p:nvPr/>
+        </p:nvSpPr>
+        <p:spPr>
+          <a:xfrm>
+            <a:off x="566928" y="6382512"/>
+            <a:ext cx="7315200" cy="219456"/>
+          </a:xfrm>
+          <a:prstGeom prst="rect">
+            <a:avLst/>
+          </a:prstGeom>
+          <a:noFill/>
+          <a:ln/>
+        </p:spPr>
+        <p:txBody>
+          <a:bodyPr wrap="square" lIns="0" tIns="0" rIns="0" bIns="0" rtlCol="0" anchor="ctr"/>
+          <a:lstStyle/>
+          <a:p>
+            <a:pPr indent="0" marL="0">
+              <a:buNone/>
+            </a:pPr>
+            <a:r>
+              <a:rPr lang="en-US" sz="800" dirty="0">
+                <a:solidFill>
+                  <a:srgbClr val="718096"/>
                 </a:solidFill>
                 <a:latin typeface="Pretendard" pitchFamily="34" charset="0"/>
                 <a:ea typeface="Pretendard" pitchFamily="34" charset="-122"/>
                 <a:cs typeface="Pretendard" pitchFamily="34" charset="-120"/>
               </a:rPr>
-              <a:t>서초대로 25m 메인 도로변 우수한 가시성 확보</a:t>
-            </a:r>
-            <a:endParaRPr lang="en-US" sz="930" dirty="0"/>
-          </a:p>
-          <a:p>
-            <a:pPr marL="342900" indent="-342900">
-              <a:lnSpc>
-                <a:spcPct val="120000"/>
-              </a:lnSpc>
-              <a:buSzPct val="100000"/>
-              <a:buChar char="•"/>
-            </a:pPr>
-            <a:r>
-              <a:rPr lang="en-US" sz="930" dirty="0">
-                <a:solidFill>
-                  <a:srgbClr val="0F172A"/>
-                </a:solidFill>
-                <a:latin typeface="Pretendard" pitchFamily="34" charset="0"/>
-                <a:ea typeface="Pretendard" pitchFamily="34" charset="-122"/>
-                <a:cs typeface="Pretendard" pitchFamily="34" charset="-120"/>
-              </a:rPr>
-              <a:t>제3종일반주거지역 법정 용적률 완비 자산</a:t>
-            </a:r>
-            <a:endParaRPr lang="en-US" sz="930" dirty="0"/>
-          </a:p>
-          <a:p>
-            <a:pPr marL="342900" indent="-342900">
-              <a:lnSpc>
-                <a:spcPct val="120000"/>
-              </a:lnSpc>
-              <a:buSzPct val="100000"/>
-              <a:buChar char="•"/>
-            </a:pPr>
-            <a:r>
-              <a:rPr lang="en-US" sz="930" dirty="0">
-                <a:solidFill>
-                  <a:srgbClr val="0F172A"/>
-                </a:solidFill>
-                <a:latin typeface="Pretendard" pitchFamily="34" charset="0"/>
-                <a:ea typeface="Pretendard" pitchFamily="34" charset="-122"/>
-                <a:cs typeface="Pretendard" pitchFamily="34" charset="-120"/>
-              </a:rPr>
-              <a:t>침대용 승강기 완비로 병의원 입점 최적화 구조</a:t>
-            </a:r>
-            <a:endParaRPr lang="en-US" sz="930" dirty="0"/>
-          </a:p>
-        </p:txBody>
-      </p:sp>
-      <p:sp>
-        <p:nvSpPr>
-          <p:cNvPr id="19" name="Shape 17"/>
-          <p:cNvSpPr/>
-          <p:nvPr/>
-        </p:nvSpPr>
-        <p:spPr>
-          <a:xfrm>
-            <a:off x="7784287" y="3977640"/>
-            <a:ext cx="3840480" cy="2148840"/>
-          </a:xfrm>
-          <a:prstGeom prst="roundRect">
-            <a:avLst>
-              <a:gd name="adj" fmla="val 2553"/>
-            </a:avLst>
-          </a:prstGeom>
-          <a:solidFill>
-            <a:srgbClr val="DBEAFE"/>
-          </a:solidFill>
-          <a:ln/>
-        </p:spPr>
-      </p:sp>
-      <p:sp>
-        <p:nvSpPr>
-          <p:cNvPr id="20" name="Shape 18"/>
-          <p:cNvSpPr/>
-          <p:nvPr/>
-        </p:nvSpPr>
-        <p:spPr>
-          <a:xfrm>
-            <a:off x="7784287" y="4032504"/>
-            <a:ext cx="36576" cy="2039112"/>
-          </a:xfrm>
-          <a:prstGeom prst="rect">
-            <a:avLst/>
-          </a:prstGeom>
-          <a:solidFill>
-            <a:srgbClr val="1D4ED8"/>
-          </a:solidFill>
-          <a:ln/>
-        </p:spPr>
+              <a:t>크리딜   |   </a:t>
+            </a:r>
+            <a:endParaRPr lang="en-US" sz="800" dirty="0"/>
+          </a:p>
+        </p:txBody>
       </p:sp>
       <p:sp>
         <p:nvSpPr>
@@ -5153,183 +6090,36 @@
         </p:nvSpPr>
         <p:spPr>
           <a:xfrm>
-            <a:off x="7967167" y="4087368"/>
-            <a:ext cx="3511296" cy="201168"/>
-          </a:xfrm>
-          <a:prstGeom prst="rect">
-            <a:avLst/>
-          </a:prstGeom>
-          <a:noFill/>
-          <a:ln/>
-        </p:spPr>
-        <p:txBody>
-          <a:bodyPr wrap="square" lIns="0" tIns="0" rIns="0" bIns="0" rtlCol="0" anchor="ctr"/>
-          <a:lstStyle/>
-          <a:p>
-            <a:pPr indent="0" marL="0">
-              <a:buNone/>
-            </a:pPr>
-            <a:r>
-              <a:rPr lang="en-US" sz="1050" b="1" dirty="0">
-                <a:solidFill>
-                  <a:srgbClr val="1D4ED8"/>
-                </a:solidFill>
-                <a:latin typeface="Pretendard" pitchFamily="34" charset="0"/>
-                <a:ea typeface="Pretendard" pitchFamily="34" charset="-122"/>
-                <a:cs typeface="Pretendard" pitchFamily="34" charset="-120"/>
-              </a:rPr>
-              <a:t>물건 실사 및 관리 상태</a:t>
-            </a:r>
-            <a:endParaRPr lang="en-US" sz="1050" dirty="0"/>
-          </a:p>
-        </p:txBody>
-      </p:sp>
-      <p:sp>
-        <p:nvSpPr>
-          <p:cNvPr id="22" name="Text 20"/>
-          <p:cNvSpPr/>
-          <p:nvPr/>
-        </p:nvSpPr>
-        <p:spPr>
-          <a:xfrm>
-            <a:off x="7967167" y="4306824"/>
-            <a:ext cx="3511296" cy="1746504"/>
-          </a:xfrm>
-          <a:prstGeom prst="rect">
-            <a:avLst/>
-          </a:prstGeom>
-          <a:noFill/>
-          <a:ln/>
-        </p:spPr>
-        <p:txBody>
-          <a:bodyPr wrap="square" lIns="0" tIns="0" rIns="0" bIns="0" rtlCol="0" anchor="t"/>
-          <a:lstStyle/>
-          <a:p>
-            <a:pPr marL="342900" indent="-342900">
-              <a:lnSpc>
-                <a:spcPct val="120000"/>
-              </a:lnSpc>
-              <a:buSzPct val="100000"/>
-              <a:buChar char="•"/>
-            </a:pPr>
-            <a:r>
-              <a:rPr lang="en-US" sz="930" dirty="0">
-                <a:solidFill>
-                  <a:srgbClr val="0F172A"/>
-                </a:solidFill>
-                <a:latin typeface="Pretendard" pitchFamily="34" charset="0"/>
-                <a:ea typeface="Pretendard" pitchFamily="34" charset="-122"/>
-                <a:cs typeface="Pretendard" pitchFamily="34" charset="-120"/>
-              </a:rPr>
-              <a:t>2017년 준공 신축급 상태로 누수·균열 0건</a:t>
-            </a:r>
-            <a:endParaRPr lang="en-US" sz="930" dirty="0"/>
-          </a:p>
-          <a:p>
-            <a:pPr marL="342900" indent="-342900">
-              <a:lnSpc>
-                <a:spcPct val="120000"/>
-              </a:lnSpc>
-              <a:buSzPct val="100000"/>
-              <a:buChar char="•"/>
-            </a:pPr>
-            <a:r>
-              <a:rPr lang="en-US" sz="930" dirty="0">
-                <a:solidFill>
-                  <a:srgbClr val="0F172A"/>
-                </a:solidFill>
-                <a:latin typeface="Pretendard" pitchFamily="34" charset="0"/>
-                <a:ea typeface="Pretendard" pitchFamily="34" charset="-122"/>
-                <a:cs typeface="Pretendard" pitchFamily="34" charset="-120"/>
-              </a:rPr>
-              <a:t>단독 법인 소유로 권리관계 투명</a:t>
-            </a:r>
-            <a:endParaRPr lang="en-US" sz="930" dirty="0"/>
-          </a:p>
-          <a:p>
-            <a:pPr marL="342900" indent="-342900">
-              <a:lnSpc>
-                <a:spcPct val="120000"/>
-              </a:lnSpc>
-              <a:buSzPct val="100000"/>
-              <a:buChar char="•"/>
-            </a:pPr>
-            <a:r>
-              <a:rPr lang="en-US" sz="930" dirty="0">
-                <a:solidFill>
-                  <a:srgbClr val="0F172A"/>
-                </a:solidFill>
-                <a:latin typeface="Pretendard" pitchFamily="34" charset="0"/>
-                <a:ea typeface="Pretendard" pitchFamily="34" charset="-122"/>
-                <a:cs typeface="Pretendard" pitchFamily="34" charset="-120"/>
-              </a:rPr>
-              <a:t>1금융권 담보대출 85억 원 승계 적격</a:t>
-            </a:r>
-            <a:endParaRPr lang="en-US" sz="930" dirty="0"/>
-          </a:p>
-        </p:txBody>
-      </p:sp>
-      <p:sp>
-        <p:nvSpPr>
-          <p:cNvPr id="23" name="Text 21"/>
-          <p:cNvSpPr/>
-          <p:nvPr/>
-        </p:nvSpPr>
-        <p:spPr>
-          <a:xfrm>
-            <a:off x="566928" y="6419088"/>
-            <a:ext cx="11057839" cy="201168"/>
-          </a:xfrm>
-          <a:prstGeom prst="rect">
-            <a:avLst/>
-          </a:prstGeom>
-          <a:noFill/>
-          <a:ln/>
-        </p:spPr>
-        <p:txBody>
-          <a:bodyPr wrap="square" lIns="0" tIns="0" rIns="0" bIns="0" rtlCol="0" anchor="ctr"/>
-          <a:lstStyle/>
-          <a:p>
-            <a:pPr algn="ctr" indent="0" marL="0">
-              <a:buNone/>
-            </a:pPr>
-            <a:r>
-              <a:rPr lang="en-US" sz="750" dirty="0">
-                <a:solidFill>
-                  <a:srgbClr val="64748B"/>
-                </a:solidFill>
-                <a:latin typeface="Pretendard" pitchFamily="34" charset="0"/>
-                <a:ea typeface="Pretendard" pitchFamily="34" charset="-122"/>
-                <a:cs typeface="Pretendard" pitchFamily="34" charset="-120"/>
-              </a:rPr>
-              <a:t>크리딜  ·    ·  4</a:t>
-            </a:r>
-            <a:endParaRPr lang="en-US" sz="750" dirty="0"/>
-          </a:p>
-        </p:txBody>
-      </p:sp>
-      <p:sp>
-        <p:nvSpPr>
-          <p:cNvPr id="24" name="Shape 22"/>
-          <p:cNvSpPr/>
-          <p:nvPr/>
-        </p:nvSpPr>
-        <p:spPr>
-          <a:xfrm>
-            <a:off x="4437172" y="6382512"/>
-            <a:ext cx="3317352" cy="0"/>
-          </a:xfrm>
-          <a:prstGeom prst="line">
-            <a:avLst/>
-          </a:prstGeom>
-          <a:noFill/>
-          <a:ln w="6350">
-            <a:solidFill>
-              <a:srgbClr val="6B8E00"/>
-            </a:solidFill>
-            <a:prstDash val="solid"/>
-          </a:ln>
-        </p:spPr>
+            <a:off x="10710367" y="6382512"/>
+            <a:ext cx="914400" cy="219456"/>
+          </a:xfrm>
+          <a:prstGeom prst="rect">
+            <a:avLst/>
+          </a:prstGeom>
+          <a:noFill/>
+          <a:ln/>
+        </p:spPr>
+        <p:txBody>
+          <a:bodyPr wrap="square" lIns="0" tIns="0" rIns="0" bIns="0" rtlCol="0" anchor="ctr"/>
+          <a:lstStyle/>
+          <a:p>
+            <a:pPr algn="r" indent="0" marL="0">
+              <a:buNone/>
+            </a:pPr>
+            <a:r>
+              <a:rPr lang="en-US" sz="900" b="1" dirty="0">
+                <a:solidFill>
+                  <a:srgbClr val="B98A2E"/>
+                </a:solidFill>
+                <a:latin typeface="Arial" pitchFamily="34" charset="0"/>
+                <a:ea typeface="Arial" pitchFamily="34" charset="-122"/>
+                <a:cs typeface="Arial" pitchFamily="34" charset="-120"/>
+              </a:rPr>
+              <a:t>4</a:t>
+            </a:r>
+            <a:endParaRPr lang="en-US" sz="900" dirty="0"/>
+          </a:p>
+        </p:txBody>
       </p:sp>
     </p:spTree>
   </p:cSld>
@@ -5371,14 +6161,14 @@
         </p:nvSpPr>
         <p:spPr>
           <a:xfrm>
-            <a:off x="566928" y="384048"/>
-            <a:ext cx="45720" cy="566928"/>
-          </a:xfrm>
-          <a:prstGeom prst="rect">
+            <a:off x="566928" y="457200"/>
+            <a:ext cx="384048" cy="384048"/>
+          </a:xfrm>
+          <a:prstGeom prst="ellipse">
             <a:avLst/>
           </a:prstGeom>
           <a:solidFill>
-            <a:srgbClr val="6B8E00"/>
+            <a:srgbClr val="B98A2E"/>
           </a:solidFill>
           <a:ln/>
         </p:spPr>
@@ -5391,32 +6181,71 @@
         </p:nvSpPr>
         <p:spPr>
           <a:xfrm>
-            <a:off x="749808" y="384048"/>
-            <a:ext cx="10874959" cy="182880"/>
-          </a:xfrm>
-          <a:prstGeom prst="rect">
-            <a:avLst/>
-          </a:prstGeom>
-          <a:noFill/>
-          <a:ln/>
-        </p:spPr>
-        <p:txBody>
-          <a:bodyPr wrap="square" lIns="0" tIns="0" rIns="0" bIns="0" rtlCol="0" anchor="ctr"/>
-          <a:lstStyle/>
-          <a:p>
-            <a:pPr indent="0" marL="0">
-              <a:buNone/>
-            </a:pPr>
-            <a:r>
-              <a:rPr lang="en-US" sz="950" b="1" spc="200" kern="0" dirty="0">
-                <a:solidFill>
-                  <a:srgbClr val="6B8E00"/>
+            <a:off x="566928" y="457200"/>
+            <a:ext cx="384048" cy="384048"/>
+          </a:xfrm>
+          <a:prstGeom prst="rect">
+            <a:avLst/>
+          </a:prstGeom>
+          <a:noFill/>
+          <a:ln/>
+        </p:spPr>
+        <p:txBody>
+          <a:bodyPr wrap="square" lIns="0" tIns="0" rIns="0" bIns="0" rtlCol="0" anchor="ctr"/>
+          <a:lstStyle/>
+          <a:p>
+            <a:pPr algn="ctr" indent="0" marL="0">
+              <a:buNone/>
+            </a:pPr>
+            <a:r>
+              <a:rPr lang="en-US" sz="1300" b="1" dirty="0">
+                <a:solidFill>
+                  <a:srgbClr val="FFFFFF"/>
                 </a:solidFill>
                 <a:latin typeface="Arial" pitchFamily="34" charset="0"/>
                 <a:ea typeface="Arial" pitchFamily="34" charset="-122"/>
                 <a:cs typeface="Arial" pitchFamily="34" charset="-120"/>
               </a:rPr>
-              <a:t>05  Rent Roll</a:t>
+              <a:t>05</a:t>
+            </a:r>
+            <a:endParaRPr lang="en-US" sz="1300" dirty="0"/>
+          </a:p>
+        </p:txBody>
+      </p:sp>
+      <p:sp>
+        <p:nvSpPr>
+          <p:cNvPr id="4" name="Text 2"/>
+          <p:cNvSpPr/>
+          <p:nvPr/>
+        </p:nvSpPr>
+        <p:spPr>
+          <a:xfrm>
+            <a:off x="1133856" y="457200"/>
+            <a:ext cx="10490911" cy="182880"/>
+          </a:xfrm>
+          <a:prstGeom prst="rect">
+            <a:avLst/>
+          </a:prstGeom>
+          <a:noFill/>
+          <a:ln/>
+        </p:spPr>
+        <p:txBody>
+          <a:bodyPr wrap="square" lIns="0" tIns="0" rIns="0" bIns="0" rtlCol="0" anchor="ctr"/>
+          <a:lstStyle/>
+          <a:p>
+            <a:pPr indent="0" marL="0">
+              <a:buNone/>
+            </a:pPr>
+            <a:r>
+              <a:rPr lang="en-US" sz="950" b="1" spc="200" kern="0" dirty="0">
+                <a:solidFill>
+                  <a:srgbClr val="B98A2E"/>
+                </a:solidFill>
+                <a:latin typeface="Arial" pitchFamily="34" charset="0"/>
+                <a:ea typeface="Arial" pitchFamily="34" charset="-122"/>
+                <a:cs typeface="Arial" pitchFamily="34" charset="-120"/>
+              </a:rPr>
+              <a:t>Rent Roll</a:t>
             </a:r>
             <a:endParaRPr lang="en-US" sz="950" dirty="0"/>
           </a:p>
@@ -5424,14 +6253,14 @@
       </p:sp>
       <p:sp>
         <p:nvSpPr>
-          <p:cNvPr id="4" name="Text 2"/>
-          <p:cNvSpPr/>
-          <p:nvPr/>
-        </p:nvSpPr>
-        <p:spPr>
-          <a:xfrm>
-            <a:off x="749808" y="566928"/>
-            <a:ext cx="10874959" cy="384048"/>
+          <p:cNvPr id="5" name="Text 3"/>
+          <p:cNvSpPr/>
+          <p:nvPr/>
+        </p:nvSpPr>
+        <p:spPr>
+          <a:xfrm>
+            <a:off x="1133856" y="640080"/>
+            <a:ext cx="10490911" cy="365760"/>
           </a:xfrm>
           <a:prstGeom prst="rect">
             <a:avLst/>
@@ -5447,9 +6276,9 @@
               <a:buNone/>
             </a:pPr>
             <a:r>
-              <a:rPr lang="en-US" sz="2200" b="1" dirty="0">
-                <a:solidFill>
-                  <a:srgbClr val="0F172A"/>
+              <a:rPr lang="en-US" sz="2300" b="1" dirty="0">
+                <a:solidFill>
+                  <a:srgbClr val="10161F"/>
                 </a:solidFill>
                 <a:latin typeface="Pretendard" pitchFamily="34" charset="0"/>
                 <a:ea typeface="Pretendard" pitchFamily="34" charset="-122"/>
@@ -5457,7 +6286,7 @@
               </a:rPr>
               <a:t>임대차 현황</a:t>
             </a:r>
-            <a:endParaRPr lang="en-US" sz="2200" dirty="0"/>
+            <a:endParaRPr lang="en-US" sz="2300" dirty="0"/>
           </a:p>
         </p:txBody>
       </p:sp>
@@ -5501,7 +6330,7 @@
                       <a:r>
                         <a:rPr lang="en-US" sz="1300" b="1" dirty="0">
                           <a:solidFill>
-                            <a:srgbClr val="64748B"/>
+                            <a:srgbClr val="718096"/>
                           </a:solidFill>
                           <a:latin typeface="Pretendard" pitchFamily="34" charset="0"/>
                           <a:ea typeface="Pretendard" pitchFamily="34" charset="-122"/>
@@ -5519,7 +6348,7 @@
                   <a:tcPr marL="50800" marR="50800" marT="25400" marB="25400" anchor="ctr">
                     <a:lnL w="3810" cap="flat" cmpd="sng" algn="ctr">
                       <a:solidFill>
-                        <a:srgbClr val="CBD5E1"/>
+                        <a:srgbClr val="CBD5E0"/>
                       </a:solidFill>
                       <a:prstDash val="solid"/>
                       <a:round/>
@@ -5528,7 +6357,7 @@
                     </a:lnL>
                     <a:lnR w="3810" cap="flat" cmpd="sng" algn="ctr">
                       <a:solidFill>
-                        <a:srgbClr val="CBD5E1"/>
+                        <a:srgbClr val="CBD5E0"/>
                       </a:solidFill>
                       <a:prstDash val="solid"/>
                       <a:round/>
@@ -5537,7 +6366,7 @@
                     </a:lnR>
                     <a:lnT w="3810" cap="flat" cmpd="sng" algn="ctr">
                       <a:solidFill>
-                        <a:srgbClr val="CBD5E1"/>
+                        <a:srgbClr val="CBD5E0"/>
                       </a:solidFill>
                       <a:prstDash val="solid"/>
                       <a:round/>
@@ -5546,7 +6375,7 @@
                     </a:lnT>
                     <a:lnB w="3810" cap="flat" cmpd="sng" algn="ctr">
                       <a:solidFill>
-                        <a:srgbClr val="CBD5E1"/>
+                        <a:srgbClr val="CBD5E0"/>
                       </a:solidFill>
                       <a:prstDash val="solid"/>
                       <a:round/>
@@ -5554,7 +6383,7 @@
                       <a:tailEnd type="none" w="med" len="med"/>
                     </a:lnB>
                     <a:solidFill>
-                      <a:srgbClr val="F8FAFC"/>
+                      <a:srgbClr val="F7FAFC"/>
                     </a:solidFill>
                   </a:tcPr>
                 </a:tc>
@@ -5569,7 +6398,7 @@
                       <a:r>
                         <a:rPr lang="en-US" sz="1300" b="1" dirty="0">
                           <a:solidFill>
-                            <a:srgbClr val="64748B"/>
+                            <a:srgbClr val="718096"/>
                           </a:solidFill>
                           <a:latin typeface="Pretendard" pitchFamily="34" charset="0"/>
                           <a:ea typeface="Pretendard" pitchFamily="34" charset="-122"/>
@@ -5587,7 +6416,7 @@
                   <a:tcPr marL="50800" marR="50800" marT="25400" marB="25400" anchor="ctr">
                     <a:lnL w="3810" cap="flat" cmpd="sng" algn="ctr">
                       <a:solidFill>
-                        <a:srgbClr val="CBD5E1"/>
+                        <a:srgbClr val="CBD5E0"/>
                       </a:solidFill>
                       <a:prstDash val="solid"/>
                       <a:round/>
@@ -5596,7 +6425,7 @@
                     </a:lnL>
                     <a:lnR w="3810" cap="flat" cmpd="sng" algn="ctr">
                       <a:solidFill>
-                        <a:srgbClr val="CBD5E1"/>
+                        <a:srgbClr val="CBD5E0"/>
                       </a:solidFill>
                       <a:prstDash val="solid"/>
                       <a:round/>
@@ -5605,7 +6434,7 @@
                     </a:lnR>
                     <a:lnT w="3810" cap="flat" cmpd="sng" algn="ctr">
                       <a:solidFill>
-                        <a:srgbClr val="CBD5E1"/>
+                        <a:srgbClr val="CBD5E0"/>
                       </a:solidFill>
                       <a:prstDash val="solid"/>
                       <a:round/>
@@ -5614,7 +6443,7 @@
                     </a:lnT>
                     <a:lnB w="3810" cap="flat" cmpd="sng" algn="ctr">
                       <a:solidFill>
-                        <a:srgbClr val="CBD5E1"/>
+                        <a:srgbClr val="CBD5E0"/>
                       </a:solidFill>
                       <a:prstDash val="solid"/>
                       <a:round/>
@@ -5622,7 +6451,7 @@
                       <a:tailEnd type="none" w="med" len="med"/>
                     </a:lnB>
                     <a:solidFill>
-                      <a:srgbClr val="F8FAFC"/>
+                      <a:srgbClr val="F7FAFC"/>
                     </a:solidFill>
                   </a:tcPr>
                 </a:tc>
@@ -5637,7 +6466,7 @@
                       <a:r>
                         <a:rPr lang="en-US" sz="1300" b="1" dirty="0">
                           <a:solidFill>
-                            <a:srgbClr val="64748B"/>
+                            <a:srgbClr val="718096"/>
                           </a:solidFill>
                           <a:latin typeface="Pretendard" pitchFamily="34" charset="0"/>
                           <a:ea typeface="Pretendard" pitchFamily="34" charset="-122"/>
@@ -5655,7 +6484,7 @@
                   <a:tcPr marL="50800" marR="50800" marT="25400" marB="25400" anchor="ctr">
                     <a:lnL w="3810" cap="flat" cmpd="sng" algn="ctr">
                       <a:solidFill>
-                        <a:srgbClr val="CBD5E1"/>
+                        <a:srgbClr val="CBD5E0"/>
                       </a:solidFill>
                       <a:prstDash val="solid"/>
                       <a:round/>
@@ -5664,7 +6493,7 @@
                     </a:lnL>
                     <a:lnR w="3810" cap="flat" cmpd="sng" algn="ctr">
                       <a:solidFill>
-                        <a:srgbClr val="CBD5E1"/>
+                        <a:srgbClr val="CBD5E0"/>
                       </a:solidFill>
                       <a:prstDash val="solid"/>
                       <a:round/>
@@ -5673,7 +6502,7 @@
                     </a:lnR>
                     <a:lnT w="3810" cap="flat" cmpd="sng" algn="ctr">
                       <a:solidFill>
-                        <a:srgbClr val="CBD5E1"/>
+                        <a:srgbClr val="CBD5E0"/>
                       </a:solidFill>
                       <a:prstDash val="solid"/>
                       <a:round/>
@@ -5682,7 +6511,7 @@
                     </a:lnT>
                     <a:lnB w="3810" cap="flat" cmpd="sng" algn="ctr">
                       <a:solidFill>
-                        <a:srgbClr val="CBD5E1"/>
+                        <a:srgbClr val="CBD5E0"/>
                       </a:solidFill>
                       <a:prstDash val="solid"/>
                       <a:round/>
@@ -5690,7 +6519,7 @@
                       <a:tailEnd type="none" w="med" len="med"/>
                     </a:lnB>
                     <a:solidFill>
-                      <a:srgbClr val="F8FAFC"/>
+                      <a:srgbClr val="F7FAFC"/>
                     </a:solidFill>
                   </a:tcPr>
                 </a:tc>
@@ -5705,7 +6534,7 @@
                       <a:r>
                         <a:rPr lang="en-US" sz="1300" b="1" dirty="0">
                           <a:solidFill>
-                            <a:srgbClr val="64748B"/>
+                            <a:srgbClr val="718096"/>
                           </a:solidFill>
                           <a:latin typeface="Pretendard" pitchFamily="34" charset="0"/>
                           <a:ea typeface="Pretendard" pitchFamily="34" charset="-122"/>
@@ -5723,7 +6552,7 @@
                   <a:tcPr marL="50800" marR="50800" marT="25400" marB="25400" anchor="ctr">
                     <a:lnL w="3810" cap="flat" cmpd="sng" algn="ctr">
                       <a:solidFill>
-                        <a:srgbClr val="CBD5E1"/>
+                        <a:srgbClr val="CBD5E0"/>
                       </a:solidFill>
                       <a:prstDash val="solid"/>
                       <a:round/>
@@ -5732,7 +6561,7 @@
                     </a:lnL>
                     <a:lnR w="3810" cap="flat" cmpd="sng" algn="ctr">
                       <a:solidFill>
-                        <a:srgbClr val="CBD5E1"/>
+                        <a:srgbClr val="CBD5E0"/>
                       </a:solidFill>
                       <a:prstDash val="solid"/>
                       <a:round/>
@@ -5741,7 +6570,7 @@
                     </a:lnR>
                     <a:lnT w="3810" cap="flat" cmpd="sng" algn="ctr">
                       <a:solidFill>
-                        <a:srgbClr val="CBD5E1"/>
+                        <a:srgbClr val="CBD5E0"/>
                       </a:solidFill>
                       <a:prstDash val="solid"/>
                       <a:round/>
@@ -5750,7 +6579,7 @@
                     </a:lnT>
                     <a:lnB w="3810" cap="flat" cmpd="sng" algn="ctr">
                       <a:solidFill>
-                        <a:srgbClr val="CBD5E1"/>
+                        <a:srgbClr val="CBD5E0"/>
                       </a:solidFill>
                       <a:prstDash val="solid"/>
                       <a:round/>
@@ -5758,7 +6587,7 @@
                       <a:tailEnd type="none" w="med" len="med"/>
                     </a:lnB>
                     <a:solidFill>
-                      <a:srgbClr val="F8FAFC"/>
+                      <a:srgbClr val="F7FAFC"/>
                     </a:solidFill>
                   </a:tcPr>
                 </a:tc>
@@ -5775,7 +6604,7 @@
                       <a:r>
                         <a:rPr lang="en-US" sz="1300" b="1" dirty="0">
                           <a:solidFill>
-                            <a:srgbClr val="0F172A"/>
+                            <a:srgbClr val="10161F"/>
                           </a:solidFill>
                           <a:latin typeface="Pretendard" pitchFamily="34" charset="0"/>
                           <a:ea typeface="Pretendard" pitchFamily="34" charset="-122"/>
@@ -5793,7 +6622,7 @@
                   <a:tcPr marL="50800" marR="50800" marT="25400" marB="25400" anchor="ctr">
                     <a:lnL w="3810" cap="flat" cmpd="sng" algn="ctr">
                       <a:solidFill>
-                        <a:srgbClr val="CBD5E1"/>
+                        <a:srgbClr val="CBD5E0"/>
                       </a:solidFill>
                       <a:prstDash val="solid"/>
                       <a:round/>
@@ -5802,7 +6631,7 @@
                     </a:lnL>
                     <a:lnR w="3810" cap="flat" cmpd="sng" algn="ctr">
                       <a:solidFill>
-                        <a:srgbClr val="CBD5E1"/>
+                        <a:srgbClr val="CBD5E0"/>
                       </a:solidFill>
                       <a:prstDash val="solid"/>
                       <a:round/>
@@ -5811,7 +6640,7 @@
                     </a:lnR>
                     <a:lnT w="3810" cap="flat" cmpd="sng" algn="ctr">
                       <a:solidFill>
-                        <a:srgbClr val="CBD5E1"/>
+                        <a:srgbClr val="CBD5E0"/>
                       </a:solidFill>
                       <a:prstDash val="solid"/>
                       <a:round/>
@@ -5820,7 +6649,7 @@
                     </a:lnT>
                     <a:lnB w="3810" cap="flat" cmpd="sng" algn="ctr">
                       <a:solidFill>
-                        <a:srgbClr val="CBD5E1"/>
+                        <a:srgbClr val="CBD5E0"/>
                       </a:solidFill>
                       <a:prstDash val="solid"/>
                       <a:round/>
@@ -5843,7 +6672,7 @@
                       <a:r>
                         <a:rPr lang="en-US" sz="1300" dirty="0">
                           <a:solidFill>
-                            <a:srgbClr val="0F172A"/>
+                            <a:srgbClr val="10161F"/>
                           </a:solidFill>
                           <a:latin typeface="Pretendard" pitchFamily="34" charset="0"/>
                           <a:ea typeface="Pretendard" pitchFamily="34" charset="-122"/>
@@ -5861,7 +6690,7 @@
                   <a:tcPr marL="50800" marR="50800" marT="25400" marB="25400" anchor="ctr">
                     <a:lnL w="3810" cap="flat" cmpd="sng" algn="ctr">
                       <a:solidFill>
-                        <a:srgbClr val="CBD5E1"/>
+                        <a:srgbClr val="CBD5E0"/>
                       </a:solidFill>
                       <a:prstDash val="solid"/>
                       <a:round/>
@@ -5870,7 +6699,7 @@
                     </a:lnL>
                     <a:lnR w="3810" cap="flat" cmpd="sng" algn="ctr">
                       <a:solidFill>
-                        <a:srgbClr val="CBD5E1"/>
+                        <a:srgbClr val="CBD5E0"/>
                       </a:solidFill>
                       <a:prstDash val="solid"/>
                       <a:round/>
@@ -5879,7 +6708,7 @@
                     </a:lnR>
                     <a:lnT w="3810" cap="flat" cmpd="sng" algn="ctr">
                       <a:solidFill>
-                        <a:srgbClr val="CBD5E1"/>
+                        <a:srgbClr val="CBD5E0"/>
                       </a:solidFill>
                       <a:prstDash val="solid"/>
                       <a:round/>
@@ -5888,7 +6717,7 @@
                     </a:lnT>
                     <a:lnB w="3810" cap="flat" cmpd="sng" algn="ctr">
                       <a:solidFill>
-                        <a:srgbClr val="CBD5E1"/>
+                        <a:srgbClr val="CBD5E0"/>
                       </a:solidFill>
                       <a:prstDash val="solid"/>
                       <a:round/>
@@ -5911,7 +6740,7 @@
                       <a:r>
                         <a:rPr lang="en-US" sz="1300" dirty="0">
                           <a:solidFill>
-                            <a:srgbClr val="0F172A"/>
+                            <a:srgbClr val="10161F"/>
                           </a:solidFill>
                           <a:latin typeface="Pretendard" pitchFamily="34" charset="0"/>
                           <a:ea typeface="Pretendard" pitchFamily="34" charset="-122"/>
@@ -5929,7 +6758,7 @@
                   <a:tcPr marL="50800" marR="50800" marT="25400" marB="25400" anchor="ctr">
                     <a:lnL w="3810" cap="flat" cmpd="sng" algn="ctr">
                       <a:solidFill>
-                        <a:srgbClr val="CBD5E1"/>
+                        <a:srgbClr val="CBD5E0"/>
                       </a:solidFill>
                       <a:prstDash val="solid"/>
                       <a:round/>
@@ -5938,7 +6767,7 @@
                     </a:lnL>
                     <a:lnR w="3810" cap="flat" cmpd="sng" algn="ctr">
                       <a:solidFill>
-                        <a:srgbClr val="CBD5E1"/>
+                        <a:srgbClr val="CBD5E0"/>
                       </a:solidFill>
                       <a:prstDash val="solid"/>
                       <a:round/>
@@ -5947,7 +6776,7 @@
                     </a:lnR>
                     <a:lnT w="3810" cap="flat" cmpd="sng" algn="ctr">
                       <a:solidFill>
-                        <a:srgbClr val="CBD5E1"/>
+                        <a:srgbClr val="CBD5E0"/>
                       </a:solidFill>
                       <a:prstDash val="solid"/>
                       <a:round/>
@@ -5956,7 +6785,7 @@
                     </a:lnT>
                     <a:lnB w="3810" cap="flat" cmpd="sng" algn="ctr">
                       <a:solidFill>
-                        <a:srgbClr val="CBD5E1"/>
+                        <a:srgbClr val="CBD5E0"/>
                       </a:solidFill>
                       <a:prstDash val="solid"/>
                       <a:round/>
@@ -5979,7 +6808,7 @@
                       <a:r>
                         <a:rPr lang="en-US" sz="1300" dirty="0">
                           <a:solidFill>
-                            <a:srgbClr val="0F172A"/>
+                            <a:srgbClr val="10161F"/>
                           </a:solidFill>
                           <a:latin typeface="Pretendard" pitchFamily="34" charset="0"/>
                           <a:ea typeface="Pretendard" pitchFamily="34" charset="-122"/>
@@ -5997,7 +6826,7 @@
                   <a:tcPr marL="50800" marR="50800" marT="25400" marB="25400" anchor="ctr">
                     <a:lnL w="3810" cap="flat" cmpd="sng" algn="ctr">
                       <a:solidFill>
-                        <a:srgbClr val="CBD5E1"/>
+                        <a:srgbClr val="CBD5E0"/>
                       </a:solidFill>
                       <a:prstDash val="solid"/>
                       <a:round/>
@@ -6006,7 +6835,7 @@
                     </a:lnL>
                     <a:lnR w="3810" cap="flat" cmpd="sng" algn="ctr">
                       <a:solidFill>
-                        <a:srgbClr val="CBD5E1"/>
+                        <a:srgbClr val="CBD5E0"/>
                       </a:solidFill>
                       <a:prstDash val="solid"/>
                       <a:round/>
@@ -6015,7 +6844,7 @@
                     </a:lnR>
                     <a:lnT w="3810" cap="flat" cmpd="sng" algn="ctr">
                       <a:solidFill>
-                        <a:srgbClr val="CBD5E1"/>
+                        <a:srgbClr val="CBD5E0"/>
                       </a:solidFill>
                       <a:prstDash val="solid"/>
                       <a:round/>
@@ -6024,7 +6853,7 @@
                     </a:lnT>
                     <a:lnB w="3810" cap="flat" cmpd="sng" algn="ctr">
                       <a:solidFill>
-                        <a:srgbClr val="CBD5E1"/>
+                        <a:srgbClr val="CBD5E0"/>
                       </a:solidFill>
                       <a:prstDash val="solid"/>
                       <a:round/>
@@ -6049,7 +6878,7 @@
                       <a:r>
                         <a:rPr lang="en-US" sz="1300" b="1" dirty="0">
                           <a:solidFill>
-                            <a:srgbClr val="0F172A"/>
+                            <a:srgbClr val="10161F"/>
                           </a:solidFill>
                           <a:latin typeface="Pretendard" pitchFamily="34" charset="0"/>
                           <a:ea typeface="Pretendard" pitchFamily="34" charset="-122"/>
@@ -6067,7 +6896,7 @@
                   <a:tcPr marL="50800" marR="50800" marT="25400" marB="25400" anchor="ctr">
                     <a:lnL w="3810" cap="flat" cmpd="sng" algn="ctr">
                       <a:solidFill>
-                        <a:srgbClr val="CBD5E1"/>
+                        <a:srgbClr val="CBD5E0"/>
                       </a:solidFill>
                       <a:prstDash val="solid"/>
                       <a:round/>
@@ -6076,7 +6905,7 @@
                     </a:lnL>
                     <a:lnR w="3810" cap="flat" cmpd="sng" algn="ctr">
                       <a:solidFill>
-                        <a:srgbClr val="CBD5E1"/>
+                        <a:srgbClr val="CBD5E0"/>
                       </a:solidFill>
                       <a:prstDash val="solid"/>
                       <a:round/>
@@ -6085,7 +6914,7 @@
                     </a:lnR>
                     <a:lnT w="3810" cap="flat" cmpd="sng" algn="ctr">
                       <a:solidFill>
-                        <a:srgbClr val="CBD5E1"/>
+                        <a:srgbClr val="CBD5E0"/>
                       </a:solidFill>
                       <a:prstDash val="solid"/>
                       <a:round/>
@@ -6094,7 +6923,7 @@
                     </a:lnT>
                     <a:lnB w="3810" cap="flat" cmpd="sng" algn="ctr">
                       <a:solidFill>
-                        <a:srgbClr val="CBD5E1"/>
+                        <a:srgbClr val="CBD5E0"/>
                       </a:solidFill>
                       <a:prstDash val="solid"/>
                       <a:round/>
@@ -6102,7 +6931,7 @@
                       <a:tailEnd type="none" w="med" len="med"/>
                     </a:lnB>
                     <a:solidFill>
-                      <a:srgbClr val="F8FAFC"/>
+                      <a:srgbClr val="F7FAFC"/>
                     </a:solidFill>
                   </a:tcPr>
                 </a:tc>
@@ -6117,7 +6946,7 @@
                       <a:r>
                         <a:rPr lang="en-US" sz="1300" dirty="0">
                           <a:solidFill>
-                            <a:srgbClr val="0F172A"/>
+                            <a:srgbClr val="10161F"/>
                           </a:solidFill>
                           <a:latin typeface="Pretendard" pitchFamily="34" charset="0"/>
                           <a:ea typeface="Pretendard" pitchFamily="34" charset="-122"/>
@@ -6135,7 +6964,7 @@
                   <a:tcPr marL="50800" marR="50800" marT="25400" marB="25400" anchor="ctr">
                     <a:lnL w="3810" cap="flat" cmpd="sng" algn="ctr">
                       <a:solidFill>
-                        <a:srgbClr val="CBD5E1"/>
+                        <a:srgbClr val="CBD5E0"/>
                       </a:solidFill>
                       <a:prstDash val="solid"/>
                       <a:round/>
@@ -6144,7 +6973,7 @@
                     </a:lnL>
                     <a:lnR w="3810" cap="flat" cmpd="sng" algn="ctr">
                       <a:solidFill>
-                        <a:srgbClr val="CBD5E1"/>
+                        <a:srgbClr val="CBD5E0"/>
                       </a:solidFill>
                       <a:prstDash val="solid"/>
                       <a:round/>
@@ -6153,7 +6982,7 @@
                     </a:lnR>
                     <a:lnT w="3810" cap="flat" cmpd="sng" algn="ctr">
                       <a:solidFill>
-                        <a:srgbClr val="CBD5E1"/>
+                        <a:srgbClr val="CBD5E0"/>
                       </a:solidFill>
                       <a:prstDash val="solid"/>
                       <a:round/>
@@ -6162,7 +6991,7 @@
                     </a:lnT>
                     <a:lnB w="3810" cap="flat" cmpd="sng" algn="ctr">
                       <a:solidFill>
-                        <a:srgbClr val="CBD5E1"/>
+                        <a:srgbClr val="CBD5E0"/>
                       </a:solidFill>
                       <a:prstDash val="solid"/>
                       <a:round/>
@@ -6170,7 +6999,7 @@
                       <a:tailEnd type="none" w="med" len="med"/>
                     </a:lnB>
                     <a:solidFill>
-                      <a:srgbClr val="F8FAFC"/>
+                      <a:srgbClr val="F7FAFC"/>
                     </a:solidFill>
                   </a:tcPr>
                 </a:tc>
@@ -6185,7 +7014,7 @@
                       <a:r>
                         <a:rPr lang="en-US" sz="1300" dirty="0">
                           <a:solidFill>
-                            <a:srgbClr val="0F172A"/>
+                            <a:srgbClr val="10161F"/>
                           </a:solidFill>
                           <a:latin typeface="Pretendard" pitchFamily="34" charset="0"/>
                           <a:ea typeface="Pretendard" pitchFamily="34" charset="-122"/>
@@ -6203,7 +7032,7 @@
                   <a:tcPr marL="50800" marR="50800" marT="25400" marB="25400" anchor="ctr">
                     <a:lnL w="3810" cap="flat" cmpd="sng" algn="ctr">
                       <a:solidFill>
-                        <a:srgbClr val="CBD5E1"/>
+                        <a:srgbClr val="CBD5E0"/>
                       </a:solidFill>
                       <a:prstDash val="solid"/>
                       <a:round/>
@@ -6212,7 +7041,7 @@
                     </a:lnL>
                     <a:lnR w="3810" cap="flat" cmpd="sng" algn="ctr">
                       <a:solidFill>
-                        <a:srgbClr val="CBD5E1"/>
+                        <a:srgbClr val="CBD5E0"/>
                       </a:solidFill>
                       <a:prstDash val="solid"/>
                       <a:round/>
@@ -6221,7 +7050,7 @@
                     </a:lnR>
                     <a:lnT w="3810" cap="flat" cmpd="sng" algn="ctr">
                       <a:solidFill>
-                        <a:srgbClr val="CBD5E1"/>
+                        <a:srgbClr val="CBD5E0"/>
                       </a:solidFill>
                       <a:prstDash val="solid"/>
                       <a:round/>
@@ -6230,7 +7059,7 @@
                     </a:lnT>
                     <a:lnB w="3810" cap="flat" cmpd="sng" algn="ctr">
                       <a:solidFill>
-                        <a:srgbClr val="CBD5E1"/>
+                        <a:srgbClr val="CBD5E0"/>
                       </a:solidFill>
                       <a:prstDash val="solid"/>
                       <a:round/>
@@ -6238,7 +7067,7 @@
                       <a:tailEnd type="none" w="med" len="med"/>
                     </a:lnB>
                     <a:solidFill>
-                      <a:srgbClr val="F8FAFC"/>
+                      <a:srgbClr val="F7FAFC"/>
                     </a:solidFill>
                   </a:tcPr>
                 </a:tc>
@@ -6253,7 +7082,7 @@
                       <a:r>
                         <a:rPr lang="en-US" sz="1300" dirty="0">
                           <a:solidFill>
-                            <a:srgbClr val="0F172A"/>
+                            <a:srgbClr val="10161F"/>
                           </a:solidFill>
                           <a:latin typeface="Pretendard" pitchFamily="34" charset="0"/>
                           <a:ea typeface="Pretendard" pitchFamily="34" charset="-122"/>
@@ -6271,7 +7100,7 @@
                   <a:tcPr marL="50800" marR="50800" marT="25400" marB="25400" anchor="ctr">
                     <a:lnL w="3810" cap="flat" cmpd="sng" algn="ctr">
                       <a:solidFill>
-                        <a:srgbClr val="CBD5E1"/>
+                        <a:srgbClr val="CBD5E0"/>
                       </a:solidFill>
                       <a:prstDash val="solid"/>
                       <a:round/>
@@ -6280,7 +7109,7 @@
                     </a:lnL>
                     <a:lnR w="3810" cap="flat" cmpd="sng" algn="ctr">
                       <a:solidFill>
-                        <a:srgbClr val="CBD5E1"/>
+                        <a:srgbClr val="CBD5E0"/>
                       </a:solidFill>
                       <a:prstDash val="solid"/>
                       <a:round/>
@@ -6289,7 +7118,7 @@
                     </a:lnR>
                     <a:lnT w="3810" cap="flat" cmpd="sng" algn="ctr">
                       <a:solidFill>
-                        <a:srgbClr val="CBD5E1"/>
+                        <a:srgbClr val="CBD5E0"/>
                       </a:solidFill>
                       <a:prstDash val="solid"/>
                       <a:round/>
@@ -6298,7 +7127,7 @@
                     </a:lnT>
                     <a:lnB w="3810" cap="flat" cmpd="sng" algn="ctr">
                       <a:solidFill>
-                        <a:srgbClr val="CBD5E1"/>
+                        <a:srgbClr val="CBD5E0"/>
                       </a:solidFill>
                       <a:prstDash val="solid"/>
                       <a:round/>
@@ -6306,7 +7135,7 @@
                       <a:tailEnd type="none" w="med" len="med"/>
                     </a:lnB>
                     <a:solidFill>
-                      <a:srgbClr val="F8FAFC"/>
+                      <a:srgbClr val="F7FAFC"/>
                     </a:solidFill>
                   </a:tcPr>
                 </a:tc>
@@ -6317,65 +7146,81 @@
       </p:graphicFrame>
       <p:sp>
         <p:nvSpPr>
-          <p:cNvPr id="6" name="Text 3"/>
-          <p:cNvSpPr/>
-          <p:nvPr/>
-        </p:nvSpPr>
-        <p:spPr>
-          <a:xfrm>
-            <a:off x="566928" y="6419088"/>
-            <a:ext cx="11057839" cy="201168"/>
-          </a:xfrm>
-          <a:prstGeom prst="rect">
-            <a:avLst/>
-          </a:prstGeom>
-          <a:noFill/>
-          <a:ln/>
-        </p:spPr>
-        <p:txBody>
-          <a:bodyPr wrap="square" lIns="0" tIns="0" rIns="0" bIns="0" rtlCol="0" anchor="ctr"/>
-          <a:lstStyle/>
-          <a:p>
-            <a:pPr algn="ctr" indent="0" marL="0">
-              <a:buNone/>
-            </a:pPr>
-            <a:r>
-              <a:rPr lang="en-US" sz="750" dirty="0">
-                <a:solidFill>
-                  <a:srgbClr val="64748B"/>
+          <p:cNvPr id="7" name="Text 4"/>
+          <p:cNvSpPr/>
+          <p:nvPr/>
+        </p:nvSpPr>
+        <p:spPr>
+          <a:xfrm>
+            <a:off x="566928" y="6382512"/>
+            <a:ext cx="7315200" cy="219456"/>
+          </a:xfrm>
+          <a:prstGeom prst="rect">
+            <a:avLst/>
+          </a:prstGeom>
+          <a:noFill/>
+          <a:ln/>
+        </p:spPr>
+        <p:txBody>
+          <a:bodyPr wrap="square" lIns="0" tIns="0" rIns="0" bIns="0" rtlCol="0" anchor="ctr"/>
+          <a:lstStyle/>
+          <a:p>
+            <a:pPr indent="0" marL="0">
+              <a:buNone/>
+            </a:pPr>
+            <a:r>
+              <a:rPr lang="en-US" sz="800" dirty="0">
+                <a:solidFill>
+                  <a:srgbClr val="718096"/>
                 </a:solidFill>
                 <a:latin typeface="Pretendard" pitchFamily="34" charset="0"/>
                 <a:ea typeface="Pretendard" pitchFamily="34" charset="-122"/>
                 <a:cs typeface="Pretendard" pitchFamily="34" charset="-120"/>
               </a:rPr>
-              <a:t>크리딜  ·    ·  5</a:t>
-            </a:r>
-            <a:endParaRPr lang="en-US" sz="750" dirty="0"/>
-          </a:p>
-        </p:txBody>
-      </p:sp>
-      <p:sp>
-        <p:nvSpPr>
-          <p:cNvPr id="7" name="Shape 4"/>
-          <p:cNvSpPr/>
-          <p:nvPr/>
-        </p:nvSpPr>
-        <p:spPr>
-          <a:xfrm>
-            <a:off x="4437172" y="6382512"/>
-            <a:ext cx="3317352" cy="0"/>
-          </a:xfrm>
-          <a:prstGeom prst="line">
-            <a:avLst/>
-          </a:prstGeom>
-          <a:noFill/>
-          <a:ln w="6350">
-            <a:solidFill>
-              <a:srgbClr val="6B8E00"/>
-            </a:solidFill>
-            <a:prstDash val="solid"/>
-          </a:ln>
-        </p:spPr>
+              <a:t>크리딜   |   </a:t>
+            </a:r>
+            <a:endParaRPr lang="en-US" sz="800" dirty="0"/>
+          </a:p>
+        </p:txBody>
+      </p:sp>
+      <p:sp>
+        <p:nvSpPr>
+          <p:cNvPr id="8" name="Text 5"/>
+          <p:cNvSpPr/>
+          <p:nvPr/>
+        </p:nvSpPr>
+        <p:spPr>
+          <a:xfrm>
+            <a:off x="10710367" y="6382512"/>
+            <a:ext cx="914400" cy="219456"/>
+          </a:xfrm>
+          <a:prstGeom prst="rect">
+            <a:avLst/>
+          </a:prstGeom>
+          <a:noFill/>
+          <a:ln/>
+        </p:spPr>
+        <p:txBody>
+          <a:bodyPr wrap="square" lIns="0" tIns="0" rIns="0" bIns="0" rtlCol="0" anchor="ctr"/>
+          <a:lstStyle/>
+          <a:p>
+            <a:pPr algn="r" indent="0" marL="0">
+              <a:buNone/>
+            </a:pPr>
+            <a:r>
+              <a:rPr lang="en-US" sz="900" b="1" dirty="0">
+                <a:solidFill>
+                  <a:srgbClr val="B98A2E"/>
+                </a:solidFill>
+                <a:latin typeface="Arial" pitchFamily="34" charset="0"/>
+                <a:ea typeface="Arial" pitchFamily="34" charset="-122"/>
+                <a:cs typeface="Arial" pitchFamily="34" charset="-120"/>
+              </a:rPr>
+              <a:t>5</a:t>
+            </a:r>
+            <a:endParaRPr lang="en-US" sz="900" dirty="0"/>
+          </a:p>
+        </p:txBody>
       </p:sp>
     </p:spTree>
   </p:cSld>
@@ -6417,14 +7262,14 @@
         </p:nvSpPr>
         <p:spPr>
           <a:xfrm>
-            <a:off x="566928" y="384048"/>
-            <a:ext cx="45720" cy="566928"/>
-          </a:xfrm>
-          <a:prstGeom prst="rect">
+            <a:off x="566928" y="457200"/>
+            <a:ext cx="384048" cy="384048"/>
+          </a:xfrm>
+          <a:prstGeom prst="ellipse">
             <a:avLst/>
           </a:prstGeom>
           <a:solidFill>
-            <a:srgbClr val="6B8E00"/>
+            <a:srgbClr val="B98A2E"/>
           </a:solidFill>
           <a:ln/>
         </p:spPr>
@@ -6437,32 +7282,71 @@
         </p:nvSpPr>
         <p:spPr>
           <a:xfrm>
-            <a:off x="749808" y="384048"/>
-            <a:ext cx="10874959" cy="182880"/>
-          </a:xfrm>
-          <a:prstGeom prst="rect">
-            <a:avLst/>
-          </a:prstGeom>
-          <a:noFill/>
-          <a:ln/>
-        </p:spPr>
-        <p:txBody>
-          <a:bodyPr wrap="square" lIns="0" tIns="0" rIns="0" bIns="0" rtlCol="0" anchor="ctr"/>
-          <a:lstStyle/>
-          <a:p>
-            <a:pPr indent="0" marL="0">
-              <a:buNone/>
-            </a:pPr>
-            <a:r>
-              <a:rPr lang="en-US" sz="950" b="1" spc="200" kern="0" dirty="0">
-                <a:solidFill>
-                  <a:srgbClr val="6B8E00"/>
+            <a:off x="566928" y="457200"/>
+            <a:ext cx="384048" cy="384048"/>
+          </a:xfrm>
+          <a:prstGeom prst="rect">
+            <a:avLst/>
+          </a:prstGeom>
+          <a:noFill/>
+          <a:ln/>
+        </p:spPr>
+        <p:txBody>
+          <a:bodyPr wrap="square" lIns="0" tIns="0" rIns="0" bIns="0" rtlCol="0" anchor="ctr"/>
+          <a:lstStyle/>
+          <a:p>
+            <a:pPr algn="ctr" indent="0" marL="0">
+              <a:buNone/>
+            </a:pPr>
+            <a:r>
+              <a:rPr lang="en-US" sz="1300" b="1" dirty="0">
+                <a:solidFill>
+                  <a:srgbClr val="FFFFFF"/>
                 </a:solidFill>
                 <a:latin typeface="Arial" pitchFamily="34" charset="0"/>
                 <a:ea typeface="Arial" pitchFamily="34" charset="-122"/>
                 <a:cs typeface="Arial" pitchFamily="34" charset="-120"/>
               </a:rPr>
-              <a:t>06  Profit</a:t>
+              <a:t>06</a:t>
+            </a:r>
+            <a:endParaRPr lang="en-US" sz="1300" dirty="0"/>
+          </a:p>
+        </p:txBody>
+      </p:sp>
+      <p:sp>
+        <p:nvSpPr>
+          <p:cNvPr id="4" name="Text 2"/>
+          <p:cNvSpPr/>
+          <p:nvPr/>
+        </p:nvSpPr>
+        <p:spPr>
+          <a:xfrm>
+            <a:off x="1133856" y="457200"/>
+            <a:ext cx="10490911" cy="182880"/>
+          </a:xfrm>
+          <a:prstGeom prst="rect">
+            <a:avLst/>
+          </a:prstGeom>
+          <a:noFill/>
+          <a:ln/>
+        </p:spPr>
+        <p:txBody>
+          <a:bodyPr wrap="square" lIns="0" tIns="0" rIns="0" bIns="0" rtlCol="0" anchor="ctr"/>
+          <a:lstStyle/>
+          <a:p>
+            <a:pPr indent="0" marL="0">
+              <a:buNone/>
+            </a:pPr>
+            <a:r>
+              <a:rPr lang="en-US" sz="950" b="1" spc="200" kern="0" dirty="0">
+                <a:solidFill>
+                  <a:srgbClr val="B98A2E"/>
+                </a:solidFill>
+                <a:latin typeface="Arial" pitchFamily="34" charset="0"/>
+                <a:ea typeface="Arial" pitchFamily="34" charset="-122"/>
+                <a:cs typeface="Arial" pitchFamily="34" charset="-120"/>
+              </a:rPr>
+              <a:t>Profit</a:t>
             </a:r>
             <a:endParaRPr lang="en-US" sz="950" dirty="0"/>
           </a:p>
@@ -6470,14 +7354,14 @@
       </p:sp>
       <p:sp>
         <p:nvSpPr>
-          <p:cNvPr id="4" name="Text 2"/>
-          <p:cNvSpPr/>
-          <p:nvPr/>
-        </p:nvSpPr>
-        <p:spPr>
-          <a:xfrm>
-            <a:off x="749808" y="566928"/>
-            <a:ext cx="10874959" cy="384048"/>
+          <p:cNvPr id="5" name="Text 3"/>
+          <p:cNvSpPr/>
+          <p:nvPr/>
+        </p:nvSpPr>
+        <p:spPr>
+          <a:xfrm>
+            <a:off x="1133856" y="640080"/>
+            <a:ext cx="10490911" cy="365760"/>
           </a:xfrm>
           <a:prstGeom prst="rect">
             <a:avLst/>
@@ -6493,9 +7377,9 @@
               <a:buNone/>
             </a:pPr>
             <a:r>
-              <a:rPr lang="en-US" sz="2200" b="1" dirty="0">
-                <a:solidFill>
-                  <a:srgbClr val="0F172A"/>
+              <a:rPr lang="en-US" sz="2300" b="1" dirty="0">
+                <a:solidFill>
+                  <a:srgbClr val="10161F"/>
                 </a:solidFill>
                 <a:latin typeface="Pretendard" pitchFamily="34" charset="0"/>
                 <a:ea typeface="Pretendard" pitchFamily="34" charset="-122"/>
@@ -6503,29 +7387,133 @@
               </a:rPr>
               <a:t>수익성 분석</a:t>
             </a:r>
-            <a:endParaRPr lang="en-US" sz="2200" dirty="0"/>
-          </a:p>
-        </p:txBody>
-      </p:sp>
-      <p:sp>
-        <p:nvSpPr>
-          <p:cNvPr id="5" name="Text 3"/>
-          <p:cNvSpPr/>
-          <p:nvPr/>
-        </p:nvSpPr>
-        <p:spPr>
-          <a:xfrm>
-            <a:off x="566928" y="1417320"/>
-            <a:ext cx="2606040" cy="402336"/>
-          </a:xfrm>
-          <a:prstGeom prst="rect">
-            <a:avLst/>
-          </a:prstGeom>
-          <a:noFill/>
-          <a:ln/>
-        </p:spPr>
-        <p:txBody>
-          <a:bodyPr wrap="square" lIns="0" tIns="0" rIns="0" bIns="0" rtlCol="0" anchor="ctr"/>
+            <a:endParaRPr lang="en-US" sz="2300" dirty="0"/>
+          </a:p>
+        </p:txBody>
+      </p:sp>
+      <p:sp>
+        <p:nvSpPr>
+          <p:cNvPr id="6" name="Shape 4"/>
+          <p:cNvSpPr/>
+          <p:nvPr/>
+        </p:nvSpPr>
+        <p:spPr>
+          <a:xfrm>
+            <a:off x="566928" y="1325880"/>
+            <a:ext cx="11057839" cy="0"/>
+          </a:xfrm>
+          <a:prstGeom prst="line">
+            <a:avLst/>
+          </a:prstGeom>
+          <a:noFill/>
+          <a:ln w="19050">
+            <a:solidFill>
+              <a:srgbClr val="B98A2E"/>
+            </a:solidFill>
+            <a:prstDash val="solid"/>
+          </a:ln>
+        </p:spPr>
+      </p:sp>
+      <p:sp>
+        <p:nvSpPr>
+          <p:cNvPr id="7" name="Shape 5"/>
+          <p:cNvSpPr/>
+          <p:nvPr/>
+        </p:nvSpPr>
+        <p:spPr>
+          <a:xfrm>
+            <a:off x="566928" y="1645920"/>
+            <a:ext cx="11057839" cy="1280160"/>
+          </a:xfrm>
+          <a:prstGeom prst="roundRect">
+            <a:avLst>
+              <a:gd name="adj" fmla="val 4286"/>
+            </a:avLst>
+          </a:prstGeom>
+          <a:solidFill>
+            <a:srgbClr val="BEE3F8"/>
+          </a:solidFill>
+          <a:ln/>
+        </p:spPr>
+      </p:sp>
+      <p:sp>
+        <p:nvSpPr>
+          <p:cNvPr id="8" name="Shape 6"/>
+          <p:cNvSpPr/>
+          <p:nvPr/>
+        </p:nvSpPr>
+        <p:spPr>
+          <a:xfrm>
+            <a:off x="566928" y="1700784"/>
+            <a:ext cx="36576" cy="1170432"/>
+          </a:xfrm>
+          <a:prstGeom prst="rect">
+            <a:avLst/>
+          </a:prstGeom>
+          <a:solidFill>
+            <a:srgbClr val="2B6CB0"/>
+          </a:solidFill>
+          <a:ln/>
+        </p:spPr>
+      </p:sp>
+      <p:sp>
+        <p:nvSpPr>
+          <p:cNvPr id="9" name="Text 7"/>
+          <p:cNvSpPr/>
+          <p:nvPr/>
+        </p:nvSpPr>
+        <p:spPr>
+          <a:xfrm>
+            <a:off x="749808" y="1755648"/>
+            <a:ext cx="10728655" cy="201168"/>
+          </a:xfrm>
+          <a:prstGeom prst="rect">
+            <a:avLst/>
+          </a:prstGeom>
+          <a:noFill/>
+          <a:ln/>
+        </p:spPr>
+        <p:txBody>
+          <a:bodyPr wrap="square" lIns="0" tIns="0" rIns="0" bIns="0" rtlCol="0" anchor="ctr"/>
+          <a:lstStyle/>
+          <a:p>
+            <a:pPr indent="0" marL="0">
+              <a:buNone/>
+            </a:pPr>
+            <a:r>
+              <a:rPr lang="en-US" sz="1050" b="1" dirty="0">
+                <a:solidFill>
+                  <a:srgbClr val="2B6CB0"/>
+                </a:solidFill>
+                <a:latin typeface="Pretendard" pitchFamily="34" charset="0"/>
+                <a:ea typeface="Pretendard" pitchFamily="34" charset="-122"/>
+                <a:cs typeface="Pretendard" pitchFamily="34" charset="-120"/>
+              </a:rPr>
+              <a:t>투자 가치 제안</a:t>
+            </a:r>
+            <a:endParaRPr lang="en-US" sz="1050" dirty="0"/>
+          </a:p>
+        </p:txBody>
+      </p:sp>
+      <p:sp>
+        <p:nvSpPr>
+          <p:cNvPr id="10" name="Text 8"/>
+          <p:cNvSpPr/>
+          <p:nvPr/>
+        </p:nvSpPr>
+        <p:spPr>
+          <a:xfrm>
+            <a:off x="749808" y="1975104"/>
+            <a:ext cx="10728655" cy="877824"/>
+          </a:xfrm>
+          <a:prstGeom prst="rect">
+            <a:avLst/>
+          </a:prstGeom>
+          <a:noFill/>
+          <a:ln/>
+        </p:spPr>
+        <p:txBody>
+          <a:bodyPr wrap="square" lIns="0" tIns="0" rIns="0" bIns="0" rtlCol="0" anchor="t"/>
           <a:lstStyle/>
           <a:p>
             <a:pPr indent="0" marL="0">
@@ -6535,9 +7523,9 @@
               <a:buNone/>
             </a:pPr>
             <a:r>
-              <a:rPr lang="en-US" sz="1300" dirty="0">
-                <a:solidFill>
-                  <a:srgbClr val="64748B"/>
+              <a:rPr lang="en-US" sz="930" dirty="0">
+                <a:solidFill>
+                  <a:srgbClr val="10161F"/>
                 </a:solidFill>
                 <a:latin typeface="Pretendard" pitchFamily="34" charset="0"/>
                 <a:ea typeface="Pretendard" pitchFamily="34" charset="-122"/>
@@ -6545,20 +7533,20 @@
               </a:rPr>
               <a:t>연 순영업소득(NOI) 약 7.14억 원, 매입 Cap Rate 4.62%입니다.</a:t>
             </a:r>
-            <a:endParaRPr lang="en-US" sz="1300" dirty="0"/>
-          </a:p>
-        </p:txBody>
-      </p:sp>
-      <p:sp>
-        <p:nvSpPr>
-          <p:cNvPr id="6" name="Text 4"/>
-          <p:cNvSpPr/>
-          <p:nvPr/>
-        </p:nvSpPr>
-        <p:spPr>
-          <a:xfrm>
-            <a:off x="3172968" y="1417320"/>
-            <a:ext cx="4251960" cy="402336"/>
+            <a:endParaRPr lang="en-US" sz="930" dirty="0"/>
+          </a:p>
+        </p:txBody>
+      </p:sp>
+      <p:sp>
+        <p:nvSpPr>
+          <p:cNvPr id="11" name="Text 9"/>
+          <p:cNvSpPr/>
+          <p:nvPr/>
+        </p:nvSpPr>
+        <p:spPr>
+          <a:xfrm>
+            <a:off x="566928" y="6382512"/>
+            <a:ext cx="7315200" cy="219456"/>
           </a:xfrm>
           <a:prstGeom prst="rect">
             <a:avLst/>
@@ -6571,184 +7559,20 @@
           <a:lstStyle/>
           <a:p>
             <a:pPr indent="0" marL="0">
-              <a:lnSpc>
-                <a:spcPct val="120000"/>
-              </a:lnSpc>
-              <a:buNone/>
-            </a:pPr>
-            <a:endParaRPr lang="en-US" sz="1300" dirty="0"/>
-          </a:p>
-        </p:txBody>
-      </p:sp>
-      <p:sp>
-        <p:nvSpPr>
-          <p:cNvPr id="7" name="Shape 5"/>
-          <p:cNvSpPr/>
-          <p:nvPr/>
-        </p:nvSpPr>
-        <p:spPr>
-          <a:xfrm>
-            <a:off x="566928" y="1819656"/>
-            <a:ext cx="6858000" cy="0"/>
-          </a:xfrm>
-          <a:prstGeom prst="line">
-            <a:avLst/>
-          </a:prstGeom>
-          <a:noFill/>
-          <a:ln w="3810">
-            <a:solidFill>
-              <a:srgbClr val="CBD5E1"/>
-            </a:solidFill>
-            <a:prstDash val="solid"/>
-          </a:ln>
-        </p:spPr>
-      </p:sp>
-      <p:sp>
-        <p:nvSpPr>
-          <p:cNvPr id="8" name="Text 6"/>
-          <p:cNvSpPr/>
-          <p:nvPr/>
-        </p:nvSpPr>
-        <p:spPr>
-          <a:xfrm>
-            <a:off x="566928" y="1819656"/>
-            <a:ext cx="2606040" cy="402336"/>
-          </a:xfrm>
-          <a:prstGeom prst="rect">
-            <a:avLst/>
-          </a:prstGeom>
-          <a:noFill/>
-          <a:ln/>
-        </p:spPr>
-        <p:txBody>
-          <a:bodyPr wrap="square" lIns="0" tIns="0" rIns="0" bIns="0" rtlCol="0" anchor="ctr"/>
-          <a:lstStyle/>
-          <a:p>
-            <a:pPr indent="0" marL="0">
-              <a:lnSpc>
-                <a:spcPct val="120000"/>
-              </a:lnSpc>
-              <a:buNone/>
-            </a:pPr>
-            <a:r>
-              <a:rPr lang="en-US" sz="1300" dirty="0">
-                <a:solidFill>
-                  <a:srgbClr val="64748B"/>
+              <a:buNone/>
+            </a:pPr>
+            <a:r>
+              <a:rPr lang="en-US" sz="800" dirty="0">
+                <a:solidFill>
+                  <a:srgbClr val="718096"/>
                 </a:solidFill>
                 <a:latin typeface="Pretendard" pitchFamily="34" charset="0"/>
                 <a:ea typeface="Pretendard" pitchFamily="34" charset="-122"/>
                 <a:cs typeface="Pretendard" pitchFamily="34" charset="-120"/>
               </a:rPr>
-              <a:t>- 실투자금</a:t>
-            </a:r>
-            <a:endParaRPr lang="en-US" sz="1300" dirty="0"/>
-          </a:p>
-        </p:txBody>
-      </p:sp>
-      <p:sp>
-        <p:nvSpPr>
-          <p:cNvPr id="9" name="Text 7"/>
-          <p:cNvSpPr/>
-          <p:nvPr/>
-        </p:nvSpPr>
-        <p:spPr>
-          <a:xfrm>
-            <a:off x="3172968" y="1819656"/>
-            <a:ext cx="4251960" cy="402336"/>
-          </a:xfrm>
-          <a:prstGeom prst="rect">
-            <a:avLst/>
-          </a:prstGeom>
-          <a:noFill/>
-          <a:ln/>
-        </p:spPr>
-        <p:txBody>
-          <a:bodyPr wrap="square" lIns="0" tIns="0" rIns="0" bIns="0" rtlCol="0" anchor="ctr"/>
-          <a:lstStyle/>
-          <a:p>
-            <a:pPr indent="0" marL="0">
-              <a:lnSpc>
-                <a:spcPct val="120000"/>
-              </a:lnSpc>
-              <a:buNone/>
-            </a:pPr>
-            <a:r>
-              <a:rPr lang="en-US" sz="1300" b="1" dirty="0">
-                <a:solidFill>
-                  <a:srgbClr val="0F172A"/>
-                </a:solidFill>
-                <a:latin typeface="Pretendard" pitchFamily="34" charset="0"/>
-                <a:ea typeface="Pretendard" pitchFamily="34" charset="-122"/>
-                <a:cs typeface="Pretendard" pitchFamily="34" charset="-120"/>
-              </a:rPr>
-              <a:t>약 69억 원</a:t>
-            </a:r>
-            <a:endParaRPr lang="en-US" sz="1300" dirty="0"/>
-          </a:p>
-        </p:txBody>
-      </p:sp>
-      <p:sp>
-        <p:nvSpPr>
-          <p:cNvPr id="10" name="Shape 8"/>
-          <p:cNvSpPr/>
-          <p:nvPr/>
-        </p:nvSpPr>
-        <p:spPr>
-          <a:xfrm>
-            <a:off x="566928" y="2221992"/>
-            <a:ext cx="6858000" cy="0"/>
-          </a:xfrm>
-          <a:prstGeom prst="line">
-            <a:avLst/>
-          </a:prstGeom>
-          <a:noFill/>
-          <a:ln w="3810">
-            <a:solidFill>
-              <a:srgbClr val="CBD5E1"/>
-            </a:solidFill>
-            <a:prstDash val="solid"/>
-          </a:ln>
-        </p:spPr>
-      </p:sp>
-      <p:sp>
-        <p:nvSpPr>
-          <p:cNvPr id="11" name="Text 9"/>
-          <p:cNvSpPr/>
-          <p:nvPr/>
-        </p:nvSpPr>
-        <p:spPr>
-          <a:xfrm>
-            <a:off x="566928" y="2221992"/>
-            <a:ext cx="2606040" cy="402336"/>
-          </a:xfrm>
-          <a:prstGeom prst="rect">
-            <a:avLst/>
-          </a:prstGeom>
-          <a:noFill/>
-          <a:ln/>
-        </p:spPr>
-        <p:txBody>
-          <a:bodyPr wrap="square" lIns="0" tIns="0" rIns="0" bIns="0" rtlCol="0" anchor="ctr"/>
-          <a:lstStyle/>
-          <a:p>
-            <a:pPr indent="0" marL="0">
-              <a:lnSpc>
-                <a:spcPct val="120000"/>
-              </a:lnSpc>
-              <a:buNone/>
-            </a:pPr>
-            <a:r>
-              <a:rPr lang="en-US" sz="1300" dirty="0">
-                <a:solidFill>
-                  <a:srgbClr val="64748B"/>
-                </a:solidFill>
-                <a:latin typeface="Pretendard" pitchFamily="34" charset="0"/>
-                <a:ea typeface="Pretendard" pitchFamily="34" charset="-122"/>
-                <a:cs typeface="Pretendard" pitchFamily="34" charset="-120"/>
-              </a:rPr>
-              <a:t>- 순수익(매월)</a:t>
-            </a:r>
-            <a:endParaRPr lang="en-US" sz="1300" dirty="0"/>
+              <a:t>크리딜   |   </a:t>
+            </a:r>
+            <a:endParaRPr lang="en-US" sz="800" dirty="0"/>
           </a:p>
         </p:txBody>
       </p:sp>
@@ -6760,231 +7584,36 @@
         </p:nvSpPr>
         <p:spPr>
           <a:xfrm>
-            <a:off x="3172968" y="2221992"/>
-            <a:ext cx="4251960" cy="402336"/>
-          </a:xfrm>
-          <a:prstGeom prst="rect">
-            <a:avLst/>
-          </a:prstGeom>
-          <a:noFill/>
-          <a:ln/>
-        </p:spPr>
-        <p:txBody>
-          <a:bodyPr wrap="square" lIns="0" tIns="0" rIns="0" bIns="0" rtlCol="0" anchor="ctr"/>
-          <a:lstStyle/>
-          <a:p>
-            <a:pPr indent="0" marL="0">
-              <a:lnSpc>
-                <a:spcPct val="120000"/>
-              </a:lnSpc>
-              <a:buNone/>
-            </a:pPr>
-            <a:r>
-              <a:rPr lang="en-US" sz="1300" b="1" dirty="0">
-                <a:solidFill>
-                  <a:srgbClr val="0F172A"/>
-                </a:solidFill>
-                <a:latin typeface="Pretendard" pitchFamily="34" charset="0"/>
-                <a:ea typeface="Pretendard" pitchFamily="34" charset="-122"/>
-                <a:cs typeface="Pretendard" pitchFamily="34" charset="-120"/>
-              </a:rPr>
-              <a:t>약 3,650만 원</a:t>
-            </a:r>
-            <a:endParaRPr lang="en-US" sz="1300" dirty="0"/>
-          </a:p>
-        </p:txBody>
-      </p:sp>
-      <p:sp>
-        <p:nvSpPr>
-          <p:cNvPr id="13" name="Shape 11"/>
-          <p:cNvSpPr/>
-          <p:nvPr/>
-        </p:nvSpPr>
-        <p:spPr>
-          <a:xfrm>
-            <a:off x="566928" y="2624328"/>
-            <a:ext cx="6858000" cy="0"/>
-          </a:xfrm>
-          <a:prstGeom prst="line">
-            <a:avLst/>
-          </a:prstGeom>
-          <a:noFill/>
-          <a:ln w="3810">
-            <a:solidFill>
-              <a:srgbClr val="CBD5E1"/>
-            </a:solidFill>
-            <a:prstDash val="solid"/>
-          </a:ln>
-        </p:spPr>
-      </p:sp>
-      <p:sp>
-        <p:nvSpPr>
-          <p:cNvPr id="14" name="Text 12"/>
-          <p:cNvSpPr/>
-          <p:nvPr/>
-        </p:nvSpPr>
-        <p:spPr>
-          <a:xfrm>
-            <a:off x="566928" y="2624328"/>
-            <a:ext cx="2606040" cy="402336"/>
-          </a:xfrm>
-          <a:prstGeom prst="rect">
-            <a:avLst/>
-          </a:prstGeom>
-          <a:noFill/>
-          <a:ln/>
-        </p:spPr>
-        <p:txBody>
-          <a:bodyPr wrap="square" lIns="0" tIns="0" rIns="0" bIns="0" rtlCol="0" anchor="ctr"/>
-          <a:lstStyle/>
-          <a:p>
-            <a:pPr indent="0" marL="0">
-              <a:lnSpc>
-                <a:spcPct val="120000"/>
-              </a:lnSpc>
-              <a:buNone/>
-            </a:pPr>
-            <a:r>
-              <a:rPr lang="en-US" sz="1300" dirty="0">
-                <a:solidFill>
-                  <a:srgbClr val="64748B"/>
-                </a:solidFill>
-                <a:latin typeface="Pretendard" pitchFamily="34" charset="0"/>
-                <a:ea typeface="Pretendard" pitchFamily="34" charset="-122"/>
-                <a:cs typeface="Pretendard" pitchFamily="34" charset="-120"/>
-              </a:rPr>
-              <a:t>- 레버리지 수익률</a:t>
-            </a:r>
-            <a:endParaRPr lang="en-US" sz="1300" dirty="0"/>
-          </a:p>
-        </p:txBody>
-      </p:sp>
-      <p:sp>
-        <p:nvSpPr>
-          <p:cNvPr id="15" name="Text 13"/>
-          <p:cNvSpPr/>
-          <p:nvPr/>
-        </p:nvSpPr>
-        <p:spPr>
-          <a:xfrm>
-            <a:off x="3172968" y="2624328"/>
-            <a:ext cx="4251960" cy="402336"/>
-          </a:xfrm>
-          <a:prstGeom prst="rect">
-            <a:avLst/>
-          </a:prstGeom>
-          <a:noFill/>
-          <a:ln/>
-        </p:spPr>
-        <p:txBody>
-          <a:bodyPr wrap="square" lIns="0" tIns="0" rIns="0" bIns="0" rtlCol="0" anchor="ctr"/>
-          <a:lstStyle/>
-          <a:p>
-            <a:pPr indent="0" marL="0">
-              <a:lnSpc>
-                <a:spcPct val="120000"/>
-              </a:lnSpc>
-              <a:buNone/>
-            </a:pPr>
-            <a:r>
-              <a:rPr lang="en-US" sz="1300" b="1" dirty="0">
-                <a:solidFill>
-                  <a:srgbClr val="0F172A"/>
-                </a:solidFill>
-                <a:latin typeface="Pretendard" pitchFamily="34" charset="0"/>
-                <a:ea typeface="Pretendard" pitchFamily="34" charset="-122"/>
-                <a:cs typeface="Pretendard" pitchFamily="34" charset="-120"/>
-              </a:rPr>
-              <a:t>약 5.8%</a:t>
-            </a:r>
-            <a:endParaRPr lang="en-US" sz="1300" dirty="0"/>
-          </a:p>
-        </p:txBody>
-      </p:sp>
-      <p:sp>
-        <p:nvSpPr>
-          <p:cNvPr id="16" name="Shape 14"/>
-          <p:cNvSpPr/>
-          <p:nvPr/>
-        </p:nvSpPr>
-        <p:spPr>
-          <a:xfrm>
-            <a:off x="7604608" y="1371600"/>
-            <a:ext cx="0" cy="4754880"/>
-          </a:xfrm>
-          <a:prstGeom prst="line">
-            <a:avLst/>
-          </a:prstGeom>
-          <a:noFill/>
-          <a:ln w="8890">
-            <a:solidFill>
-              <a:srgbClr val="6B8E00"/>
-            </a:solidFill>
-            <a:prstDash val="solid"/>
-          </a:ln>
-        </p:spPr>
-      </p:sp>
-      <p:sp>
-        <p:nvSpPr>
-          <p:cNvPr id="17" name="Text 15"/>
-          <p:cNvSpPr/>
-          <p:nvPr/>
-        </p:nvSpPr>
-        <p:spPr>
-          <a:xfrm>
-            <a:off x="566928" y="6419088"/>
-            <a:ext cx="11057839" cy="201168"/>
-          </a:xfrm>
-          <a:prstGeom prst="rect">
-            <a:avLst/>
-          </a:prstGeom>
-          <a:noFill/>
-          <a:ln/>
-        </p:spPr>
-        <p:txBody>
-          <a:bodyPr wrap="square" lIns="0" tIns="0" rIns="0" bIns="0" rtlCol="0" anchor="ctr"/>
-          <a:lstStyle/>
-          <a:p>
-            <a:pPr algn="ctr" indent="0" marL="0">
-              <a:buNone/>
-            </a:pPr>
-            <a:r>
-              <a:rPr lang="en-US" sz="750" dirty="0">
-                <a:solidFill>
-                  <a:srgbClr val="64748B"/>
-                </a:solidFill>
-                <a:latin typeface="Pretendard" pitchFamily="34" charset="0"/>
-                <a:ea typeface="Pretendard" pitchFamily="34" charset="-122"/>
-                <a:cs typeface="Pretendard" pitchFamily="34" charset="-120"/>
-              </a:rPr>
-              <a:t>크리딜  ·    ·  6</a:t>
-            </a:r>
-            <a:endParaRPr lang="en-US" sz="750" dirty="0"/>
-          </a:p>
-        </p:txBody>
-      </p:sp>
-      <p:sp>
-        <p:nvSpPr>
-          <p:cNvPr id="18" name="Shape 16"/>
-          <p:cNvSpPr/>
-          <p:nvPr/>
-        </p:nvSpPr>
-        <p:spPr>
-          <a:xfrm>
-            <a:off x="4437172" y="6382512"/>
-            <a:ext cx="3317352" cy="0"/>
-          </a:xfrm>
-          <a:prstGeom prst="line">
-            <a:avLst/>
-          </a:prstGeom>
-          <a:noFill/>
-          <a:ln w="6350">
-            <a:solidFill>
-              <a:srgbClr val="6B8E00"/>
-            </a:solidFill>
-            <a:prstDash val="solid"/>
-          </a:ln>
-        </p:spPr>
+            <a:off x="10710367" y="6382512"/>
+            <a:ext cx="914400" cy="219456"/>
+          </a:xfrm>
+          <a:prstGeom prst="rect">
+            <a:avLst/>
+          </a:prstGeom>
+          <a:noFill/>
+          <a:ln/>
+        </p:spPr>
+        <p:txBody>
+          <a:bodyPr wrap="square" lIns="0" tIns="0" rIns="0" bIns="0" rtlCol="0" anchor="ctr"/>
+          <a:lstStyle/>
+          <a:p>
+            <a:pPr algn="r" indent="0" marL="0">
+              <a:buNone/>
+            </a:pPr>
+            <a:r>
+              <a:rPr lang="en-US" sz="900" b="1" dirty="0">
+                <a:solidFill>
+                  <a:srgbClr val="B98A2E"/>
+                </a:solidFill>
+                <a:latin typeface="Arial" pitchFamily="34" charset="0"/>
+                <a:ea typeface="Arial" pitchFamily="34" charset="-122"/>
+                <a:cs typeface="Arial" pitchFamily="34" charset="-120"/>
+              </a:rPr>
+              <a:t>6</a:t>
+            </a:r>
+            <a:endParaRPr lang="en-US" sz="900" dirty="0"/>
+          </a:p>
+        </p:txBody>
       </p:sp>
     </p:spTree>
   </p:cSld>
@@ -7026,14 +7655,14 @@
         </p:nvSpPr>
         <p:spPr>
           <a:xfrm>
-            <a:off x="566928" y="384048"/>
-            <a:ext cx="45720" cy="566928"/>
-          </a:xfrm>
-          <a:prstGeom prst="rect">
+            <a:off x="566928" y="457200"/>
+            <a:ext cx="384048" cy="384048"/>
+          </a:xfrm>
+          <a:prstGeom prst="ellipse">
             <a:avLst/>
           </a:prstGeom>
           <a:solidFill>
-            <a:srgbClr val="6B8E00"/>
+            <a:srgbClr val="B98A2E"/>
           </a:solidFill>
           <a:ln/>
         </p:spPr>
@@ -7046,32 +7675,71 @@
         </p:nvSpPr>
         <p:spPr>
           <a:xfrm>
-            <a:off x="749808" y="384048"/>
-            <a:ext cx="10874959" cy="182880"/>
-          </a:xfrm>
-          <a:prstGeom prst="rect">
-            <a:avLst/>
-          </a:prstGeom>
-          <a:noFill/>
-          <a:ln/>
-        </p:spPr>
-        <p:txBody>
-          <a:bodyPr wrap="square" lIns="0" tIns="0" rIns="0" bIns="0" rtlCol="0" anchor="ctr"/>
-          <a:lstStyle/>
-          <a:p>
-            <a:pPr indent="0" marL="0">
-              <a:buNone/>
-            </a:pPr>
-            <a:r>
-              <a:rPr lang="en-US" sz="950" b="1" spc="200" kern="0" dirty="0">
-                <a:solidFill>
-                  <a:srgbClr val="6B8E00"/>
+            <a:off x="566928" y="457200"/>
+            <a:ext cx="384048" cy="384048"/>
+          </a:xfrm>
+          <a:prstGeom prst="rect">
+            <a:avLst/>
+          </a:prstGeom>
+          <a:noFill/>
+          <a:ln/>
+        </p:spPr>
+        <p:txBody>
+          <a:bodyPr wrap="square" lIns="0" tIns="0" rIns="0" bIns="0" rtlCol="0" anchor="ctr"/>
+          <a:lstStyle/>
+          <a:p>
+            <a:pPr algn="ctr" indent="0" marL="0">
+              <a:buNone/>
+            </a:pPr>
+            <a:r>
+              <a:rPr lang="en-US" sz="1300" b="1" dirty="0">
+                <a:solidFill>
+                  <a:srgbClr val="FFFFFF"/>
                 </a:solidFill>
                 <a:latin typeface="Arial" pitchFamily="34" charset="0"/>
                 <a:ea typeface="Arial" pitchFamily="34" charset="-122"/>
                 <a:cs typeface="Arial" pitchFamily="34" charset="-120"/>
               </a:rPr>
-              <a:t>07  Risk</a:t>
+              <a:t>07</a:t>
+            </a:r>
+            <a:endParaRPr lang="en-US" sz="1300" dirty="0"/>
+          </a:p>
+        </p:txBody>
+      </p:sp>
+      <p:sp>
+        <p:nvSpPr>
+          <p:cNvPr id="4" name="Text 2"/>
+          <p:cNvSpPr/>
+          <p:nvPr/>
+        </p:nvSpPr>
+        <p:spPr>
+          <a:xfrm>
+            <a:off x="1133856" y="457200"/>
+            <a:ext cx="10490911" cy="182880"/>
+          </a:xfrm>
+          <a:prstGeom prst="rect">
+            <a:avLst/>
+          </a:prstGeom>
+          <a:noFill/>
+          <a:ln/>
+        </p:spPr>
+        <p:txBody>
+          <a:bodyPr wrap="square" lIns="0" tIns="0" rIns="0" bIns="0" rtlCol="0" anchor="ctr"/>
+          <a:lstStyle/>
+          <a:p>
+            <a:pPr indent="0" marL="0">
+              <a:buNone/>
+            </a:pPr>
+            <a:r>
+              <a:rPr lang="en-US" sz="950" b="1" spc="200" kern="0" dirty="0">
+                <a:solidFill>
+                  <a:srgbClr val="B98A2E"/>
+                </a:solidFill>
+                <a:latin typeface="Arial" pitchFamily="34" charset="0"/>
+                <a:ea typeface="Arial" pitchFamily="34" charset="-122"/>
+                <a:cs typeface="Arial" pitchFamily="34" charset="-120"/>
+              </a:rPr>
+              <a:t>Risk</a:t>
             </a:r>
             <a:endParaRPr lang="en-US" sz="950" dirty="0"/>
           </a:p>
@@ -7079,14 +7747,14 @@
       </p:sp>
       <p:sp>
         <p:nvSpPr>
-          <p:cNvPr id="4" name="Text 2"/>
-          <p:cNvSpPr/>
-          <p:nvPr/>
-        </p:nvSpPr>
-        <p:spPr>
-          <a:xfrm>
-            <a:off x="749808" y="566928"/>
-            <a:ext cx="10874959" cy="384048"/>
+          <p:cNvPr id="5" name="Text 3"/>
+          <p:cNvSpPr/>
+          <p:nvPr/>
+        </p:nvSpPr>
+        <p:spPr>
+          <a:xfrm>
+            <a:off x="1133856" y="640080"/>
+            <a:ext cx="10490911" cy="365760"/>
           </a:xfrm>
           <a:prstGeom prst="rect">
             <a:avLst/>
@@ -7102,9 +7770,9 @@
               <a:buNone/>
             </a:pPr>
             <a:r>
-              <a:rPr lang="en-US" sz="2200" b="1" dirty="0">
-                <a:solidFill>
-                  <a:srgbClr val="0F172A"/>
+              <a:rPr lang="en-US" sz="2300" b="1" dirty="0">
+                <a:solidFill>
+                  <a:srgbClr val="10161F"/>
                 </a:solidFill>
                 <a:latin typeface="Pretendard" pitchFamily="34" charset="0"/>
                 <a:ea typeface="Pretendard" pitchFamily="34" charset="-122"/>
@@ -7112,30 +7780,32 @@
               </a:rPr>
               <a:t>리스크 점검</a:t>
             </a:r>
-            <a:endParaRPr lang="en-US" sz="2200" dirty="0"/>
-          </a:p>
-        </p:txBody>
-      </p:sp>
-      <p:sp>
-        <p:nvSpPr>
-          <p:cNvPr id="5" name="Shape 3"/>
+            <a:endParaRPr lang="en-US" sz="2300" dirty="0"/>
+          </a:p>
+        </p:txBody>
+      </p:sp>
+      <p:sp>
+        <p:nvSpPr>
+          <p:cNvPr id="6" name="Shape 4"/>
           <p:cNvSpPr/>
           <p:nvPr/>
         </p:nvSpPr>
         <p:spPr>
           <a:xfrm>
             <a:off x="566928" y="1417320"/>
-            <a:ext cx="3503066" cy="3611880"/>
-          </a:xfrm>
-          <a:prstGeom prst="rect">
-            <a:avLst/>
+            <a:ext cx="5391760" cy="3611880"/>
+          </a:xfrm>
+          <a:prstGeom prst="roundRect">
+            <a:avLst>
+              <a:gd name="adj" fmla="val 1519"/>
+            </a:avLst>
           </a:prstGeom>
           <a:solidFill>
-            <a:srgbClr val="F8FAFC"/>
+            <a:srgbClr val="F7FAFC"/>
           </a:solidFill>
-          <a:ln w="3810">
+          <a:ln w="6350">
             <a:solidFill>
-              <a:srgbClr val="CBD5E1"/>
+              <a:srgbClr val="CBD5E0"/>
             </a:solidFill>
             <a:prstDash val="solid"/>
           </a:ln>
@@ -7143,46 +7813,26 @@
       </p:sp>
       <p:sp>
         <p:nvSpPr>
-          <p:cNvPr id="6" name="Shape 4"/>
+          <p:cNvPr id="7" name="Shape 5"/>
           <p:cNvSpPr/>
           <p:nvPr/>
         </p:nvSpPr>
         <p:spPr>
           <a:xfrm>
             <a:off x="566928" y="1417320"/>
-            <a:ext cx="3503066" cy="36576"/>
+            <a:ext cx="5391760" cy="45720"/>
           </a:xfrm>
           <a:prstGeom prst="rect">
             <a:avLst/>
           </a:prstGeom>
           <a:solidFill>
-            <a:srgbClr val="6B8E00"/>
+            <a:srgbClr val="B98A2E"/>
           </a:solidFill>
           <a:ln/>
         </p:spPr>
       </p:sp>
       <p:sp>
         <p:nvSpPr>
-          <p:cNvPr id="7" name="Shape 5"/>
-          <p:cNvSpPr/>
-          <p:nvPr/>
-        </p:nvSpPr>
-        <p:spPr>
-          <a:xfrm>
-            <a:off x="566928" y="1417320"/>
-            <a:ext cx="3503066" cy="45720"/>
-          </a:xfrm>
-          <a:prstGeom prst="rect">
-            <a:avLst/>
-          </a:prstGeom>
-          <a:solidFill>
-            <a:srgbClr val="6B8E00"/>
-          </a:solidFill>
-          <a:ln/>
-        </p:spPr>
-      </p:sp>
-      <p:sp>
-        <p:nvSpPr>
           <p:cNvPr id="8" name="Text 6"/>
           <p:cNvSpPr/>
           <p:nvPr/>
@@ -7190,7 +7840,7 @@
         <p:spPr>
           <a:xfrm>
             <a:off x="795528" y="1618488"/>
-            <a:ext cx="3045866" cy="292608"/>
+            <a:ext cx="4934560" cy="292608"/>
           </a:xfrm>
           <a:prstGeom prst="rect">
             <a:avLst/>
@@ -7208,7 +7858,7 @@
             <a:r>
               <a:rPr lang="en-US" sz="1350" b="1" dirty="0">
                 <a:solidFill>
-                  <a:srgbClr val="4F6A00"/>
+                  <a:srgbClr val="977024"/>
                 </a:solidFill>
                 <a:latin typeface="Pretendard" pitchFamily="34" charset="0"/>
                 <a:ea typeface="Pretendard" pitchFamily="34" charset="-122"/>
@@ -7228,26 +7878,28 @@
         </p:nvSpPr>
         <p:spPr>
           <a:xfrm>
-            <a:off x="795528" y="1929384"/>
-            <a:ext cx="3045866" cy="347472"/>
-          </a:xfrm>
-          <a:prstGeom prst="rect">
-            <a:avLst/>
-          </a:prstGeom>
-          <a:noFill/>
-          <a:ln/>
-        </p:spPr>
-        <p:txBody>
-          <a:bodyPr wrap="square" lIns="0" tIns="0" rIns="0" bIns="0" rtlCol="0" anchor="ctr"/>
+            <a:off x="795528" y="1911096"/>
+            <a:ext cx="4934560" cy="402336"/>
+          </a:xfrm>
+          <a:prstGeom prst="rect">
+            <a:avLst/>
+          </a:prstGeom>
+          <a:noFill/>
+          <a:ln/>
+        </p:spPr>
+        <p:txBody>
+          <a:bodyPr wrap="square" lIns="0" tIns="0" rIns="0" bIns="0" rtlCol="0" anchor="ctr">
+            <a:normAutofit/>
+          </a:bodyPr>
           <a:lstStyle/>
           <a:p>
             <a:pPr indent="0" marL="0">
               <a:buNone/>
             </a:pPr>
             <a:r>
-              <a:rPr lang="en-US" sz="1500" b="1" dirty="0">
-                <a:solidFill>
-                  <a:srgbClr val="0F172A"/>
+              <a:rPr lang="en-US" sz="1350" b="1" dirty="0">
+                <a:solidFill>
+                  <a:srgbClr val="10161F"/>
                 </a:solidFill>
                 <a:latin typeface="Pretendard" pitchFamily="34" charset="0"/>
                 <a:ea typeface="Pretendard" pitchFamily="34" charset="-122"/>
@@ -7255,7 +7907,7 @@
               </a:rPr>
               <a:t>전층 의료</a:t>
             </a:r>
-            <a:endParaRPr lang="en-US" sz="1500" dirty="0"/>
+            <a:endParaRPr lang="en-US" sz="1350" dirty="0"/>
           </a:p>
         </p:txBody>
       </p:sp>
@@ -7267,27 +7919,32 @@
         </p:nvSpPr>
         <p:spPr>
           <a:xfrm>
-            <a:off x="795528" y="2313432"/>
-            <a:ext cx="3045866" cy="2606040"/>
-          </a:xfrm>
-          <a:prstGeom prst="rect">
-            <a:avLst/>
-          </a:prstGeom>
-          <a:noFill/>
-          <a:ln/>
-        </p:spPr>
-        <p:txBody>
-          <a:bodyPr wrap="square" lIns="0" tIns="0" rIns="0" bIns="0" rtlCol="0" anchor="t"/>
+            <a:off x="795528" y="2377440"/>
+            <a:ext cx="4934560" cy="2560320"/>
+          </a:xfrm>
+          <a:prstGeom prst="rect">
+            <a:avLst/>
+          </a:prstGeom>
+          <a:noFill/>
+          <a:ln/>
+        </p:spPr>
+        <p:txBody>
+          <a:bodyPr wrap="square" lIns="0" tIns="0" rIns="0" bIns="0" rtlCol="0" anchor="t">
+            <a:normAutofit/>
+          </a:bodyPr>
           <a:lstStyle/>
           <a:p>
             <a:pPr marL="342900" indent="-342900">
+              <a:lnSpc>
+                <a:spcPct val="125000"/>
+              </a:lnSpc>
               <a:buSzPct val="100000"/>
               <a:buChar char="•"/>
             </a:pPr>
             <a:r>
-              <a:rPr lang="en-US" sz="1250" dirty="0">
-                <a:solidFill>
-                  <a:srgbClr val="0F172A"/>
+              <a:rPr lang="en-US" sz="1200" dirty="0">
+                <a:solidFill>
+                  <a:srgbClr val="10161F"/>
                 </a:solidFill>
                 <a:latin typeface="Pretendard" pitchFamily="34" charset="0"/>
                 <a:ea typeface="Pretendard" pitchFamily="34" charset="-122"/>
@@ -7295,7 +7952,7 @@
               </a:rPr>
               <a:t>업종 다각화 검토</a:t>
             </a:r>
-            <a:endParaRPr lang="en-US" sz="1250" dirty="0"/>
+            <a:endParaRPr lang="en-US" sz="1200" dirty="0"/>
           </a:p>
         </p:txBody>
       </p:sp>
@@ -7307,18 +7964,20 @@
         </p:nvSpPr>
         <p:spPr>
           <a:xfrm>
-            <a:off x="4344314" y="1417320"/>
-            <a:ext cx="3503066" cy="3611880"/>
-          </a:xfrm>
-          <a:prstGeom prst="rect">
-            <a:avLst/>
+            <a:off x="6233008" y="1417320"/>
+            <a:ext cx="5391760" cy="3611880"/>
+          </a:xfrm>
+          <a:prstGeom prst="roundRect">
+            <a:avLst>
+              <a:gd name="adj" fmla="val 1519"/>
+            </a:avLst>
           </a:prstGeom>
           <a:solidFill>
-            <a:srgbClr val="F8FAFC"/>
+            <a:srgbClr val="F7FAFC"/>
           </a:solidFill>
-          <a:ln w="3810">
+          <a:ln w="6350">
             <a:solidFill>
-              <a:srgbClr val="CBD5E1"/>
+              <a:srgbClr val="CBD5E0"/>
             </a:solidFill>
             <a:prstDash val="solid"/>
           </a:ln>
@@ -7332,48 +7991,28 @@
         </p:nvSpPr>
         <p:spPr>
           <a:xfrm>
-            <a:off x="4344314" y="1417320"/>
-            <a:ext cx="3503066" cy="36576"/>
+            <a:off x="6233008" y="1417320"/>
+            <a:ext cx="5391760" cy="45720"/>
           </a:xfrm>
           <a:prstGeom prst="rect">
             <a:avLst/>
           </a:prstGeom>
           <a:solidFill>
-            <a:srgbClr val="6B8E00"/>
+            <a:srgbClr val="B98A2E"/>
           </a:solidFill>
           <a:ln/>
         </p:spPr>
       </p:sp>
       <p:sp>
         <p:nvSpPr>
-          <p:cNvPr id="13" name="Shape 11"/>
-          <p:cNvSpPr/>
-          <p:nvPr/>
-        </p:nvSpPr>
-        <p:spPr>
-          <a:xfrm>
-            <a:off x="4344314" y="1417320"/>
-            <a:ext cx="3503066" cy="45720"/>
-          </a:xfrm>
-          <a:prstGeom prst="rect">
-            <a:avLst/>
-          </a:prstGeom>
-          <a:solidFill>
-            <a:srgbClr val="6B8E00"/>
-          </a:solidFill>
-          <a:ln/>
-        </p:spPr>
-      </p:sp>
-      <p:sp>
-        <p:nvSpPr>
-          <p:cNvPr id="14" name="Text 12"/>
-          <p:cNvSpPr/>
-          <p:nvPr/>
-        </p:nvSpPr>
-        <p:spPr>
-          <a:xfrm>
-            <a:off x="4572914" y="1618488"/>
-            <a:ext cx="3045866" cy="292608"/>
+          <p:cNvPr id="13" name="Text 11"/>
+          <p:cNvSpPr/>
+          <p:nvPr/>
+        </p:nvSpPr>
+        <p:spPr>
+          <a:xfrm>
+            <a:off x="6461608" y="1618488"/>
+            <a:ext cx="4934560" cy="292608"/>
           </a:xfrm>
           <a:prstGeom prst="rect">
             <a:avLst/>
@@ -7391,7 +8030,7 @@
             <a:r>
               <a:rPr lang="en-US" sz="1350" b="1" dirty="0">
                 <a:solidFill>
-                  <a:srgbClr val="4F6A00"/>
+                  <a:srgbClr val="977024"/>
                 </a:solidFill>
                 <a:latin typeface="Pretendard" pitchFamily="34" charset="0"/>
                 <a:ea typeface="Pretendard" pitchFamily="34" charset="-122"/>
@@ -7405,32 +8044,34 @@
       </p:sp>
       <p:sp>
         <p:nvSpPr>
-          <p:cNvPr id="15" name="Text 13"/>
-          <p:cNvSpPr/>
-          <p:nvPr/>
-        </p:nvSpPr>
-        <p:spPr>
-          <a:xfrm>
-            <a:off x="4572914" y="1929384"/>
-            <a:ext cx="3045866" cy="347472"/>
-          </a:xfrm>
-          <a:prstGeom prst="rect">
-            <a:avLst/>
-          </a:prstGeom>
-          <a:noFill/>
-          <a:ln/>
-        </p:spPr>
-        <p:txBody>
-          <a:bodyPr wrap="square" lIns="0" tIns="0" rIns="0" bIns="0" rtlCol="0" anchor="ctr"/>
+          <p:cNvPr id="14" name="Text 12"/>
+          <p:cNvSpPr/>
+          <p:nvPr/>
+        </p:nvSpPr>
+        <p:spPr>
+          <a:xfrm>
+            <a:off x="6461608" y="1911096"/>
+            <a:ext cx="4934560" cy="402336"/>
+          </a:xfrm>
+          <a:prstGeom prst="rect">
+            <a:avLst/>
+          </a:prstGeom>
+          <a:noFill/>
+          <a:ln/>
+        </p:spPr>
+        <p:txBody>
+          <a:bodyPr wrap="square" lIns="0" tIns="0" rIns="0" bIns="0" rtlCol="0" anchor="ctr">
+            <a:normAutofit/>
+          </a:bodyPr>
           <a:lstStyle/>
           <a:p>
             <a:pPr indent="0" marL="0">
               <a:buNone/>
             </a:pPr>
             <a:r>
-              <a:rPr lang="en-US" sz="1500" b="1" dirty="0">
-                <a:solidFill>
-                  <a:srgbClr val="0F172A"/>
+              <a:rPr lang="en-US" sz="1350" b="1" dirty="0">
+                <a:solidFill>
+                  <a:srgbClr val="10161F"/>
                 </a:solidFill>
                 <a:latin typeface="Pretendard" pitchFamily="34" charset="0"/>
                 <a:ea typeface="Pretendard" pitchFamily="34" charset="-122"/>
@@ -7438,39 +8079,44 @@
               </a:rPr>
               <a:t>4.1% 고정</a:t>
             </a:r>
-            <a:endParaRPr lang="en-US" sz="1500" dirty="0"/>
-          </a:p>
-        </p:txBody>
-      </p:sp>
-      <p:sp>
-        <p:nvSpPr>
-          <p:cNvPr id="16" name="Text 14"/>
-          <p:cNvSpPr/>
-          <p:nvPr/>
-        </p:nvSpPr>
-        <p:spPr>
-          <a:xfrm>
-            <a:off x="4572914" y="2313432"/>
-            <a:ext cx="3045866" cy="2606040"/>
-          </a:xfrm>
-          <a:prstGeom prst="rect">
-            <a:avLst/>
-          </a:prstGeom>
-          <a:noFill/>
-          <a:ln/>
-        </p:spPr>
-        <p:txBody>
-          <a:bodyPr wrap="square" lIns="0" tIns="0" rIns="0" bIns="0" rtlCol="0" anchor="t"/>
+            <a:endParaRPr lang="en-US" sz="1350" dirty="0"/>
+          </a:p>
+        </p:txBody>
+      </p:sp>
+      <p:sp>
+        <p:nvSpPr>
+          <p:cNvPr id="15" name="Text 13"/>
+          <p:cNvSpPr/>
+          <p:nvPr/>
+        </p:nvSpPr>
+        <p:spPr>
+          <a:xfrm>
+            <a:off x="6461608" y="2377440"/>
+            <a:ext cx="4934560" cy="2560320"/>
+          </a:xfrm>
+          <a:prstGeom prst="rect">
+            <a:avLst/>
+          </a:prstGeom>
+          <a:noFill/>
+          <a:ln/>
+        </p:spPr>
+        <p:txBody>
+          <a:bodyPr wrap="square" lIns="0" tIns="0" rIns="0" bIns="0" rtlCol="0" anchor="t">
+            <a:normAutofit/>
+          </a:bodyPr>
           <a:lstStyle/>
           <a:p>
             <a:pPr marL="342900" indent="-342900">
+              <a:lnSpc>
+                <a:spcPct val="125000"/>
+              </a:lnSpc>
               <a:buSzPct val="100000"/>
               <a:buChar char="•"/>
             </a:pPr>
             <a:r>
-              <a:rPr lang="en-US" sz="1250" dirty="0">
-                <a:solidFill>
-                  <a:srgbClr val="0F172A"/>
+              <a:rPr lang="en-US" sz="1200" dirty="0">
+                <a:solidFill>
+                  <a:srgbClr val="10161F"/>
                 </a:solidFill>
                 <a:latin typeface="Pretendard" pitchFamily="34" charset="0"/>
                 <a:ea typeface="Pretendard" pitchFamily="34" charset="-122"/>
@@ -7478,71 +8124,87 @@
               </a:rPr>
               <a:t>승계 대출 활용</a:t>
             </a:r>
-            <a:endParaRPr lang="en-US" sz="1250" dirty="0"/>
-          </a:p>
-        </p:txBody>
-      </p:sp>
-      <p:sp>
-        <p:nvSpPr>
-          <p:cNvPr id="17" name="Text 15"/>
-          <p:cNvSpPr/>
-          <p:nvPr/>
-        </p:nvSpPr>
-        <p:spPr>
-          <a:xfrm>
-            <a:off x="566928" y="6419088"/>
-            <a:ext cx="11057839" cy="201168"/>
-          </a:xfrm>
-          <a:prstGeom prst="rect">
-            <a:avLst/>
-          </a:prstGeom>
-          <a:noFill/>
-          <a:ln/>
-        </p:spPr>
-        <p:txBody>
-          <a:bodyPr wrap="square" lIns="0" tIns="0" rIns="0" bIns="0" rtlCol="0" anchor="ctr"/>
-          <a:lstStyle/>
-          <a:p>
-            <a:pPr algn="ctr" indent="0" marL="0">
-              <a:buNone/>
-            </a:pPr>
-            <a:r>
-              <a:rPr lang="en-US" sz="750" dirty="0">
-                <a:solidFill>
-                  <a:srgbClr val="64748B"/>
+            <a:endParaRPr lang="en-US" sz="1200" dirty="0"/>
+          </a:p>
+        </p:txBody>
+      </p:sp>
+      <p:sp>
+        <p:nvSpPr>
+          <p:cNvPr id="16" name="Text 14"/>
+          <p:cNvSpPr/>
+          <p:nvPr/>
+        </p:nvSpPr>
+        <p:spPr>
+          <a:xfrm>
+            <a:off x="566928" y="6382512"/>
+            <a:ext cx="7315200" cy="219456"/>
+          </a:xfrm>
+          <a:prstGeom prst="rect">
+            <a:avLst/>
+          </a:prstGeom>
+          <a:noFill/>
+          <a:ln/>
+        </p:spPr>
+        <p:txBody>
+          <a:bodyPr wrap="square" lIns="0" tIns="0" rIns="0" bIns="0" rtlCol="0" anchor="ctr"/>
+          <a:lstStyle/>
+          <a:p>
+            <a:pPr indent="0" marL="0">
+              <a:buNone/>
+            </a:pPr>
+            <a:r>
+              <a:rPr lang="en-US" sz="800" dirty="0">
+                <a:solidFill>
+                  <a:srgbClr val="718096"/>
                 </a:solidFill>
                 <a:latin typeface="Pretendard" pitchFamily="34" charset="0"/>
                 <a:ea typeface="Pretendard" pitchFamily="34" charset="-122"/>
                 <a:cs typeface="Pretendard" pitchFamily="34" charset="-120"/>
               </a:rPr>
-              <a:t>크리딜  ·    ·  7</a:t>
-            </a:r>
-            <a:endParaRPr lang="en-US" sz="750" dirty="0"/>
-          </a:p>
-        </p:txBody>
-      </p:sp>
-      <p:sp>
-        <p:nvSpPr>
-          <p:cNvPr id="18" name="Shape 16"/>
-          <p:cNvSpPr/>
-          <p:nvPr/>
-        </p:nvSpPr>
-        <p:spPr>
-          <a:xfrm>
-            <a:off x="4437172" y="6382512"/>
-            <a:ext cx="3317352" cy="0"/>
-          </a:xfrm>
-          <a:prstGeom prst="line">
-            <a:avLst/>
-          </a:prstGeom>
-          <a:noFill/>
-          <a:ln w="6350">
-            <a:solidFill>
-              <a:srgbClr val="6B8E00"/>
-            </a:solidFill>
-            <a:prstDash val="solid"/>
-          </a:ln>
-        </p:spPr>
+              <a:t>크리딜   |   </a:t>
+            </a:r>
+            <a:endParaRPr lang="en-US" sz="800" dirty="0"/>
+          </a:p>
+        </p:txBody>
+      </p:sp>
+      <p:sp>
+        <p:nvSpPr>
+          <p:cNvPr id="17" name="Text 15"/>
+          <p:cNvSpPr/>
+          <p:nvPr/>
+        </p:nvSpPr>
+        <p:spPr>
+          <a:xfrm>
+            <a:off x="10710367" y="6382512"/>
+            <a:ext cx="914400" cy="219456"/>
+          </a:xfrm>
+          <a:prstGeom prst="rect">
+            <a:avLst/>
+          </a:prstGeom>
+          <a:noFill/>
+          <a:ln/>
+        </p:spPr>
+        <p:txBody>
+          <a:bodyPr wrap="square" lIns="0" tIns="0" rIns="0" bIns="0" rtlCol="0" anchor="ctr"/>
+          <a:lstStyle/>
+          <a:p>
+            <a:pPr algn="r" indent="0" marL="0">
+              <a:buNone/>
+            </a:pPr>
+            <a:r>
+              <a:rPr lang="en-US" sz="900" b="1" dirty="0">
+                <a:solidFill>
+                  <a:srgbClr val="B98A2E"/>
+                </a:solidFill>
+                <a:latin typeface="Arial" pitchFamily="34" charset="0"/>
+                <a:ea typeface="Arial" pitchFamily="34" charset="-122"/>
+                <a:cs typeface="Arial" pitchFamily="34" charset="-120"/>
+              </a:rPr>
+              <a:t>7</a:t>
+            </a:r>
+            <a:endParaRPr lang="en-US" sz="900" dirty="0"/>
+          </a:p>
+        </p:txBody>
       </p:sp>
     </p:spTree>
   </p:cSld>
@@ -7584,14 +8246,14 @@
         </p:nvSpPr>
         <p:spPr>
           <a:xfrm>
-            <a:off x="566928" y="384048"/>
-            <a:ext cx="45720" cy="566928"/>
-          </a:xfrm>
-          <a:prstGeom prst="rect">
+            <a:off x="566928" y="457200"/>
+            <a:ext cx="384048" cy="384048"/>
+          </a:xfrm>
+          <a:prstGeom prst="ellipse">
             <a:avLst/>
           </a:prstGeom>
           <a:solidFill>
-            <a:srgbClr val="6B8E00"/>
+            <a:srgbClr val="B98A2E"/>
           </a:solidFill>
           <a:ln/>
         </p:spPr>
@@ -7604,32 +8266,71 @@
         </p:nvSpPr>
         <p:spPr>
           <a:xfrm>
-            <a:off x="749808" y="384048"/>
-            <a:ext cx="10874959" cy="182880"/>
-          </a:xfrm>
-          <a:prstGeom prst="rect">
-            <a:avLst/>
-          </a:prstGeom>
-          <a:noFill/>
-          <a:ln/>
-        </p:spPr>
-        <p:txBody>
-          <a:bodyPr wrap="square" lIns="0" tIns="0" rIns="0" bIns="0" rtlCol="0" anchor="ctr"/>
-          <a:lstStyle/>
-          <a:p>
-            <a:pPr indent="0" marL="0">
-              <a:buNone/>
-            </a:pPr>
-            <a:r>
-              <a:rPr lang="en-US" sz="950" b="1" spc="200" kern="0" dirty="0">
-                <a:solidFill>
-                  <a:srgbClr val="6B8E00"/>
+            <a:off x="566928" y="457200"/>
+            <a:ext cx="384048" cy="384048"/>
+          </a:xfrm>
+          <a:prstGeom prst="rect">
+            <a:avLst/>
+          </a:prstGeom>
+          <a:noFill/>
+          <a:ln/>
+        </p:spPr>
+        <p:txBody>
+          <a:bodyPr wrap="square" lIns="0" tIns="0" rIns="0" bIns="0" rtlCol="0" anchor="ctr"/>
+          <a:lstStyle/>
+          <a:p>
+            <a:pPr algn="ctr" indent="0" marL="0">
+              <a:buNone/>
+            </a:pPr>
+            <a:r>
+              <a:rPr lang="en-US" sz="1300" b="1" dirty="0">
+                <a:solidFill>
+                  <a:srgbClr val="FFFFFF"/>
                 </a:solidFill>
                 <a:latin typeface="Arial" pitchFamily="34" charset="0"/>
                 <a:ea typeface="Arial" pitchFamily="34" charset="-122"/>
                 <a:cs typeface="Arial" pitchFamily="34" charset="-120"/>
               </a:rPr>
-              <a:t>08  Thesis</a:t>
+              <a:t>08</a:t>
+            </a:r>
+            <a:endParaRPr lang="en-US" sz="1300" dirty="0"/>
+          </a:p>
+        </p:txBody>
+      </p:sp>
+      <p:sp>
+        <p:nvSpPr>
+          <p:cNvPr id="4" name="Text 2"/>
+          <p:cNvSpPr/>
+          <p:nvPr/>
+        </p:nvSpPr>
+        <p:spPr>
+          <a:xfrm>
+            <a:off x="1133856" y="457200"/>
+            <a:ext cx="10490911" cy="182880"/>
+          </a:xfrm>
+          <a:prstGeom prst="rect">
+            <a:avLst/>
+          </a:prstGeom>
+          <a:noFill/>
+          <a:ln/>
+        </p:spPr>
+        <p:txBody>
+          <a:bodyPr wrap="square" lIns="0" tIns="0" rIns="0" bIns="0" rtlCol="0" anchor="ctr"/>
+          <a:lstStyle/>
+          <a:p>
+            <a:pPr indent="0" marL="0">
+              <a:buNone/>
+            </a:pPr>
+            <a:r>
+              <a:rPr lang="en-US" sz="950" b="1" spc="200" kern="0" dirty="0">
+                <a:solidFill>
+                  <a:srgbClr val="B98A2E"/>
+                </a:solidFill>
+                <a:latin typeface="Arial" pitchFamily="34" charset="0"/>
+                <a:ea typeface="Arial" pitchFamily="34" charset="-122"/>
+                <a:cs typeface="Arial" pitchFamily="34" charset="-120"/>
+              </a:rPr>
+              <a:t>Thesis</a:t>
             </a:r>
             <a:endParaRPr lang="en-US" sz="950" dirty="0"/>
           </a:p>
@@ -7637,14 +8338,14 @@
       </p:sp>
       <p:sp>
         <p:nvSpPr>
-          <p:cNvPr id="4" name="Text 2"/>
-          <p:cNvSpPr/>
-          <p:nvPr/>
-        </p:nvSpPr>
-        <p:spPr>
-          <a:xfrm>
-            <a:off x="749808" y="566928"/>
-            <a:ext cx="10874959" cy="384048"/>
+          <p:cNvPr id="5" name="Text 3"/>
+          <p:cNvSpPr/>
+          <p:nvPr/>
+        </p:nvSpPr>
+        <p:spPr>
+          <a:xfrm>
+            <a:off x="1133856" y="640080"/>
+            <a:ext cx="10490911" cy="365760"/>
           </a:xfrm>
           <a:prstGeom prst="rect">
             <a:avLst/>
@@ -7660,9 +8361,9 @@
               <a:buNone/>
             </a:pPr>
             <a:r>
-              <a:rPr lang="en-US" sz="2200" b="1" dirty="0">
-                <a:solidFill>
-                  <a:srgbClr val="0F172A"/>
+              <a:rPr lang="en-US" sz="2300" b="1" dirty="0">
+                <a:solidFill>
+                  <a:srgbClr val="10161F"/>
                 </a:solidFill>
                 <a:latin typeface="Pretendard" pitchFamily="34" charset="0"/>
                 <a:ea typeface="Pretendard" pitchFamily="34" charset="-122"/>
@@ -7670,13 +8371,13 @@
               </a:rPr>
               <a:t>투자 포인트</a:t>
             </a:r>
-            <a:endParaRPr lang="en-US" sz="2200" dirty="0"/>
-          </a:p>
-        </p:txBody>
-      </p:sp>
-      <p:sp>
-        <p:nvSpPr>
-          <p:cNvPr id="5" name="Shape 3"/>
+            <a:endParaRPr lang="en-US" sz="2300" dirty="0"/>
+          </a:p>
+        </p:txBody>
+      </p:sp>
+      <p:sp>
+        <p:nvSpPr>
+          <p:cNvPr id="6" name="Shape 4"/>
           <p:cNvSpPr/>
           <p:nvPr/>
         </p:nvSpPr>
@@ -7691,11 +8392,11 @@
             </a:avLst>
           </a:prstGeom>
           <a:solidFill>
-            <a:srgbClr val="E8F5CC"/>
+            <a:srgbClr val="F3EBDA"/>
           </a:solidFill>
           <a:ln w="10160">
             <a:solidFill>
-              <a:srgbClr val="A3D900"/>
+              <a:srgbClr val="D9B668"/>
             </a:solidFill>
             <a:prstDash val="solid"/>
           </a:ln>
@@ -7703,14 +8404,14 @@
       </p:sp>
       <p:sp>
         <p:nvSpPr>
-          <p:cNvPr id="6" name="Text 4"/>
+          <p:cNvPr id="7" name="Text 5"/>
           <p:cNvSpPr/>
           <p:nvPr/>
         </p:nvSpPr>
         <p:spPr>
           <a:xfrm>
             <a:off x="749808" y="5093208"/>
-            <a:ext cx="1645920" cy="219456"/>
+            <a:ext cx="1691640" cy="256032"/>
           </a:xfrm>
           <a:prstGeom prst="rect">
             <a:avLst/>
@@ -7726,30 +8427,30 @@
               <a:buNone/>
             </a:pPr>
             <a:r>
-              <a:rPr lang="en-US" sz="950" b="1" dirty="0">
-                <a:solidFill>
-                  <a:srgbClr val="4F6A00"/>
+              <a:rPr lang="en-US" sz="1050" b="1" dirty="0">
+                <a:solidFill>
+                  <a:srgbClr val="977024"/>
                 </a:solidFill>
                 <a:latin typeface="Pretendard" pitchFamily="34" charset="0"/>
                 <a:ea typeface="Pretendard" pitchFamily="34" charset="-122"/>
                 <a:cs typeface="Pretendard" pitchFamily="34" charset="-120"/>
               </a:rPr>
-              <a:t>💡 종합 가치 제안</a:t>
-            </a:r>
-            <a:endParaRPr lang="en-US" sz="950" dirty="0"/>
-          </a:p>
-        </p:txBody>
-      </p:sp>
-      <p:sp>
-        <p:nvSpPr>
-          <p:cNvPr id="7" name="Text 5"/>
-          <p:cNvSpPr/>
-          <p:nvPr/>
-        </p:nvSpPr>
-        <p:spPr>
-          <a:xfrm>
-            <a:off x="2441448" y="5074920"/>
-            <a:ext cx="9000439" cy="621792"/>
+              <a:t>종합 가치 제안</a:t>
+            </a:r>
+            <a:endParaRPr lang="en-US" sz="1050" dirty="0"/>
+          </a:p>
+        </p:txBody>
+      </p:sp>
+      <p:sp>
+        <p:nvSpPr>
+          <p:cNvPr id="8" name="Text 6"/>
+          <p:cNvSpPr/>
+          <p:nvPr/>
+        </p:nvSpPr>
+        <p:spPr>
+          <a:xfrm>
+            <a:off x="2487168" y="5056632"/>
+            <a:ext cx="8954719" cy="658368"/>
           </a:xfrm>
           <a:prstGeom prst="rect">
             <a:avLst/>
@@ -7763,14 +8464,14 @@
           <a:p>
             <a:pPr indent="0" marL="0">
               <a:lnSpc>
-                <a:spcPct val="120000"/>
+                <a:spcPct val="125000"/>
               </a:lnSpc>
               <a:buNone/>
             </a:pPr>
             <a:r>
-              <a:rPr lang="en-US" sz="1000" dirty="0">
-                <a:solidFill>
-                  <a:srgbClr val="334155"/>
+              <a:rPr lang="en-US" sz="1100" dirty="0">
+                <a:solidFill>
+                  <a:srgbClr val="10161F"/>
                 </a:solidFill>
                 <a:latin typeface="Pretendard" pitchFamily="34" charset="0"/>
                 <a:ea typeface="Pretendard" pitchFamily="34" charset="-122"/>
@@ -7778,71 +8479,87 @@
               </a:rPr>
               <a:t>관점에서 안정적 월 임대수익과 우량 메디컬 테넌트를 보유한 핵심 투자 자산입니다.</a:t>
             </a:r>
-            <a:endParaRPr lang="en-US" sz="1000" dirty="0"/>
-          </a:p>
-        </p:txBody>
-      </p:sp>
-      <p:sp>
-        <p:nvSpPr>
-          <p:cNvPr id="8" name="Text 6"/>
-          <p:cNvSpPr/>
-          <p:nvPr/>
-        </p:nvSpPr>
-        <p:spPr>
-          <a:xfrm>
-            <a:off x="566928" y="6419088"/>
-            <a:ext cx="11057839" cy="201168"/>
-          </a:xfrm>
-          <a:prstGeom prst="rect">
-            <a:avLst/>
-          </a:prstGeom>
-          <a:noFill/>
-          <a:ln/>
-        </p:spPr>
-        <p:txBody>
-          <a:bodyPr wrap="square" lIns="0" tIns="0" rIns="0" bIns="0" rtlCol="0" anchor="ctr"/>
-          <a:lstStyle/>
-          <a:p>
-            <a:pPr algn="ctr" indent="0" marL="0">
-              <a:buNone/>
-            </a:pPr>
-            <a:r>
-              <a:rPr lang="en-US" sz="750" dirty="0">
-                <a:solidFill>
-                  <a:srgbClr val="64748B"/>
+            <a:endParaRPr lang="en-US" sz="1100" dirty="0"/>
+          </a:p>
+        </p:txBody>
+      </p:sp>
+      <p:sp>
+        <p:nvSpPr>
+          <p:cNvPr id="9" name="Text 7"/>
+          <p:cNvSpPr/>
+          <p:nvPr/>
+        </p:nvSpPr>
+        <p:spPr>
+          <a:xfrm>
+            <a:off x="566928" y="6382512"/>
+            <a:ext cx="7315200" cy="219456"/>
+          </a:xfrm>
+          <a:prstGeom prst="rect">
+            <a:avLst/>
+          </a:prstGeom>
+          <a:noFill/>
+          <a:ln/>
+        </p:spPr>
+        <p:txBody>
+          <a:bodyPr wrap="square" lIns="0" tIns="0" rIns="0" bIns="0" rtlCol="0" anchor="ctr"/>
+          <a:lstStyle/>
+          <a:p>
+            <a:pPr indent="0" marL="0">
+              <a:buNone/>
+            </a:pPr>
+            <a:r>
+              <a:rPr lang="en-US" sz="800" dirty="0">
+                <a:solidFill>
+                  <a:srgbClr val="718096"/>
                 </a:solidFill>
                 <a:latin typeface="Pretendard" pitchFamily="34" charset="0"/>
                 <a:ea typeface="Pretendard" pitchFamily="34" charset="-122"/>
                 <a:cs typeface="Pretendard" pitchFamily="34" charset="-120"/>
               </a:rPr>
-              <a:t>크리딜  ·    ·  8</a:t>
-            </a:r>
-            <a:endParaRPr lang="en-US" sz="750" dirty="0"/>
-          </a:p>
-        </p:txBody>
-      </p:sp>
-      <p:sp>
-        <p:nvSpPr>
-          <p:cNvPr id="9" name="Shape 7"/>
-          <p:cNvSpPr/>
-          <p:nvPr/>
-        </p:nvSpPr>
-        <p:spPr>
-          <a:xfrm>
-            <a:off x="4437172" y="6382512"/>
-            <a:ext cx="3317352" cy="0"/>
-          </a:xfrm>
-          <a:prstGeom prst="line">
-            <a:avLst/>
-          </a:prstGeom>
-          <a:noFill/>
-          <a:ln w="6350">
-            <a:solidFill>
-              <a:srgbClr val="6B8E00"/>
-            </a:solidFill>
-            <a:prstDash val="solid"/>
-          </a:ln>
-        </p:spPr>
+              <a:t>크리딜   |   </a:t>
+            </a:r>
+            <a:endParaRPr lang="en-US" sz="800" dirty="0"/>
+          </a:p>
+        </p:txBody>
+      </p:sp>
+      <p:sp>
+        <p:nvSpPr>
+          <p:cNvPr id="10" name="Text 8"/>
+          <p:cNvSpPr/>
+          <p:nvPr/>
+        </p:nvSpPr>
+        <p:spPr>
+          <a:xfrm>
+            <a:off x="10710367" y="6382512"/>
+            <a:ext cx="914400" cy="219456"/>
+          </a:xfrm>
+          <a:prstGeom prst="rect">
+            <a:avLst/>
+          </a:prstGeom>
+          <a:noFill/>
+          <a:ln/>
+        </p:spPr>
+        <p:txBody>
+          <a:bodyPr wrap="square" lIns="0" tIns="0" rIns="0" bIns="0" rtlCol="0" anchor="ctr"/>
+          <a:lstStyle/>
+          <a:p>
+            <a:pPr algn="r" indent="0" marL="0">
+              <a:buNone/>
+            </a:pPr>
+            <a:r>
+              <a:rPr lang="en-US" sz="900" b="1" dirty="0">
+                <a:solidFill>
+                  <a:srgbClr val="B98A2E"/>
+                </a:solidFill>
+                <a:latin typeface="Arial" pitchFamily="34" charset="0"/>
+                <a:ea typeface="Arial" pitchFamily="34" charset="-122"/>
+                <a:cs typeface="Arial" pitchFamily="34" charset="-120"/>
+              </a:rPr>
+              <a:t>8</a:t>
+            </a:r>
+            <a:endParaRPr lang="en-US" sz="900" dirty="0"/>
+          </a:p>
+        </p:txBody>
       </p:sp>
     </p:spTree>
   </p:cSld>
@@ -7884,14 +8601,14 @@
         </p:nvSpPr>
         <p:spPr>
           <a:xfrm>
-            <a:off x="566928" y="384048"/>
-            <a:ext cx="45720" cy="566928"/>
-          </a:xfrm>
-          <a:prstGeom prst="rect">
+            <a:off x="566928" y="457200"/>
+            <a:ext cx="384048" cy="384048"/>
+          </a:xfrm>
+          <a:prstGeom prst="ellipse">
             <a:avLst/>
           </a:prstGeom>
           <a:solidFill>
-            <a:srgbClr val="6B8E00"/>
+            <a:srgbClr val="B98A2E"/>
           </a:solidFill>
           <a:ln/>
         </p:spPr>
@@ -7904,32 +8621,71 @@
         </p:nvSpPr>
         <p:spPr>
           <a:xfrm>
-            <a:off x="749808" y="384048"/>
-            <a:ext cx="10874959" cy="182880"/>
-          </a:xfrm>
-          <a:prstGeom prst="rect">
-            <a:avLst/>
-          </a:prstGeom>
-          <a:noFill/>
-          <a:ln/>
-        </p:spPr>
-        <p:txBody>
-          <a:bodyPr wrap="square" lIns="0" tIns="0" rIns="0" bIns="0" rtlCol="0" anchor="ctr"/>
-          <a:lstStyle/>
-          <a:p>
-            <a:pPr indent="0" marL="0">
-              <a:buNone/>
-            </a:pPr>
-            <a:r>
-              <a:rPr lang="en-US" sz="950" b="1" spc="200" kern="0" dirty="0">
-                <a:solidFill>
-                  <a:srgbClr val="6B8E00"/>
+            <a:off x="566928" y="457200"/>
+            <a:ext cx="384048" cy="384048"/>
+          </a:xfrm>
+          <a:prstGeom prst="rect">
+            <a:avLst/>
+          </a:prstGeom>
+          <a:noFill/>
+          <a:ln/>
+        </p:spPr>
+        <p:txBody>
+          <a:bodyPr wrap="square" lIns="0" tIns="0" rIns="0" bIns="0" rtlCol="0" anchor="ctr"/>
+          <a:lstStyle/>
+          <a:p>
+            <a:pPr algn="ctr" indent="0" marL="0">
+              <a:buNone/>
+            </a:pPr>
+            <a:r>
+              <a:rPr lang="en-US" sz="1300" b="1" dirty="0">
+                <a:solidFill>
+                  <a:srgbClr val="FFFFFF"/>
                 </a:solidFill>
                 <a:latin typeface="Arial" pitchFamily="34" charset="0"/>
                 <a:ea typeface="Arial" pitchFamily="34" charset="-122"/>
                 <a:cs typeface="Arial" pitchFamily="34" charset="-120"/>
               </a:rPr>
-              <a:t>09  Process</a:t>
+              <a:t>09</a:t>
+            </a:r>
+            <a:endParaRPr lang="en-US" sz="1300" dirty="0"/>
+          </a:p>
+        </p:txBody>
+      </p:sp>
+      <p:sp>
+        <p:nvSpPr>
+          <p:cNvPr id="4" name="Text 2"/>
+          <p:cNvSpPr/>
+          <p:nvPr/>
+        </p:nvSpPr>
+        <p:spPr>
+          <a:xfrm>
+            <a:off x="1133856" y="457200"/>
+            <a:ext cx="10490911" cy="182880"/>
+          </a:xfrm>
+          <a:prstGeom prst="rect">
+            <a:avLst/>
+          </a:prstGeom>
+          <a:noFill/>
+          <a:ln/>
+        </p:spPr>
+        <p:txBody>
+          <a:bodyPr wrap="square" lIns="0" tIns="0" rIns="0" bIns="0" rtlCol="0" anchor="ctr"/>
+          <a:lstStyle/>
+          <a:p>
+            <a:pPr indent="0" marL="0">
+              <a:buNone/>
+            </a:pPr>
+            <a:r>
+              <a:rPr lang="en-US" sz="950" b="1" spc="200" kern="0" dirty="0">
+                <a:solidFill>
+                  <a:srgbClr val="B98A2E"/>
+                </a:solidFill>
+                <a:latin typeface="Arial" pitchFamily="34" charset="0"/>
+                <a:ea typeface="Arial" pitchFamily="34" charset="-122"/>
+                <a:cs typeface="Arial" pitchFamily="34" charset="-120"/>
+              </a:rPr>
+              <a:t>Process</a:t>
             </a:r>
             <a:endParaRPr lang="en-US" sz="950" dirty="0"/>
           </a:p>
@@ -7937,14 +8693,14 @@
       </p:sp>
       <p:sp>
         <p:nvSpPr>
-          <p:cNvPr id="4" name="Text 2"/>
-          <p:cNvSpPr/>
-          <p:nvPr/>
-        </p:nvSpPr>
-        <p:spPr>
-          <a:xfrm>
-            <a:off x="749808" y="566928"/>
-            <a:ext cx="10874959" cy="384048"/>
+          <p:cNvPr id="5" name="Text 3"/>
+          <p:cNvSpPr/>
+          <p:nvPr/>
+        </p:nvSpPr>
+        <p:spPr>
+          <a:xfrm>
+            <a:off x="1133856" y="640080"/>
+            <a:ext cx="10490911" cy="365760"/>
           </a:xfrm>
           <a:prstGeom prst="rect">
             <a:avLst/>
@@ -7960,9 +8716,9 @@
               <a:buNone/>
             </a:pPr>
             <a:r>
-              <a:rPr lang="en-US" sz="2200" b="1" dirty="0">
-                <a:solidFill>
-                  <a:srgbClr val="0F172A"/>
+              <a:rPr lang="en-US" sz="2300" b="1" dirty="0">
+                <a:solidFill>
+                  <a:srgbClr val="10161F"/>
                 </a:solidFill>
                 <a:latin typeface="Pretendard" pitchFamily="34" charset="0"/>
                 <a:ea typeface="Pretendard" pitchFamily="34" charset="-122"/>
@@ -7970,13 +8726,13 @@
               </a:rPr>
               <a:t>다음 단계</a:t>
             </a:r>
-            <a:endParaRPr lang="en-US" sz="2200" dirty="0"/>
-          </a:p>
-        </p:txBody>
-      </p:sp>
-      <p:sp>
-        <p:nvSpPr>
-          <p:cNvPr id="5" name="Shape 3"/>
+            <a:endParaRPr lang="en-US" sz="2300" dirty="0"/>
+          </a:p>
+        </p:txBody>
+      </p:sp>
+      <p:sp>
+        <p:nvSpPr>
+          <p:cNvPr id="6" name="Shape 4"/>
           <p:cNvSpPr/>
           <p:nvPr/>
         </p:nvSpPr>
@@ -7985,15 +8741,17 @@
             <a:off x="566928" y="1572768"/>
             <a:ext cx="11057839" cy="3200400"/>
           </a:xfrm>
-          <a:prstGeom prst="rect">
-            <a:avLst/>
+          <a:prstGeom prst="roundRect">
+            <a:avLst>
+              <a:gd name="adj" fmla="val 1714"/>
+            </a:avLst>
           </a:prstGeom>
           <a:solidFill>
-            <a:srgbClr val="F8FAFC"/>
+            <a:srgbClr val="F7FAFC"/>
           </a:solidFill>
-          <a:ln w="3810">
+          <a:ln w="6350">
             <a:solidFill>
-              <a:srgbClr val="CBD5E1"/>
+              <a:srgbClr val="CBD5E0"/>
             </a:solidFill>
             <a:prstDash val="solid"/>
           </a:ln>
@@ -8001,26 +8759,6 @@
       </p:sp>
       <p:sp>
         <p:nvSpPr>
-          <p:cNvPr id="6" name="Shape 4"/>
-          <p:cNvSpPr/>
-          <p:nvPr/>
-        </p:nvSpPr>
-        <p:spPr>
-          <a:xfrm>
-            <a:off x="566928" y="1572768"/>
-            <a:ext cx="11057839" cy="36576"/>
-          </a:xfrm>
-          <a:prstGeom prst="rect">
-            <a:avLst/>
-          </a:prstGeom>
-          <a:solidFill>
-            <a:srgbClr val="6B8E00"/>
-          </a:solidFill>
-          <a:ln/>
-        </p:spPr>
-      </p:sp>
-      <p:sp>
-        <p:nvSpPr>
           <p:cNvPr id="7" name="Shape 5"/>
           <p:cNvSpPr/>
           <p:nvPr/>
@@ -8034,7 +8772,7 @@
             <a:avLst/>
           </a:prstGeom>
           <a:solidFill>
-            <a:srgbClr val="6B8E00"/>
+            <a:srgbClr val="B98A2E"/>
           </a:solidFill>
           <a:ln/>
         </p:spPr>
@@ -8105,7 +8843,7 @@
             <a:r>
               <a:rPr lang="en-US" sz="1600" b="1" dirty="0">
                 <a:solidFill>
-                  <a:srgbClr val="0F172A"/>
+                  <a:srgbClr val="10161F"/>
                 </a:solidFill>
                 <a:latin typeface="Pretendard" pitchFamily="34" charset="0"/>
                 <a:ea typeface="Pretendard" pitchFamily="34" charset="-122"/>
@@ -8144,7 +8882,7 @@
             <a:r>
               <a:rPr lang="en-US" sz="1100" dirty="0">
                 <a:solidFill>
-                  <a:srgbClr val="0F172A"/>
+                  <a:srgbClr val="10161F"/>
                 </a:solidFill>
                 <a:latin typeface="Pretendard" pitchFamily="34" charset="0"/>
                 <a:ea typeface="Pretendard" pitchFamily="34" charset="-122"/>
@@ -8164,59 +8902,75 @@
         </p:nvSpPr>
         <p:spPr>
           <a:xfrm>
-            <a:off x="566928" y="6419088"/>
-            <a:ext cx="11057839" cy="201168"/>
-          </a:xfrm>
-          <a:prstGeom prst="rect">
-            <a:avLst/>
-          </a:prstGeom>
-          <a:noFill/>
-          <a:ln/>
-        </p:spPr>
-        <p:txBody>
-          <a:bodyPr wrap="square" lIns="0" tIns="0" rIns="0" bIns="0" rtlCol="0" anchor="ctr"/>
-          <a:lstStyle/>
-          <a:p>
-            <a:pPr algn="ctr" indent="0" marL="0">
-              <a:buNone/>
-            </a:pPr>
-            <a:r>
-              <a:rPr lang="en-US" sz="750" dirty="0">
-                <a:solidFill>
-                  <a:srgbClr val="64748B"/>
+            <a:off x="566928" y="6382512"/>
+            <a:ext cx="7315200" cy="219456"/>
+          </a:xfrm>
+          <a:prstGeom prst="rect">
+            <a:avLst/>
+          </a:prstGeom>
+          <a:noFill/>
+          <a:ln/>
+        </p:spPr>
+        <p:txBody>
+          <a:bodyPr wrap="square" lIns="0" tIns="0" rIns="0" bIns="0" rtlCol="0" anchor="ctr"/>
+          <a:lstStyle/>
+          <a:p>
+            <a:pPr indent="0" marL="0">
+              <a:buNone/>
+            </a:pPr>
+            <a:r>
+              <a:rPr lang="en-US" sz="800" dirty="0">
+                <a:solidFill>
+                  <a:srgbClr val="718096"/>
                 </a:solidFill>
                 <a:latin typeface="Pretendard" pitchFamily="34" charset="0"/>
                 <a:ea typeface="Pretendard" pitchFamily="34" charset="-122"/>
                 <a:cs typeface="Pretendard" pitchFamily="34" charset="-120"/>
               </a:rPr>
-              <a:t>크리딜  ·    ·  9</a:t>
-            </a:r>
-            <a:endParaRPr lang="en-US" sz="750" dirty="0"/>
-          </a:p>
-        </p:txBody>
-      </p:sp>
-      <p:sp>
-        <p:nvSpPr>
-          <p:cNvPr id="12" name="Shape 10"/>
-          <p:cNvSpPr/>
-          <p:nvPr/>
-        </p:nvSpPr>
-        <p:spPr>
-          <a:xfrm>
-            <a:off x="4437172" y="6382512"/>
-            <a:ext cx="3317352" cy="0"/>
-          </a:xfrm>
-          <a:prstGeom prst="line">
-            <a:avLst/>
-          </a:prstGeom>
-          <a:noFill/>
-          <a:ln w="6350">
-            <a:solidFill>
-              <a:srgbClr val="6B8E00"/>
-            </a:solidFill>
-            <a:prstDash val="solid"/>
-          </a:ln>
-        </p:spPr>
+              <a:t>크리딜   |   </a:t>
+            </a:r>
+            <a:endParaRPr lang="en-US" sz="800" dirty="0"/>
+          </a:p>
+        </p:txBody>
+      </p:sp>
+      <p:sp>
+        <p:nvSpPr>
+          <p:cNvPr id="12" name="Text 10"/>
+          <p:cNvSpPr/>
+          <p:nvPr/>
+        </p:nvSpPr>
+        <p:spPr>
+          <a:xfrm>
+            <a:off x="10710367" y="6382512"/>
+            <a:ext cx="914400" cy="219456"/>
+          </a:xfrm>
+          <a:prstGeom prst="rect">
+            <a:avLst/>
+          </a:prstGeom>
+          <a:noFill/>
+          <a:ln/>
+        </p:spPr>
+        <p:txBody>
+          <a:bodyPr wrap="square" lIns="0" tIns="0" rIns="0" bIns="0" rtlCol="0" anchor="ctr"/>
+          <a:lstStyle/>
+          <a:p>
+            <a:pPr algn="r" indent="0" marL="0">
+              <a:buNone/>
+            </a:pPr>
+            <a:r>
+              <a:rPr lang="en-US" sz="900" b="1" dirty="0">
+                <a:solidFill>
+                  <a:srgbClr val="B98A2E"/>
+                </a:solidFill>
+                <a:latin typeface="Arial" pitchFamily="34" charset="0"/>
+                <a:ea typeface="Arial" pitchFamily="34" charset="-122"/>
+                <a:cs typeface="Arial" pitchFamily="34" charset="-120"/>
+              </a:rPr>
+              <a:t>9</a:t>
+            </a:r>
+            <a:endParaRPr lang="en-US" sz="900" dirty="0"/>
+          </a:p>
+        </p:txBody>
       </p:sp>
     </p:spTree>
   </p:cSld>

--- a/docs/test/stress/e2e-outputs/income_basic_pr01.pptx
+++ b/docs/test/stress/e2e-outputs/income_basic_pr01.pptx
@@ -6318,7 +6318,7 @@
                 <a:gridCol w="3071622"/>
                 <a:gridCol w="3071622"/>
               </a:tblGrid>
-              <a:tr h="457200">
+              <a:tr h="438912">
                 <a:tc>
                   <a:txBody>
                     <a:bodyPr/>
@@ -6592,7 +6592,7 @@
                   </a:tcPr>
                 </a:tc>
               </a:tr>
-              <a:tr h="457200">
+              <a:tr h="438912">
                 <a:tc>
                   <a:txBody>
                     <a:bodyPr/>
@@ -6866,7 +6866,7 @@
                   </a:tcPr>
                 </a:tc>
               </a:tr>
-              <a:tr h="457200">
+              <a:tr h="438912">
                 <a:tc>
                   <a:txBody>
                     <a:bodyPr/>
@@ -7793,11 +7793,11 @@
         <p:spPr>
           <a:xfrm>
             <a:off x="566928" y="1417320"/>
-            <a:ext cx="5391760" cy="3611880"/>
+            <a:ext cx="5400904" cy="3657600"/>
           </a:xfrm>
           <a:prstGeom prst="roundRect">
             <a:avLst>
-              <a:gd name="adj" fmla="val 1519"/>
+              <a:gd name="adj" fmla="val 1500"/>
             </a:avLst>
           </a:prstGeom>
           <a:solidFill>
@@ -7820,7 +7820,7 @@
         <p:spPr>
           <a:xfrm>
             <a:off x="566928" y="1417320"/>
-            <a:ext cx="5391760" cy="45720"/>
+            <a:ext cx="5400904" cy="45720"/>
           </a:xfrm>
           <a:prstGeom prst="rect">
             <a:avLst/>
@@ -7840,7 +7840,7 @@
         <p:spPr>
           <a:xfrm>
             <a:off x="795528" y="1618488"/>
-            <a:ext cx="4934560" cy="292608"/>
+            <a:ext cx="4943704" cy="292608"/>
           </a:xfrm>
           <a:prstGeom prst="rect">
             <a:avLst/>
@@ -7878,8 +7878,8 @@
         </p:nvSpPr>
         <p:spPr>
           <a:xfrm>
-            <a:off x="795528" y="1911096"/>
-            <a:ext cx="4934560" cy="402336"/>
+            <a:off x="795528" y="1947672"/>
+            <a:ext cx="4943704" cy="365760"/>
           </a:xfrm>
           <a:prstGeom prst="rect">
             <a:avLst/>
@@ -7897,7 +7897,7 @@
               <a:buNone/>
             </a:pPr>
             <a:r>
-              <a:rPr lang="en-US" sz="1350" b="1" dirty="0">
+              <a:rPr lang="en-US" sz="1250" b="1" dirty="0">
                 <a:solidFill>
                   <a:srgbClr val="10161F"/>
                 </a:solidFill>
@@ -7907,7 +7907,7 @@
               </a:rPr>
               <a:t>전층 의료</a:t>
             </a:r>
-            <a:endParaRPr lang="en-US" sz="1350" dirty="0"/>
+            <a:endParaRPr lang="en-US" sz="1250" dirty="0"/>
           </a:p>
         </p:txBody>
       </p:sp>
@@ -7920,7 +7920,7 @@
         <p:spPr>
           <a:xfrm>
             <a:off x="795528" y="2377440"/>
-            <a:ext cx="4934560" cy="2560320"/>
+            <a:ext cx="4943704" cy="2606040"/>
           </a:xfrm>
           <a:prstGeom prst="rect">
             <a:avLst/>
@@ -7942,7 +7942,7 @@
               <a:buChar char="•"/>
             </a:pPr>
             <a:r>
-              <a:rPr lang="en-US" sz="1200" dirty="0">
+              <a:rPr lang="en-US" sz="1100" dirty="0">
                 <a:solidFill>
                   <a:srgbClr val="10161F"/>
                 </a:solidFill>
@@ -7952,7 +7952,7 @@
               </a:rPr>
               <a:t>업종 다각화 검토</a:t>
             </a:r>
-            <a:endParaRPr lang="en-US" sz="1200" dirty="0"/>
+            <a:endParaRPr lang="en-US" sz="1100" dirty="0"/>
           </a:p>
         </p:txBody>
       </p:sp>
@@ -7964,12 +7964,12 @@
         </p:nvSpPr>
         <p:spPr>
           <a:xfrm>
-            <a:off x="6233008" y="1417320"/>
-            <a:ext cx="5391760" cy="3611880"/>
+            <a:off x="6223864" y="1417320"/>
+            <a:ext cx="5400904" cy="3657600"/>
           </a:xfrm>
           <a:prstGeom prst="roundRect">
             <a:avLst>
-              <a:gd name="adj" fmla="val 1519"/>
+              <a:gd name="adj" fmla="val 1500"/>
             </a:avLst>
           </a:prstGeom>
           <a:solidFill>
@@ -7991,8 +7991,8 @@
         </p:nvSpPr>
         <p:spPr>
           <a:xfrm>
-            <a:off x="6233008" y="1417320"/>
-            <a:ext cx="5391760" cy="45720"/>
+            <a:off x="6223864" y="1417320"/>
+            <a:ext cx="5400904" cy="45720"/>
           </a:xfrm>
           <a:prstGeom prst="rect">
             <a:avLst/>
@@ -8011,8 +8011,8 @@
         </p:nvSpPr>
         <p:spPr>
           <a:xfrm>
-            <a:off x="6461608" y="1618488"/>
-            <a:ext cx="4934560" cy="292608"/>
+            <a:off x="6452464" y="1618488"/>
+            <a:ext cx="4943704" cy="292608"/>
           </a:xfrm>
           <a:prstGeom prst="rect">
             <a:avLst/>
@@ -8050,8 +8050,8 @@
         </p:nvSpPr>
         <p:spPr>
           <a:xfrm>
-            <a:off x="6461608" y="1911096"/>
-            <a:ext cx="4934560" cy="402336"/>
+            <a:off x="6452464" y="1947672"/>
+            <a:ext cx="4943704" cy="365760"/>
           </a:xfrm>
           <a:prstGeom prst="rect">
             <a:avLst/>
@@ -8069,7 +8069,7 @@
               <a:buNone/>
             </a:pPr>
             <a:r>
-              <a:rPr lang="en-US" sz="1350" b="1" dirty="0">
+              <a:rPr lang="en-US" sz="1250" b="1" dirty="0">
                 <a:solidFill>
                   <a:srgbClr val="10161F"/>
                 </a:solidFill>
@@ -8079,7 +8079,7 @@
               </a:rPr>
               <a:t>4.1% 고정</a:t>
             </a:r>
-            <a:endParaRPr lang="en-US" sz="1350" dirty="0"/>
+            <a:endParaRPr lang="en-US" sz="1250" dirty="0"/>
           </a:p>
         </p:txBody>
       </p:sp>
@@ -8091,8 +8091,8 @@
         </p:nvSpPr>
         <p:spPr>
           <a:xfrm>
-            <a:off x="6461608" y="2377440"/>
-            <a:ext cx="4934560" cy="2560320"/>
+            <a:off x="6452464" y="2377440"/>
+            <a:ext cx="4943704" cy="2606040"/>
           </a:xfrm>
           <a:prstGeom prst="rect">
             <a:avLst/>
@@ -8114,7 +8114,7 @@
               <a:buChar char="•"/>
             </a:pPr>
             <a:r>
-              <a:rPr lang="en-US" sz="1200" dirty="0">
+              <a:rPr lang="en-US" sz="1100" dirty="0">
                 <a:solidFill>
                   <a:srgbClr val="10161F"/>
                 </a:solidFill>
@@ -8124,20 +8124,47 @@
               </a:rPr>
               <a:t>승계 대출 활용</a:t>
             </a:r>
-            <a:endParaRPr lang="en-US" sz="1200" dirty="0"/>
-          </a:p>
-        </p:txBody>
-      </p:sp>
-      <p:sp>
-        <p:nvSpPr>
-          <p:cNvPr id="16" name="Text 14"/>
-          <p:cNvSpPr/>
-          <p:nvPr/>
-        </p:nvSpPr>
-        <p:spPr>
-          <a:xfrm>
-            <a:off x="566928" y="6382512"/>
-            <a:ext cx="7315200" cy="219456"/>
+            <a:endParaRPr lang="en-US" sz="1100" dirty="0"/>
+          </a:p>
+        </p:txBody>
+      </p:sp>
+      <p:sp>
+        <p:nvSpPr>
+          <p:cNvPr id="16" name="Shape 14"/>
+          <p:cNvSpPr/>
+          <p:nvPr/>
+        </p:nvSpPr>
+        <p:spPr>
+          <a:xfrm>
+            <a:off x="566928" y="5193792"/>
+            <a:ext cx="11057839" cy="621792"/>
+          </a:xfrm>
+          <a:prstGeom prst="roundRect">
+            <a:avLst>
+              <a:gd name="adj" fmla="val 8824"/>
+            </a:avLst>
+          </a:prstGeom>
+          <a:solidFill>
+            <a:srgbClr val="F7FAFC"/>
+          </a:solidFill>
+          <a:ln w="6350">
+            <a:solidFill>
+              <a:srgbClr val="CBD5E0"/>
+            </a:solidFill>
+            <a:prstDash val="solid"/>
+          </a:ln>
+        </p:spPr>
+      </p:sp>
+      <p:sp>
+        <p:nvSpPr>
+          <p:cNvPr id="17" name="Text 15"/>
+          <p:cNvSpPr/>
+          <p:nvPr/>
+        </p:nvSpPr>
+        <p:spPr>
+          <a:xfrm>
+            <a:off x="795528" y="5193792"/>
+            <a:ext cx="10600639" cy="621792"/>
           </a:xfrm>
           <a:prstGeom prst="rect">
             <a:avLst/>
@@ -8153,14 +8180,53 @@
               <a:buNone/>
             </a:pPr>
             <a:r>
-              <a:rPr lang="en-US" sz="800" dirty="0">
-                <a:solidFill>
-                  <a:srgbClr val="718096"/>
+              <a:rPr lang="en-US" sz="1100" dirty="0">
+                <a:solidFill>
+                  <a:srgbClr val="10161F"/>
                 </a:solidFill>
                 <a:latin typeface="Pretendard" pitchFamily="34" charset="0"/>
                 <a:ea typeface="Pretendard" pitchFamily="34" charset="-122"/>
                 <a:cs typeface="Pretendard" pitchFamily="34" charset="-120"/>
               </a:rPr>
+              <a:t>※ 본 리스크 체크는 공부 및 브로커 확인 기반이며, 매수 전 전문 실사팀(변호사/건축사)을 통한 정밀 실사가 필요합니다.</a:t>
+            </a:r>
+            <a:endParaRPr lang="en-US" sz="1100" dirty="0"/>
+          </a:p>
+        </p:txBody>
+      </p:sp>
+      <p:sp>
+        <p:nvSpPr>
+          <p:cNvPr id="18" name="Text 16"/>
+          <p:cNvSpPr/>
+          <p:nvPr/>
+        </p:nvSpPr>
+        <p:spPr>
+          <a:xfrm>
+            <a:off x="566928" y="6382512"/>
+            <a:ext cx="7315200" cy="219456"/>
+          </a:xfrm>
+          <a:prstGeom prst="rect">
+            <a:avLst/>
+          </a:prstGeom>
+          <a:noFill/>
+          <a:ln/>
+        </p:spPr>
+        <p:txBody>
+          <a:bodyPr wrap="square" lIns="0" tIns="0" rIns="0" bIns="0" rtlCol="0" anchor="ctr"/>
+          <a:lstStyle/>
+          <a:p>
+            <a:pPr indent="0" marL="0">
+              <a:buNone/>
+            </a:pPr>
+            <a:r>
+              <a:rPr lang="en-US" sz="800" dirty="0">
+                <a:solidFill>
+                  <a:srgbClr val="718096"/>
+                </a:solidFill>
+                <a:latin typeface="Pretendard" pitchFamily="34" charset="0"/>
+                <a:ea typeface="Pretendard" pitchFamily="34" charset="-122"/>
+                <a:cs typeface="Pretendard" pitchFamily="34" charset="-120"/>
+              </a:rPr>
               <a:t>크리딜   |   </a:t>
             </a:r>
             <a:endParaRPr lang="en-US" sz="800" dirty="0"/>
@@ -8169,7 +8235,7 @@
       </p:sp>
       <p:sp>
         <p:nvSpPr>
-          <p:cNvPr id="17" name="Text 15"/>
+          <p:cNvPr id="19" name="Text 17"/>
           <p:cNvSpPr/>
           <p:nvPr/>
         </p:nvSpPr>

--- a/docs/test/stress/e2e-outputs/income_basic_pr01.pptx
+++ b/docs/test/stress/e2e-outputs/income_basic_pr01.pptx
@@ -1905,7 +1905,7 @@
                 <a:ea typeface="Arial" pitchFamily="34" charset="-122"/>
                 <a:cs typeface="Arial" pitchFamily="34" charset="-120"/>
               </a:rPr>
-              <a:t>BASIC IM</a:t>
+              <a:t>INVESTMENT MEMORANDUM</a:t>
             </a:r>
             <a:endParaRPr lang="en-US" sz="1000" dirty="0"/>
           </a:p>
@@ -4660,7 +4660,7 @@
                 <a:ea typeface="Pretendard" pitchFamily="34" charset="-122"/>
                 <a:cs typeface="Pretendard" pitchFamily="34" charset="-120"/>
               </a:rPr>
-              <a:t>원금 안전판: 핵심권역 핵심 입지 및 우량 대지 지분 가치로 하방 경직성 확보</a:t>
+              <a:t>입지 분석: 핵심권역 소재 자산의 입지 특성 및 대지 지분 가치 확인 필요</a:t>
             </a:r>
             <a:endParaRPr lang="en-US" sz="1150" dirty="0"/>
           </a:p>
@@ -4792,7 +4792,7 @@
                 <a:ea typeface="Pretendard" pitchFamily="34" charset="-122"/>
                 <a:cs typeface="Pretendard" pitchFamily="34" charset="-120"/>
               </a:rPr>
-              <a:t>수익 안정성: 매매 시장 적정가 수준 대비 안정적 월 임대수익 창출 기반</a:t>
+              <a:t>수익 구조: 매매 시장 적정가 수준 대비 임대수익 현황 분석 필요</a:t>
             </a:r>
             <a:endParaRPr lang="en-US" sz="1150" dirty="0"/>
           </a:p>
@@ -4924,7 +4924,7 @@
                 <a:ea typeface="Pretendard" pitchFamily="34" charset="-122"/>
                 <a:cs typeface="Pretendard" pitchFamily="34" charset="-120"/>
               </a:rPr>
-              <a:t>미래 가치: 향후 권역 지가 상승 및 공법상 밸류업을 통한 자본이득 실현 가능</a:t>
+              <a:t>향후 검토: 권역 개발 동향 및 공법상 변경 가능성 확인 필요</a:t>
             </a:r>
             <a:endParaRPr lang="en-US" sz="1150" dirty="0"/>
           </a:p>
@@ -8832,7 +8832,7 @@
         <p:spPr>
           <a:xfrm>
             <a:off x="786384" y="1792224"/>
-            <a:ext cx="384048" cy="384048"/>
+            <a:ext cx="438912" cy="438912"/>
           </a:xfrm>
           <a:prstGeom prst="ellipse">
             <a:avLst/>
@@ -8852,7 +8852,7 @@
         <p:spPr>
           <a:xfrm>
             <a:off x="786384" y="1792224"/>
-            <a:ext cx="384048" cy="384048"/>
+            <a:ext cx="438912" cy="438912"/>
           </a:xfrm>
           <a:prstGeom prst="rect">
             <a:avLst/>
@@ -8868,7 +8868,7 @@
               <a:buNone/>
             </a:pPr>
             <a:r>
-              <a:rPr lang="en-US" sz="1300" b="1" dirty="0">
+              <a:rPr lang="en-US" sz="1400" b="1" dirty="0">
                 <a:solidFill>
                   <a:srgbClr val="FFFFFF"/>
                 </a:solidFill>
@@ -8876,9 +8876,9 @@
                 <a:ea typeface="Arial" pitchFamily="34" charset="-122"/>
                 <a:cs typeface="Arial" pitchFamily="34" charset="-120"/>
               </a:rPr>
-              <a:t>STEP 1</a:t>
-            </a:r>
-            <a:endParaRPr lang="en-US" sz="1300" dirty="0"/>
+              <a:t>01</a:t>
+            </a:r>
+            <a:endParaRPr lang="en-US" sz="1400" dirty="0"/>
           </a:p>
         </p:txBody>
       </p:sp>
@@ -8915,7 +8915,7 @@
                 <a:ea typeface="Pretendard" pitchFamily="34" charset="-122"/>
                 <a:cs typeface="Pretendard" pitchFamily="34" charset="-120"/>
               </a:rPr>
-              <a:t>현장 실사 및 임대차계약서 원본 확인을 권장합니다.</a:t>
+              <a:t>1단계</a:t>
             </a:r>
             <a:endParaRPr lang="en-US" sz="1600" dirty="0"/>
           </a:p>
@@ -8941,6 +8941,23 @@
         <p:txBody>
           <a:bodyPr wrap="square" rtlCol="0" anchor="t"/>
           <a:lstStyle/>
+          <a:p>
+            <a:pPr indent="0" marL="0">
+              <a:buNone/>
+            </a:pPr>
+            <a:r>
+              <a:rPr lang="en-US" sz="1100" dirty="0">
+                <a:solidFill>
+                  <a:srgbClr val="10161F"/>
+                </a:solidFill>
+                <a:latin typeface="Pretendard" pitchFamily="34" charset="0"/>
+                <a:ea typeface="Pretendard" pitchFamily="34" charset="-122"/>
+                <a:cs typeface="Pretendard" pitchFamily="34" charset="-120"/>
+              </a:rPr>
+              <a:t>현장 실사 및 임대차계약서 원본 확인을 권장합니다.</a:t>
+            </a:r>
+            <a:endParaRPr lang="en-US" sz="1100" dirty="0"/>
+          </a:p>
           <a:p>
             <a:pPr indent="0" marL="0">
               <a:buNone/>

--- a/docs/test/stress/e2e-outputs/income_basic_pr01.pptx
+++ b/docs/test/stress/e2e-outputs/income_basic_pr01.pptx
@@ -14877,7 +14877,7 @@
                 <a:ea typeface="Pretendard" pitchFamily="34" charset="-122"/>
                 <a:cs typeface="Pretendard" pitchFamily="34" charset="-120"/>
               </a:rPr>
-              <a:t>연 순영업소득(NOI) 약 7.14억 원, 매입 Cap Rate 4.62%입니다. 실투자금: 약 69억 원</a:t>
+              <a:t>연 순영업소득(NOI) 약 7.14억 원, 매입 Cap Rate 4.62%입니다.</a:t>
             </a:r>
             <a:endParaRPr lang="en-US" sz="930" dirty="0"/>
           </a:p>
